--- a/presentation/Aurelia_Cruise_Project_Presentation.pptx
+++ b/presentation/Aurelia_Cruise_Project_Presentation.pptx
@@ -5,31 +5,41 @@
     <p:sldMasterId id="2147483648" r:id="rId1"/>
   </p:sldMasterIdLst>
   <p:sldIdLst>
-    <p:sldId id="256" r:id="rId7"/>
-    <p:sldId id="257" r:id="rId8"/>
-    <p:sldId id="258" r:id="rId9"/>
-    <p:sldId id="259" r:id="rId10"/>
-    <p:sldId id="260" r:id="rId11"/>
-    <p:sldId id="261" r:id="rId12"/>
-    <p:sldId id="262" r:id="rId13"/>
-    <p:sldId id="263" r:id="rId14"/>
-    <p:sldId id="264" r:id="rId15"/>
-    <p:sldId id="265" r:id="rId16"/>
-    <p:sldId id="266" r:id="rId17"/>
-    <p:sldId id="267" r:id="rId18"/>
-    <p:sldId id="268" r:id="rId19"/>
-    <p:sldId id="269" r:id="rId20"/>
-    <p:sldId id="270" r:id="rId21"/>
-    <p:sldId id="271" r:id="rId22"/>
-    <p:sldId id="272" r:id="rId23"/>
-    <p:sldId id="273" r:id="rId24"/>
-    <p:sldId id="274" r:id="rId25"/>
-    <p:sldId id="275" r:id="rId26"/>
-    <p:sldId id="276" r:id="rId27"/>
-    <p:sldId id="277" r:id="rId28"/>
-    <p:sldId id="278" r:id="rId29"/>
-    <p:sldId id="279" r:id="rId30"/>
-    <p:sldId id="280" r:id="rId31"/>
+    <p:sldId id="256" r:id="rId2"/>
+    <p:sldId id="293" r:id="rId3"/>
+    <p:sldId id="267" r:id="rId4"/>
+    <p:sldId id="266" r:id="rId5"/>
+    <p:sldId id="268" r:id="rId6"/>
+    <p:sldId id="269" r:id="rId7"/>
+    <p:sldId id="270" r:id="rId8"/>
+    <p:sldId id="271" r:id="rId9"/>
+    <p:sldId id="272" r:id="rId10"/>
+    <p:sldId id="290" r:id="rId11"/>
+    <p:sldId id="284" r:id="rId12"/>
+    <p:sldId id="277" r:id="rId13"/>
+    <p:sldId id="281" r:id="rId14"/>
+    <p:sldId id="258" r:id="rId15"/>
+    <p:sldId id="288" r:id="rId16"/>
+    <p:sldId id="287" r:id="rId17"/>
+    <p:sldId id="289" r:id="rId18"/>
+    <p:sldId id="282" r:id="rId19"/>
+    <p:sldId id="292" r:id="rId20"/>
+    <p:sldId id="259" r:id="rId21"/>
+    <p:sldId id="260" r:id="rId22"/>
+    <p:sldId id="291" r:id="rId23"/>
+    <p:sldId id="261" r:id="rId24"/>
+    <p:sldId id="262" r:id="rId25"/>
+    <p:sldId id="263" r:id="rId26"/>
+    <p:sldId id="264" r:id="rId27"/>
+    <p:sldId id="265" r:id="rId28"/>
+    <p:sldId id="283" r:id="rId29"/>
+    <p:sldId id="285" r:id="rId30"/>
+    <p:sldId id="273" r:id="rId31"/>
+    <p:sldId id="274" r:id="rId32"/>
+    <p:sldId id="276" r:id="rId33"/>
+    <p:sldId id="279" r:id="rId34"/>
+    <p:sldId id="286" r:id="rId35"/>
+    <p:sldId id="280" r:id="rId36"/>
   </p:sldIdLst>
   <p:sldSz cx="9144000" cy="6858000" type="screen4x3"/>
   <p:notesSz cx="6858000" cy="9144000"/>
@@ -128,6 +138,22 @@
       </a:defRPr>
     </a:lvl9pPr>
   </p:defaultTextStyle>
+  <p:extLst>
+    <p:ext uri="{EFAFB233-063F-42B5-8137-9DF3F51BA10A}">
+      <p15:sldGuideLst xmlns:p15="http://schemas.microsoft.com/office/powerpoint/2012/main">
+        <p15:guide id="1" orient="horz" pos="2160">
+          <p15:clr>
+            <a:srgbClr val="A4A3A4"/>
+          </p15:clr>
+        </p15:guide>
+        <p15:guide id="2" pos="2880">
+          <p15:clr>
+            <a:srgbClr val="A4A3A4"/>
+          </p15:clr>
+        </p15:guide>
+      </p15:sldGuideLst>
+    </p:ext>
+  </p:extLst>
 </p:presentation>
 </file>
 
@@ -169,10 +195,9 @@
           <a:lstStyle/>
           <a:p>
             <a:r>
-              <a:rPr lang="en-US" smtClean="0"/>
+              <a:rPr lang="en-US"/>
               <a:t>Click to edit Master title style</a:t>
             </a:r>
-            <a:endParaRPr lang="en-US"/>
           </a:p>
         </p:txBody>
       </p:sp>
@@ -288,10 +313,9 @@
           </a:lstStyle>
           <a:p>
             <a:r>
-              <a:rPr lang="en-US" smtClean="0"/>
+              <a:rPr lang="en-US"/>
               <a:t>Click to edit Master subtitle style</a:t>
             </a:r>
-            <a:endParaRPr lang="en-US"/>
           </a:p>
         </p:txBody>
       </p:sp>
@@ -312,7 +336,7 @@
           <a:p>
             <a:fld id="{5BCAD085-E8A6-8845-BD4E-CB4CCA059FC4}" type="datetimeFigureOut">
               <a:rPr lang="en-US" smtClean="0"/>
-              <a:t>1/27/13</a:t>
+              <a:t>6/26/2025</a:t>
             </a:fld>
             <a:endParaRPr lang="en-US"/>
           </a:p>
@@ -406,10 +430,9 @@
           <a:lstStyle/>
           <a:p>
             <a:r>
-              <a:rPr lang="en-US" smtClean="0"/>
+              <a:rPr lang="en-US"/>
               <a:t>Click to edit Master title style</a:t>
             </a:r>
-            <a:endParaRPr lang="en-US"/>
           </a:p>
         </p:txBody>
       </p:sp>
@@ -430,38 +453,37 @@
           <a:p>
             <a:pPr lvl="0"/>
             <a:r>
-              <a:rPr lang="en-US" smtClean="0"/>
+              <a:rPr lang="en-US"/>
               <a:t>Click to edit Master text styles</a:t>
             </a:r>
           </a:p>
           <a:p>
             <a:pPr lvl="1"/>
             <a:r>
-              <a:rPr lang="en-US" smtClean="0"/>
+              <a:rPr lang="en-US"/>
               <a:t>Second level</a:t>
             </a:r>
           </a:p>
           <a:p>
             <a:pPr lvl="2"/>
             <a:r>
-              <a:rPr lang="en-US" smtClean="0"/>
+              <a:rPr lang="en-US"/>
               <a:t>Third level</a:t>
             </a:r>
           </a:p>
           <a:p>
             <a:pPr lvl="3"/>
             <a:r>
-              <a:rPr lang="en-US" smtClean="0"/>
+              <a:rPr lang="en-US"/>
               <a:t>Fourth level</a:t>
             </a:r>
           </a:p>
           <a:p>
             <a:pPr lvl="4"/>
             <a:r>
-              <a:rPr lang="en-US" smtClean="0"/>
+              <a:rPr lang="en-US"/>
               <a:t>Fifth level</a:t>
             </a:r>
-            <a:endParaRPr lang="en-US"/>
           </a:p>
         </p:txBody>
       </p:sp>
@@ -482,7 +504,7 @@
           <a:p>
             <a:fld id="{5BCAD085-E8A6-8845-BD4E-CB4CCA059FC4}" type="datetimeFigureOut">
               <a:rPr lang="en-US" smtClean="0"/>
-              <a:t>1/27/13</a:t>
+              <a:t>6/26/2025</a:t>
             </a:fld>
             <a:endParaRPr lang="en-US"/>
           </a:p>
@@ -581,10 +603,9 @@
           <a:lstStyle/>
           <a:p>
             <a:r>
-              <a:rPr lang="en-US" smtClean="0"/>
+              <a:rPr lang="en-US"/>
               <a:t>Click to edit Master title style</a:t>
             </a:r>
-            <a:endParaRPr lang="en-US"/>
           </a:p>
         </p:txBody>
       </p:sp>
@@ -610,38 +631,37 @@
           <a:p>
             <a:pPr lvl="0"/>
             <a:r>
-              <a:rPr lang="en-US" smtClean="0"/>
+              <a:rPr lang="en-US"/>
               <a:t>Click to edit Master text styles</a:t>
             </a:r>
           </a:p>
           <a:p>
             <a:pPr lvl="1"/>
             <a:r>
-              <a:rPr lang="en-US" smtClean="0"/>
+              <a:rPr lang="en-US"/>
               <a:t>Second level</a:t>
             </a:r>
           </a:p>
           <a:p>
             <a:pPr lvl="2"/>
             <a:r>
-              <a:rPr lang="en-US" smtClean="0"/>
+              <a:rPr lang="en-US"/>
               <a:t>Third level</a:t>
             </a:r>
           </a:p>
           <a:p>
             <a:pPr lvl="3"/>
             <a:r>
-              <a:rPr lang="en-US" smtClean="0"/>
+              <a:rPr lang="en-US"/>
               <a:t>Fourth level</a:t>
             </a:r>
           </a:p>
           <a:p>
             <a:pPr lvl="4"/>
             <a:r>
-              <a:rPr lang="en-US" smtClean="0"/>
+              <a:rPr lang="en-US"/>
               <a:t>Fifth level</a:t>
             </a:r>
-            <a:endParaRPr lang="en-US"/>
           </a:p>
         </p:txBody>
       </p:sp>
@@ -662,7 +682,7 @@
           <a:p>
             <a:fld id="{5BCAD085-E8A6-8845-BD4E-CB4CCA059FC4}" type="datetimeFigureOut">
               <a:rPr lang="en-US" smtClean="0"/>
-              <a:t>1/27/13</a:t>
+              <a:t>6/26/2025</a:t>
             </a:fld>
             <a:endParaRPr lang="en-US"/>
           </a:p>
@@ -756,10 +776,9 @@
           <a:lstStyle/>
           <a:p>
             <a:r>
-              <a:rPr lang="en-US" smtClean="0"/>
+              <a:rPr lang="en-US"/>
               <a:t>Click to edit Master title style</a:t>
             </a:r>
-            <a:endParaRPr lang="en-US"/>
           </a:p>
         </p:txBody>
       </p:sp>
@@ -780,38 +799,37 @@
           <a:p>
             <a:pPr lvl="0"/>
             <a:r>
-              <a:rPr lang="en-US" smtClean="0"/>
+              <a:rPr lang="en-US"/>
               <a:t>Click to edit Master text styles</a:t>
             </a:r>
           </a:p>
           <a:p>
             <a:pPr lvl="1"/>
             <a:r>
-              <a:rPr lang="en-US" smtClean="0"/>
+              <a:rPr lang="en-US"/>
               <a:t>Second level</a:t>
             </a:r>
           </a:p>
           <a:p>
             <a:pPr lvl="2"/>
             <a:r>
-              <a:rPr lang="en-US" smtClean="0"/>
+              <a:rPr lang="en-US"/>
               <a:t>Third level</a:t>
             </a:r>
           </a:p>
           <a:p>
             <a:pPr lvl="3"/>
             <a:r>
-              <a:rPr lang="en-US" smtClean="0"/>
+              <a:rPr lang="en-US"/>
               <a:t>Fourth level</a:t>
             </a:r>
           </a:p>
           <a:p>
             <a:pPr lvl="4"/>
             <a:r>
-              <a:rPr lang="en-US" smtClean="0"/>
+              <a:rPr lang="en-US"/>
               <a:t>Fifth level</a:t>
             </a:r>
-            <a:endParaRPr lang="en-US"/>
           </a:p>
         </p:txBody>
       </p:sp>
@@ -832,7 +850,7 @@
           <a:p>
             <a:fld id="{5BCAD085-E8A6-8845-BD4E-CB4CCA059FC4}" type="datetimeFigureOut">
               <a:rPr lang="en-US" smtClean="0"/>
-              <a:t>1/27/13</a:t>
+              <a:t>6/26/2025</a:t>
             </a:fld>
             <a:endParaRPr lang="en-US"/>
           </a:p>
@@ -935,10 +953,9 @@
           </a:lstStyle>
           <a:p>
             <a:r>
-              <a:rPr lang="en-US" smtClean="0"/>
+              <a:rPr lang="en-US"/>
               <a:t>Click to edit Master title style</a:t>
             </a:r>
-            <a:endParaRPr lang="en-US"/>
           </a:p>
         </p:txBody>
       </p:sp>
@@ -1055,7 +1072,7 @@
           <a:p>
             <a:pPr lvl="0"/>
             <a:r>
-              <a:rPr lang="en-US" smtClean="0"/>
+              <a:rPr lang="en-US"/>
               <a:t>Click to edit Master text styles</a:t>
             </a:r>
           </a:p>
@@ -1078,7 +1095,7 @@
           <a:p>
             <a:fld id="{5BCAD085-E8A6-8845-BD4E-CB4CCA059FC4}" type="datetimeFigureOut">
               <a:rPr lang="en-US" smtClean="0"/>
-              <a:t>1/27/13</a:t>
+              <a:t>6/26/2025</a:t>
             </a:fld>
             <a:endParaRPr lang="en-US"/>
           </a:p>
@@ -1172,10 +1189,9 @@
           <a:lstStyle/>
           <a:p>
             <a:r>
-              <a:rPr lang="en-US" smtClean="0"/>
+              <a:rPr lang="en-US"/>
               <a:t>Click to edit Master title style</a:t>
             </a:r>
-            <a:endParaRPr lang="en-US"/>
           </a:p>
         </p:txBody>
       </p:sp>
@@ -1229,38 +1245,37 @@
           <a:p>
             <a:pPr lvl="0"/>
             <a:r>
-              <a:rPr lang="en-US" smtClean="0"/>
+              <a:rPr lang="en-US"/>
               <a:t>Click to edit Master text styles</a:t>
             </a:r>
           </a:p>
           <a:p>
             <a:pPr lvl="1"/>
             <a:r>
-              <a:rPr lang="en-US" smtClean="0"/>
+              <a:rPr lang="en-US"/>
               <a:t>Second level</a:t>
             </a:r>
           </a:p>
           <a:p>
             <a:pPr lvl="2"/>
             <a:r>
-              <a:rPr lang="en-US" smtClean="0"/>
+              <a:rPr lang="en-US"/>
               <a:t>Third level</a:t>
             </a:r>
           </a:p>
           <a:p>
             <a:pPr lvl="3"/>
             <a:r>
-              <a:rPr lang="en-US" smtClean="0"/>
+              <a:rPr lang="en-US"/>
               <a:t>Fourth level</a:t>
             </a:r>
           </a:p>
           <a:p>
             <a:pPr lvl="4"/>
             <a:r>
-              <a:rPr lang="en-US" smtClean="0"/>
+              <a:rPr lang="en-US"/>
               <a:t>Fifth level</a:t>
             </a:r>
-            <a:endParaRPr lang="en-US"/>
           </a:p>
         </p:txBody>
       </p:sp>
@@ -1314,38 +1329,37 @@
           <a:p>
             <a:pPr lvl="0"/>
             <a:r>
-              <a:rPr lang="en-US" smtClean="0"/>
+              <a:rPr lang="en-US"/>
               <a:t>Click to edit Master text styles</a:t>
             </a:r>
           </a:p>
           <a:p>
             <a:pPr lvl="1"/>
             <a:r>
-              <a:rPr lang="en-US" smtClean="0"/>
+              <a:rPr lang="en-US"/>
               <a:t>Second level</a:t>
             </a:r>
           </a:p>
           <a:p>
             <a:pPr lvl="2"/>
             <a:r>
-              <a:rPr lang="en-US" smtClean="0"/>
+              <a:rPr lang="en-US"/>
               <a:t>Third level</a:t>
             </a:r>
           </a:p>
           <a:p>
             <a:pPr lvl="3"/>
             <a:r>
-              <a:rPr lang="en-US" smtClean="0"/>
+              <a:rPr lang="en-US"/>
               <a:t>Fourth level</a:t>
             </a:r>
           </a:p>
           <a:p>
             <a:pPr lvl="4"/>
             <a:r>
-              <a:rPr lang="en-US" smtClean="0"/>
+              <a:rPr lang="en-US"/>
               <a:t>Fifth level</a:t>
             </a:r>
-            <a:endParaRPr lang="en-US"/>
           </a:p>
         </p:txBody>
       </p:sp>
@@ -1366,7 +1380,7 @@
           <a:p>
             <a:fld id="{5BCAD085-E8A6-8845-BD4E-CB4CCA059FC4}" type="datetimeFigureOut">
               <a:rPr lang="en-US" smtClean="0"/>
-              <a:t>1/27/13</a:t>
+              <a:t>6/26/2025</a:t>
             </a:fld>
             <a:endParaRPr lang="en-US"/>
           </a:p>
@@ -1464,10 +1478,9 @@
           </a:lstStyle>
           <a:p>
             <a:r>
-              <a:rPr lang="en-US" smtClean="0"/>
+              <a:rPr lang="en-US"/>
               <a:t>Click to edit Master title style</a:t>
             </a:r>
-            <a:endParaRPr lang="en-US"/>
           </a:p>
         </p:txBody>
       </p:sp>
@@ -1530,7 +1543,7 @@
           <a:p>
             <a:pPr lvl="0"/>
             <a:r>
-              <a:rPr lang="en-US" smtClean="0"/>
+              <a:rPr lang="en-US"/>
               <a:t>Click to edit Master text styles</a:t>
             </a:r>
           </a:p>
@@ -1586,38 +1599,37 @@
           <a:p>
             <a:pPr lvl="0"/>
             <a:r>
-              <a:rPr lang="en-US" smtClean="0"/>
+              <a:rPr lang="en-US"/>
               <a:t>Click to edit Master text styles</a:t>
             </a:r>
           </a:p>
           <a:p>
             <a:pPr lvl="1"/>
             <a:r>
-              <a:rPr lang="en-US" smtClean="0"/>
+              <a:rPr lang="en-US"/>
               <a:t>Second level</a:t>
             </a:r>
           </a:p>
           <a:p>
             <a:pPr lvl="2"/>
             <a:r>
-              <a:rPr lang="en-US" smtClean="0"/>
+              <a:rPr lang="en-US"/>
               <a:t>Third level</a:t>
             </a:r>
           </a:p>
           <a:p>
             <a:pPr lvl="3"/>
             <a:r>
-              <a:rPr lang="en-US" smtClean="0"/>
+              <a:rPr lang="en-US"/>
               <a:t>Fourth level</a:t>
             </a:r>
           </a:p>
           <a:p>
             <a:pPr lvl="4"/>
             <a:r>
-              <a:rPr lang="en-US" smtClean="0"/>
+              <a:rPr lang="en-US"/>
               <a:t>Fifth level</a:t>
             </a:r>
-            <a:endParaRPr lang="en-US"/>
           </a:p>
         </p:txBody>
       </p:sp>
@@ -1680,7 +1692,7 @@
           <a:p>
             <a:pPr lvl="0"/>
             <a:r>
-              <a:rPr lang="en-US" smtClean="0"/>
+              <a:rPr lang="en-US"/>
               <a:t>Click to edit Master text styles</a:t>
             </a:r>
           </a:p>
@@ -1736,38 +1748,37 @@
           <a:p>
             <a:pPr lvl="0"/>
             <a:r>
-              <a:rPr lang="en-US" smtClean="0"/>
+              <a:rPr lang="en-US"/>
               <a:t>Click to edit Master text styles</a:t>
             </a:r>
           </a:p>
           <a:p>
             <a:pPr lvl="1"/>
             <a:r>
-              <a:rPr lang="en-US" smtClean="0"/>
+              <a:rPr lang="en-US"/>
               <a:t>Second level</a:t>
             </a:r>
           </a:p>
           <a:p>
             <a:pPr lvl="2"/>
             <a:r>
-              <a:rPr lang="en-US" smtClean="0"/>
+              <a:rPr lang="en-US"/>
               <a:t>Third level</a:t>
             </a:r>
           </a:p>
           <a:p>
             <a:pPr lvl="3"/>
             <a:r>
-              <a:rPr lang="en-US" smtClean="0"/>
+              <a:rPr lang="en-US"/>
               <a:t>Fourth level</a:t>
             </a:r>
           </a:p>
           <a:p>
             <a:pPr lvl="4"/>
             <a:r>
-              <a:rPr lang="en-US" smtClean="0"/>
+              <a:rPr lang="en-US"/>
               <a:t>Fifth level</a:t>
             </a:r>
-            <a:endParaRPr lang="en-US"/>
           </a:p>
         </p:txBody>
       </p:sp>
@@ -1788,7 +1799,7 @@
           <a:p>
             <a:fld id="{5BCAD085-E8A6-8845-BD4E-CB4CCA059FC4}" type="datetimeFigureOut">
               <a:rPr lang="en-US" smtClean="0"/>
-              <a:t>1/27/13</a:t>
+              <a:t>6/26/2025</a:t>
             </a:fld>
             <a:endParaRPr lang="en-US"/>
           </a:p>
@@ -1882,10 +1893,9 @@
           <a:lstStyle/>
           <a:p>
             <a:r>
-              <a:rPr lang="en-US" smtClean="0"/>
+              <a:rPr lang="en-US"/>
               <a:t>Click to edit Master title style</a:t>
             </a:r>
-            <a:endParaRPr lang="en-US"/>
           </a:p>
         </p:txBody>
       </p:sp>
@@ -1906,7 +1916,7 @@
           <a:p>
             <a:fld id="{5BCAD085-E8A6-8845-BD4E-CB4CCA059FC4}" type="datetimeFigureOut">
               <a:rPr lang="en-US" smtClean="0"/>
-              <a:t>1/27/13</a:t>
+              <a:t>6/26/2025</a:t>
             </a:fld>
             <a:endParaRPr lang="en-US"/>
           </a:p>
@@ -2001,7 +2011,7 @@
           <a:p>
             <a:fld id="{5BCAD085-E8A6-8845-BD4E-CB4CCA059FC4}" type="datetimeFigureOut">
               <a:rPr lang="en-US" smtClean="0"/>
-              <a:t>1/27/13</a:t>
+              <a:t>6/26/2025</a:t>
             </a:fld>
             <a:endParaRPr lang="en-US"/>
           </a:p>
@@ -2104,10 +2114,9 @@
           </a:lstStyle>
           <a:p>
             <a:r>
-              <a:rPr lang="en-US" smtClean="0"/>
+              <a:rPr lang="en-US"/>
               <a:t>Click to edit Master title style</a:t>
             </a:r>
-            <a:endParaRPr lang="en-US"/>
           </a:p>
         </p:txBody>
       </p:sp>
@@ -2161,38 +2170,37 @@
           <a:p>
             <a:pPr lvl="0"/>
             <a:r>
-              <a:rPr lang="en-US" smtClean="0"/>
+              <a:rPr lang="en-US"/>
               <a:t>Click to edit Master text styles</a:t>
             </a:r>
           </a:p>
           <a:p>
             <a:pPr lvl="1"/>
             <a:r>
-              <a:rPr lang="en-US" smtClean="0"/>
+              <a:rPr lang="en-US"/>
               <a:t>Second level</a:t>
             </a:r>
           </a:p>
           <a:p>
             <a:pPr lvl="2"/>
             <a:r>
-              <a:rPr lang="en-US" smtClean="0"/>
+              <a:rPr lang="en-US"/>
               <a:t>Third level</a:t>
             </a:r>
           </a:p>
           <a:p>
             <a:pPr lvl="3"/>
             <a:r>
-              <a:rPr lang="en-US" smtClean="0"/>
+              <a:rPr lang="en-US"/>
               <a:t>Fourth level</a:t>
             </a:r>
           </a:p>
           <a:p>
             <a:pPr lvl="4"/>
             <a:r>
-              <a:rPr lang="en-US" smtClean="0"/>
+              <a:rPr lang="en-US"/>
               <a:t>Fifth level</a:t>
             </a:r>
-            <a:endParaRPr lang="en-US"/>
           </a:p>
         </p:txBody>
       </p:sp>
@@ -2255,7 +2263,7 @@
           <a:p>
             <a:pPr lvl="0"/>
             <a:r>
-              <a:rPr lang="en-US" smtClean="0"/>
+              <a:rPr lang="en-US"/>
               <a:t>Click to edit Master text styles</a:t>
             </a:r>
           </a:p>
@@ -2278,7 +2286,7 @@
           <a:p>
             <a:fld id="{5BCAD085-E8A6-8845-BD4E-CB4CCA059FC4}" type="datetimeFigureOut">
               <a:rPr lang="en-US" smtClean="0"/>
-              <a:t>1/27/13</a:t>
+              <a:t>6/26/2025</a:t>
             </a:fld>
             <a:endParaRPr lang="en-US"/>
           </a:p>
@@ -2381,10 +2389,9 @@
           </a:lstStyle>
           <a:p>
             <a:r>
-              <a:rPr lang="en-US" smtClean="0"/>
+              <a:rPr lang="en-US"/>
               <a:t>Click to edit Master title style</a:t>
             </a:r>
-            <a:endParaRPr lang="en-US"/>
           </a:p>
         </p:txBody>
       </p:sp>
@@ -2508,7 +2515,7 @@
           <a:p>
             <a:pPr lvl="0"/>
             <a:r>
-              <a:rPr lang="en-US" smtClean="0"/>
+              <a:rPr lang="en-US"/>
               <a:t>Click to edit Master text styles</a:t>
             </a:r>
           </a:p>
@@ -2531,7 +2538,7 @@
           <a:p>
             <a:fld id="{5BCAD085-E8A6-8845-BD4E-CB4CCA059FC4}" type="datetimeFigureOut">
               <a:rPr lang="en-US" smtClean="0"/>
-              <a:t>1/27/13</a:t>
+              <a:t>6/26/2025</a:t>
             </a:fld>
             <a:endParaRPr lang="en-US"/>
           </a:p>
@@ -2640,10 +2647,9 @@
           <a:lstStyle/>
           <a:p>
             <a:r>
-              <a:rPr lang="en-US" smtClean="0"/>
+              <a:rPr lang="en-US"/>
               <a:t>Click to edit Master title style</a:t>
             </a:r>
-            <a:endParaRPr lang="en-US"/>
           </a:p>
         </p:txBody>
       </p:sp>
@@ -2674,38 +2680,37 @@
           <a:p>
             <a:pPr lvl="0"/>
             <a:r>
-              <a:rPr lang="en-US" smtClean="0"/>
+              <a:rPr lang="en-US"/>
               <a:t>Click to edit Master text styles</a:t>
             </a:r>
           </a:p>
           <a:p>
             <a:pPr lvl="1"/>
             <a:r>
-              <a:rPr lang="en-US" smtClean="0"/>
+              <a:rPr lang="en-US"/>
               <a:t>Second level</a:t>
             </a:r>
           </a:p>
           <a:p>
             <a:pPr lvl="2"/>
             <a:r>
-              <a:rPr lang="en-US" smtClean="0"/>
+              <a:rPr lang="en-US"/>
               <a:t>Third level</a:t>
             </a:r>
           </a:p>
           <a:p>
             <a:pPr lvl="3"/>
             <a:r>
-              <a:rPr lang="en-US" smtClean="0"/>
+              <a:rPr lang="en-US"/>
               <a:t>Fourth level</a:t>
             </a:r>
           </a:p>
           <a:p>
             <a:pPr lvl="4"/>
             <a:r>
-              <a:rPr lang="en-US" smtClean="0"/>
+              <a:rPr lang="en-US"/>
               <a:t>Fifth level</a:t>
             </a:r>
-            <a:endParaRPr lang="en-US"/>
           </a:p>
         </p:txBody>
       </p:sp>
@@ -2744,7 +2749,7 @@
           <a:p>
             <a:fld id="{5BCAD085-E8A6-8845-BD4E-CB4CCA059FC4}" type="datetimeFigureOut">
               <a:rPr lang="en-US" smtClean="0"/>
-              <a:t>1/27/13</a:t>
+              <a:t>6/26/2025</a:t>
             </a:fld>
             <a:endParaRPr lang="en-US"/>
           </a:p>
@@ -3103,7 +3108,7 @@
 </file>
 
 <file path=ppt/slides/slide1.xml><?xml version="1.0" encoding="utf-8"?>
-<p:sld xmlns:a="http://schemas.openxmlformats.org/drawingml/2006/main" xmlns:p="http://schemas.openxmlformats.org/presentationml/2006/main" xmlns:r="http://schemas.openxmlformats.org/officeDocument/2006/relationships">
+<p:sld xmlns:a="http://schemas.openxmlformats.org/drawingml/2006/main" xmlns:r="http://schemas.openxmlformats.org/officeDocument/2006/relationships" xmlns:p="http://schemas.openxmlformats.org/presentationml/2006/main">
   <p:cSld>
     <p:spTree>
       <p:nvGrpSpPr>
@@ -3111,7 +3116,44 @@
         <p:cNvGrpSpPr/>
         <p:nvPr/>
       </p:nvGrpSpPr>
-      <p:grpSpPr/>
+      <p:grpSpPr>
+        <a:xfrm>
+          <a:off x="0" y="0"/>
+          <a:ext cx="0" cy="0"/>
+          <a:chOff x="0" y="0"/>
+          <a:chExt cx="0" cy="0"/>
+        </a:xfrm>
+      </p:grpSpPr>
+      <p:pic>
+        <p:nvPicPr>
+          <p:cNvPr id="5" name="Picture 4">
+            <a:extLst>
+              <a:ext uri="{FF2B5EF4-FFF2-40B4-BE49-F238E27FC236}">
+                <a16:creationId xmlns:a16="http://schemas.microsoft.com/office/drawing/2014/main" id="{E2776672-5A4A-F600-D56D-44D8CD13122D}"/>
+              </a:ext>
+            </a:extLst>
+          </p:cNvPr>
+          <p:cNvPicPr>
+            <a:picLocks noChangeAspect="1"/>
+          </p:cNvPicPr>
+          <p:nvPr/>
+        </p:nvPicPr>
+        <p:blipFill>
+          <a:blip r:embed="rId2"/>
+          <a:stretch>
+            <a:fillRect/>
+          </a:stretch>
+        </p:blipFill>
+        <p:spPr>
+          <a:xfrm>
+            <a:off x="0" y="0"/>
+            <a:ext cx="9144000" cy="6858000"/>
+          </a:xfrm>
+          <a:prstGeom prst="rect">
+            <a:avLst/>
+          </a:prstGeom>
+        </p:spPr>
+      </p:pic>
       <p:sp>
         <p:nvSpPr>
           <p:cNvPr id="2" name="Title 1"/>
@@ -3124,10 +3166,17 @@
         </p:nvSpPr>
         <p:spPr/>
         <p:txBody>
-          <a:bodyPr/>
-          <a:lstStyle/>
-          <a:p>
-            <a:r>
+          <a:bodyPr>
+            <a:normAutofit/>
+          </a:bodyPr>
+          <a:lstStyle/>
+          <a:p>
+            <a:r>
+              <a:rPr sz="4000" dirty="0">
+                <a:solidFill>
+                  <a:schemeClr val="bg1"/>
+                </a:solidFill>
+              </a:rPr>
               <a:t>Cruise Project Overview: Aurelia</a:t>
             </a:r>
           </a:p>
@@ -3145,11 +3194,136 @@
         </p:nvSpPr>
         <p:spPr/>
         <p:txBody>
-          <a:bodyPr/>
-          <a:lstStyle/>
-          <a:p>
-            <a:r>
-              <a:t>An elegant cruise management system with modern design, built using React, MongoDB, and Tailwind.</a:t>
+          <a:bodyPr>
+            <a:normAutofit/>
+          </a:bodyPr>
+          <a:lstStyle/>
+          <a:p>
+            <a:pPr marL="0" indent="0" algn="ctr">
+              <a:buNone/>
+            </a:pPr>
+            <a:endParaRPr lang="en-US" sz="1800" dirty="0"/>
+          </a:p>
+          <a:p>
+            <a:pPr marL="0" indent="0" algn="ctr">
+              <a:buNone/>
+            </a:pPr>
+            <a:r>
+              <a:rPr lang="en-US" sz="1800" dirty="0">
+                <a:solidFill>
+                  <a:schemeClr val="bg1"/>
+                </a:solidFill>
+              </a:rPr>
+              <a:t>Welcome to Aurelia, a cutting-edge cruise management system designed to deliver an integrated experience across admin control, user management, service bookings, and customer interactions.</a:t>
+            </a:r>
+            <a:br>
+              <a:rPr lang="en-US" sz="1800" dirty="0">
+                <a:solidFill>
+                  <a:schemeClr val="bg1"/>
+                </a:solidFill>
+              </a:rPr>
+            </a:br>
+            <a:r>
+              <a:rPr lang="en-US" sz="1800" dirty="0">
+                <a:solidFill>
+                  <a:schemeClr val="bg1"/>
+                </a:solidFill>
+              </a:rPr>
+              <a:t>It bridges frontend luxury with backend efficiency, offering a seamless, secure, and scalable platform for both cruise staff and voyagers.</a:t>
+            </a:r>
+          </a:p>
+          <a:p>
+            <a:pPr marL="0" indent="0" algn="ctr">
+              <a:buNone/>
+            </a:pPr>
+            <a:r>
+              <a:rPr lang="en-US" sz="1800" dirty="0">
+                <a:solidFill>
+                  <a:schemeClr val="bg1"/>
+                </a:solidFill>
+              </a:rPr>
+              <a:t>Aurelia is a full-featured cruise management system combining luxury and convenience for voyagers and operators. It is built using the latest tech stack and focuses on performance, elegance, and ease of use.</a:t>
+            </a:r>
+          </a:p>
+          <a:p>
+            <a:endParaRPr lang="en-US" dirty="0"/>
+          </a:p>
+          <a:p>
+            <a:endParaRPr dirty="0"/>
+          </a:p>
+        </p:txBody>
+      </p:sp>
+      <p:cxnSp>
+        <p:nvCxnSpPr>
+          <p:cNvPr id="11" name="Straight Connector 10">
+            <a:extLst>
+              <a:ext uri="{FF2B5EF4-FFF2-40B4-BE49-F238E27FC236}">
+                <a16:creationId xmlns:a16="http://schemas.microsoft.com/office/drawing/2014/main" id="{88A14F9B-C369-25D9-8A08-898DB91670AC}"/>
+              </a:ext>
+            </a:extLst>
+          </p:cNvPr>
+          <p:cNvCxnSpPr/>
+          <p:nvPr/>
+        </p:nvCxnSpPr>
+        <p:spPr>
+          <a:xfrm>
+            <a:off x="546322" y="5439610"/>
+            <a:ext cx="7814734" cy="0"/>
+          </a:xfrm>
+          <a:prstGeom prst="line">
+            <a:avLst/>
+          </a:prstGeom>
+        </p:spPr>
+        <p:style>
+          <a:lnRef idx="2">
+            <a:schemeClr val="accent1"/>
+          </a:lnRef>
+          <a:fillRef idx="0">
+            <a:schemeClr val="accent1"/>
+          </a:fillRef>
+          <a:effectRef idx="1">
+            <a:schemeClr val="accent1"/>
+          </a:effectRef>
+          <a:fontRef idx="minor">
+            <a:schemeClr val="tx1"/>
+          </a:fontRef>
+        </p:style>
+      </p:cxnSp>
+      <p:sp>
+        <p:nvSpPr>
+          <p:cNvPr id="12" name="TextBox 11">
+            <a:extLst>
+              <a:ext uri="{FF2B5EF4-FFF2-40B4-BE49-F238E27FC236}">
+                <a16:creationId xmlns:a16="http://schemas.microsoft.com/office/drawing/2014/main" id="{2A578F37-9646-337B-AE64-F5B5A11DA81A}"/>
+              </a:ext>
+            </a:extLst>
+          </p:cNvPr>
+          <p:cNvSpPr txBox="1"/>
+          <p:nvPr/>
+        </p:nvSpPr>
+        <p:spPr>
+          <a:xfrm>
+            <a:off x="546322" y="5551905"/>
+            <a:ext cx="2527615" cy="400110"/>
+          </a:xfrm>
+          <a:prstGeom prst="rect">
+            <a:avLst/>
+          </a:prstGeom>
+          <a:noFill/>
+        </p:spPr>
+        <p:txBody>
+          <a:bodyPr wrap="none" rtlCol="0">
+            <a:spAutoFit/>
+          </a:bodyPr>
+          <a:lstStyle/>
+          <a:p>
+            <a:r>
+              <a:rPr lang="en-US" sz="2000" dirty="0">
+                <a:solidFill>
+                  <a:schemeClr val="bg1"/>
+                </a:solidFill>
+              </a:rPr>
+              <a:t>Name : Debadrita Paul</a:t>
             </a:r>
           </a:p>
         </p:txBody>
@@ -3163,7 +3337,7 @@
 </file>
 
 <file path=ppt/slides/slide10.xml><?xml version="1.0" encoding="utf-8"?>
-<p:sld xmlns:a="http://schemas.openxmlformats.org/drawingml/2006/main" xmlns:p="http://schemas.openxmlformats.org/presentationml/2006/main" xmlns:r="http://schemas.openxmlformats.org/officeDocument/2006/relationships">
+<p:sld xmlns:a="http://schemas.openxmlformats.org/drawingml/2006/main" xmlns:r="http://schemas.openxmlformats.org/officeDocument/2006/relationships" xmlns:p="http://schemas.openxmlformats.org/presentationml/2006/main">
   <p:cSld>
     <p:spTree>
       <p:nvGrpSpPr>
@@ -3171,10 +3345,53 @@
         <p:cNvGrpSpPr/>
         <p:nvPr/>
       </p:nvGrpSpPr>
-      <p:grpSpPr/>
-      <p:sp>
-        <p:nvSpPr>
-          <p:cNvPr id="2" name="Title 1"/>
+      <p:grpSpPr>
+        <a:xfrm>
+          <a:off x="0" y="0"/>
+          <a:ext cx="0" cy="0"/>
+          <a:chOff x="0" y="0"/>
+          <a:chExt cx="0" cy="0"/>
+        </a:xfrm>
+      </p:grpSpPr>
+      <p:pic>
+        <p:nvPicPr>
+          <p:cNvPr id="4" name="Picture 3">
+            <a:extLst>
+              <a:ext uri="{FF2B5EF4-FFF2-40B4-BE49-F238E27FC236}">
+                <a16:creationId xmlns:a16="http://schemas.microsoft.com/office/drawing/2014/main" id="{AE9D0E16-6094-12B3-EA02-F05C59831EF5}"/>
+              </a:ext>
+            </a:extLst>
+          </p:cNvPr>
+          <p:cNvPicPr>
+            <a:picLocks noChangeAspect="1"/>
+          </p:cNvPicPr>
+          <p:nvPr/>
+        </p:nvPicPr>
+        <p:blipFill>
+          <a:blip r:embed="rId2"/>
+          <a:stretch>
+            <a:fillRect/>
+          </a:stretch>
+        </p:blipFill>
+        <p:spPr>
+          <a:xfrm>
+            <a:off x="0" y="0"/>
+            <a:ext cx="9143999" cy="6858000"/>
+          </a:xfrm>
+          <a:prstGeom prst="rect">
+            <a:avLst/>
+          </a:prstGeom>
+        </p:spPr>
+      </p:pic>
+      <p:sp>
+        <p:nvSpPr>
+          <p:cNvPr id="2" name="Title 1">
+            <a:extLst>
+              <a:ext uri="{FF2B5EF4-FFF2-40B4-BE49-F238E27FC236}">
+                <a16:creationId xmlns:a16="http://schemas.microsoft.com/office/drawing/2014/main" id="{08046B5D-C02D-B826-DB17-CC026C9EFA1F}"/>
+              </a:ext>
+            </a:extLst>
+          </p:cNvPr>
           <p:cNvSpPr>
             <a:spLocks noGrp="1"/>
           </p:cNvSpPr>
@@ -3184,18 +3401,31 @@
         </p:nvSpPr>
         <p:spPr/>
         <p:txBody>
-          <a:bodyPr/>
-          <a:lstStyle/>
-          <a:p>
-            <a:r>
-              <a:t>Supervisor Functionalities</a:t>
-            </a:r>
-          </a:p>
-        </p:txBody>
-      </p:sp>
-      <p:sp>
-        <p:nvSpPr>
-          <p:cNvPr id="3" name="Content Placeholder 2"/>
+          <a:bodyPr>
+            <a:normAutofit fontScale="90000"/>
+          </a:bodyPr>
+          <a:lstStyle/>
+          <a:p>
+            <a:r>
+              <a:rPr lang="en-US" dirty="0">
+                <a:solidFill>
+                  <a:schemeClr val="bg1"/>
+                </a:solidFill>
+              </a:rPr>
+              <a:t>User Feedback and Testimonial Submission</a:t>
+            </a:r>
+          </a:p>
+        </p:txBody>
+      </p:sp>
+      <p:sp>
+        <p:nvSpPr>
+          <p:cNvPr id="3" name="Content Placeholder 2">
+            <a:extLst>
+              <a:ext uri="{FF2B5EF4-FFF2-40B4-BE49-F238E27FC236}">
+                <a16:creationId xmlns:a16="http://schemas.microsoft.com/office/drawing/2014/main" id="{0EF30002-C428-9A6B-C3AD-DA7772525DCA}"/>
+              </a:ext>
+            </a:extLst>
+          </p:cNvPr>
           <p:cNvSpPr>
             <a:spLocks noGrp="1"/>
           </p:cNvSpPr>
@@ -3205,16 +3435,106 @@
         </p:nvSpPr>
         <p:spPr/>
         <p:txBody>
-          <a:bodyPr/>
-          <a:lstStyle/>
-          <a:p>
-            <a:r>
-              <a:t>• Accept stationary item orders placed by voyagers</a:t>
+          <a:bodyPr>
+            <a:normAutofit lnSpcReduction="10000"/>
+          </a:bodyPr>
+          <a:lstStyle/>
+          <a:p>
+            <a:r>
+              <a:rPr lang="en-US" dirty="0">
+                <a:solidFill>
+                  <a:schemeClr val="bg1"/>
+                </a:solidFill>
+              </a:rPr>
+              <a:t>Users can submit their </a:t>
+            </a:r>
+            <a:r>
+              <a:rPr lang="en-US" b="1" dirty="0">
+                <a:solidFill>
+                  <a:schemeClr val="bg1"/>
+                </a:solidFill>
+              </a:rPr>
+              <a:t>feedback</a:t>
+            </a:r>
+            <a:r>
+              <a:rPr lang="en-US" dirty="0">
+                <a:solidFill>
+                  <a:schemeClr val="bg1"/>
+                </a:solidFill>
+              </a:rPr>
+              <a:t> and </a:t>
+            </a:r>
+            <a:r>
+              <a:rPr lang="en-US" b="1" dirty="0">
+                <a:solidFill>
+                  <a:schemeClr val="bg1"/>
+                </a:solidFill>
+              </a:rPr>
+              <a:t>testimonial</a:t>
+            </a:r>
+            <a:r>
+              <a:rPr lang="en-US" dirty="0">
+                <a:solidFill>
+                  <a:schemeClr val="bg1"/>
+                </a:solidFill>
+              </a:rPr>
+              <a:t> through the platform.</a:t>
+            </a:r>
+          </a:p>
+          <a:p>
+            <a:r>
+              <a:rPr lang="en-US" dirty="0">
+                <a:solidFill>
+                  <a:schemeClr val="bg1"/>
+                </a:solidFill>
+              </a:rPr>
+              <a:t>A simple form is provided for users to share their experience, opinions, or suggestions.</a:t>
+            </a:r>
+          </a:p>
+          <a:p>
+            <a:r>
+              <a:rPr lang="en-US" dirty="0">
+                <a:solidFill>
+                  <a:schemeClr val="bg1"/>
+                </a:solidFill>
+              </a:rPr>
+              <a:t>All submitted testimonials are </a:t>
+            </a:r>
+            <a:r>
+              <a:rPr lang="en-US" b="1" dirty="0">
+                <a:solidFill>
+                  <a:schemeClr val="bg1"/>
+                </a:solidFill>
+              </a:rPr>
+              <a:t>not visible publicly by default</a:t>
+            </a:r>
+            <a:r>
+              <a:rPr lang="en-US" dirty="0">
+                <a:solidFill>
+                  <a:schemeClr val="bg1"/>
+                </a:solidFill>
+              </a:rPr>
+              <a:t> – they require admin review. </a:t>
+            </a:r>
+          </a:p>
+          <a:p>
+            <a:r>
+              <a:rPr lang="en-US" dirty="0">
+                <a:solidFill>
+                  <a:schemeClr val="bg1"/>
+                </a:solidFill>
+              </a:rPr>
+              <a:t>This ensures that only genuine and relevant testimonials appear on the frontend.</a:t>
             </a:r>
           </a:p>
         </p:txBody>
       </p:sp>
     </p:spTree>
+    <p:extLst>
+      <p:ext uri="{BB962C8B-B14F-4D97-AF65-F5344CB8AC3E}">
+        <p14:creationId xmlns:p14="http://schemas.microsoft.com/office/powerpoint/2010/main" val="2666552771"/>
+      </p:ext>
+    </p:extLst>
   </p:cSld>
   <p:clrMapOvr>
     <a:masterClrMapping/>
@@ -3223,7 +3543,7 @@
 </file>
 
 <file path=ppt/slides/slide11.xml><?xml version="1.0" encoding="utf-8"?>
-<p:sld xmlns:a="http://schemas.openxmlformats.org/drawingml/2006/main" xmlns:p="http://schemas.openxmlformats.org/presentationml/2006/main" xmlns:r="http://schemas.openxmlformats.org/officeDocument/2006/relationships">
+<p:sld xmlns:a="http://schemas.openxmlformats.org/drawingml/2006/main" xmlns:r="http://schemas.openxmlformats.org/officeDocument/2006/relationships" xmlns:p="http://schemas.openxmlformats.org/presentationml/2006/main">
   <p:cSld>
     <p:spTree>
       <p:nvGrpSpPr>
@@ -3231,10 +3551,53 @@
         <p:cNvGrpSpPr/>
         <p:nvPr/>
       </p:nvGrpSpPr>
-      <p:grpSpPr/>
-      <p:sp>
-        <p:nvSpPr>
-          <p:cNvPr id="2" name="Title 1"/>
+      <p:grpSpPr>
+        <a:xfrm>
+          <a:off x="0" y="0"/>
+          <a:ext cx="0" cy="0"/>
+          <a:chOff x="0" y="0"/>
+          <a:chExt cx="0" cy="0"/>
+        </a:xfrm>
+      </p:grpSpPr>
+      <p:pic>
+        <p:nvPicPr>
+          <p:cNvPr id="4" name="Picture 3">
+            <a:extLst>
+              <a:ext uri="{FF2B5EF4-FFF2-40B4-BE49-F238E27FC236}">
+                <a16:creationId xmlns:a16="http://schemas.microsoft.com/office/drawing/2014/main" id="{B299FE03-D7CB-2AEB-6CF4-C56DB76B1BE5}"/>
+              </a:ext>
+            </a:extLst>
+          </p:cNvPr>
+          <p:cNvPicPr>
+            <a:picLocks noChangeAspect="1"/>
+          </p:cNvPicPr>
+          <p:nvPr/>
+        </p:nvPicPr>
+        <p:blipFill>
+          <a:blip r:embed="rId2"/>
+          <a:stretch>
+            <a:fillRect/>
+          </a:stretch>
+        </p:blipFill>
+        <p:spPr>
+          <a:xfrm>
+            <a:off x="0" y="0"/>
+            <a:ext cx="9144000" cy="6858000"/>
+          </a:xfrm>
+          <a:prstGeom prst="rect">
+            <a:avLst/>
+          </a:prstGeom>
+        </p:spPr>
+      </p:pic>
+      <p:sp>
+        <p:nvSpPr>
+          <p:cNvPr id="2" name="Title 1">
+            <a:extLst>
+              <a:ext uri="{FF2B5EF4-FFF2-40B4-BE49-F238E27FC236}">
+                <a16:creationId xmlns:a16="http://schemas.microsoft.com/office/drawing/2014/main" id="{D8FBF282-D99E-748A-2DD4-23A5A7B2B645}"/>
+              </a:ext>
+            </a:extLst>
+          </p:cNvPr>
           <p:cNvSpPr>
             <a:spLocks noGrp="1"/>
           </p:cNvSpPr>
@@ -3248,14 +3611,25 @@
           <a:lstStyle/>
           <a:p>
             <a:r>
-              <a:t>Voyager Notifications</a:t>
-            </a:r>
-          </a:p>
-        </p:txBody>
-      </p:sp>
-      <p:sp>
-        <p:nvSpPr>
-          <p:cNvPr id="3" name="Content Placeholder 2"/>
+              <a:rPr lang="en-US" dirty="0">
+                <a:solidFill>
+                  <a:schemeClr val="bg1"/>
+                </a:solidFill>
+              </a:rPr>
+              <a:t>Contact Us, FAQ, About Us</a:t>
+            </a:r>
+          </a:p>
+        </p:txBody>
+      </p:sp>
+      <p:sp>
+        <p:nvSpPr>
+          <p:cNvPr id="3" name="Content Placeholder 2">
+            <a:extLst>
+              <a:ext uri="{FF2B5EF4-FFF2-40B4-BE49-F238E27FC236}">
+                <a16:creationId xmlns:a16="http://schemas.microsoft.com/office/drawing/2014/main" id="{67A42C46-795E-5DD1-FD49-555F14F268CE}"/>
+              </a:ext>
+            </a:extLst>
+          </p:cNvPr>
           <p:cNvSpPr>
             <a:spLocks noGrp="1"/>
           </p:cNvSpPr>
@@ -3268,13 +3642,77 @@
           <a:bodyPr/>
           <a:lstStyle/>
           <a:p>
-            <a:r>
-              <a:t>Voyagers receive notifications on booking acceptance with required date and time.</a:t>
-            </a:r>
+            <a:pPr marL="0" indent="0">
+              <a:buNone/>
+            </a:pPr>
+            <a:r>
+              <a:rPr lang="en-US" dirty="0">
+                <a:solidFill>
+                  <a:schemeClr val="bg1"/>
+                </a:solidFill>
+              </a:rPr>
+              <a:t>Beyond bookings, users can access informational pages like </a:t>
+            </a:r>
+            <a:r>
+              <a:rPr lang="en-US" b="1" dirty="0">
+                <a:solidFill>
+                  <a:schemeClr val="bg1"/>
+                </a:solidFill>
+              </a:rPr>
+              <a:t>Contact Us</a:t>
+            </a:r>
+            <a:r>
+              <a:rPr lang="en-US" dirty="0">
+                <a:solidFill>
+                  <a:schemeClr val="bg1"/>
+                </a:solidFill>
+              </a:rPr>
+              <a:t>, </a:t>
+            </a:r>
+            <a:r>
+              <a:rPr lang="en-US" b="1" dirty="0">
+                <a:solidFill>
+                  <a:schemeClr val="bg1"/>
+                </a:solidFill>
+              </a:rPr>
+              <a:t>FAQ</a:t>
+            </a:r>
+            <a:r>
+              <a:rPr lang="en-US" dirty="0">
+                <a:solidFill>
+                  <a:schemeClr val="bg1"/>
+                </a:solidFill>
+              </a:rPr>
+              <a:t>, and </a:t>
+            </a:r>
+            <a:r>
+              <a:rPr lang="en-US" b="1" dirty="0">
+                <a:solidFill>
+                  <a:schemeClr val="bg1"/>
+                </a:solidFill>
+              </a:rPr>
+              <a:t>About Us</a:t>
+            </a:r>
+            <a:r>
+              <a:rPr lang="en-US" dirty="0">
+                <a:solidFill>
+                  <a:schemeClr val="bg1"/>
+                </a:solidFill>
+              </a:rPr>
+              <a:t> for extra guidance and context.</a:t>
+            </a:r>
+          </a:p>
+          <a:p>
+            <a:endParaRPr lang="en-US" dirty="0"/>
           </a:p>
         </p:txBody>
       </p:sp>
     </p:spTree>
+    <p:extLst>
+      <p:ext uri="{BB962C8B-B14F-4D97-AF65-F5344CB8AC3E}">
+        <p14:creationId xmlns:p14="http://schemas.microsoft.com/office/powerpoint/2010/main" val="921624756"/>
+      </p:ext>
+    </p:extLst>
   </p:cSld>
   <p:clrMapOvr>
     <a:masterClrMapping/>
@@ -3283,7 +3721,7 @@
 </file>
 
 <file path=ppt/slides/slide12.xml><?xml version="1.0" encoding="utf-8"?>
-<p:sld xmlns:a="http://schemas.openxmlformats.org/drawingml/2006/main" xmlns:p="http://schemas.openxmlformats.org/presentationml/2006/main" xmlns:r="http://schemas.openxmlformats.org/officeDocument/2006/relationships">
+<p:sld xmlns:a="http://schemas.openxmlformats.org/drawingml/2006/main" xmlns:r="http://schemas.openxmlformats.org/officeDocument/2006/relationships" xmlns:p="http://schemas.openxmlformats.org/presentationml/2006/main">
   <p:cSld>
     <p:spTree>
       <p:nvGrpSpPr>
@@ -3291,7 +3729,44 @@
         <p:cNvGrpSpPr/>
         <p:nvPr/>
       </p:nvGrpSpPr>
-      <p:grpSpPr/>
+      <p:grpSpPr>
+        <a:xfrm>
+          <a:off x="0" y="0"/>
+          <a:ext cx="0" cy="0"/>
+          <a:chOff x="0" y="0"/>
+          <a:chExt cx="0" cy="0"/>
+        </a:xfrm>
+      </p:grpSpPr>
+      <p:pic>
+        <p:nvPicPr>
+          <p:cNvPr id="4" name="Picture 3">
+            <a:extLst>
+              <a:ext uri="{FF2B5EF4-FFF2-40B4-BE49-F238E27FC236}">
+                <a16:creationId xmlns:a16="http://schemas.microsoft.com/office/drawing/2014/main" id="{7A165C0F-695E-3BA9-5720-651E5E09F0EA}"/>
+              </a:ext>
+            </a:extLst>
+          </p:cNvPr>
+          <p:cNvPicPr>
+            <a:picLocks noChangeAspect="1"/>
+          </p:cNvPicPr>
+          <p:nvPr/>
+        </p:nvPicPr>
+        <p:blipFill>
+          <a:blip r:embed="rId2"/>
+          <a:stretch>
+            <a:fillRect/>
+          </a:stretch>
+        </p:blipFill>
+        <p:spPr>
+          <a:xfrm>
+            <a:off x="0" y="0"/>
+            <a:ext cx="9144000" cy="6858000"/>
+          </a:xfrm>
+          <a:prstGeom prst="rect">
+            <a:avLst/>
+          </a:prstGeom>
+        </p:spPr>
+      </p:pic>
       <p:sp>
         <p:nvSpPr>
           <p:cNvPr id="2" name="Title 1"/>
@@ -3308,7 +3783,12 @@
           <a:lstStyle/>
           <a:p>
             <a:r>
-              <a:t>Voyager Signup and Login</a:t>
+              <a:rPr dirty="0">
+                <a:solidFill>
+                  <a:schemeClr val="bg1"/>
+                </a:solidFill>
+              </a:rPr>
+              <a:t>Slot Usage Logic</a:t>
             </a:r>
           </a:p>
         </p:txBody>
@@ -3328,13 +3808,26 @@
           <a:bodyPr/>
           <a:lstStyle/>
           <a:p>
-            <a:r>
-              <a:t>Voyagers can register and sign in to place orders and bookings.</a:t>
+            <a:pPr marL="0" indent="0">
+              <a:buNone/>
+            </a:pPr>
+            <a:r>
+              <a:rPr dirty="0">
+                <a:solidFill>
+                  <a:schemeClr val="bg1"/>
+                </a:solidFill>
+              </a:rPr>
+              <a:t>SlotUsageSalon route ensures max slot use. E.g., if a slot allows 4 users, 5th cannot book.</a:t>
             </a:r>
           </a:p>
         </p:txBody>
       </p:sp>
     </p:spTree>
+    <p:extLst>
+      <p:ext uri="{BB962C8B-B14F-4D97-AF65-F5344CB8AC3E}">
+        <p14:creationId xmlns:p14="http://schemas.microsoft.com/office/powerpoint/2010/main" val="3463404248"/>
+      </p:ext>
+    </p:extLst>
   </p:cSld>
   <p:clrMapOvr>
     <a:masterClrMapping/>
@@ -3343,7 +3836,7 @@
 </file>
 
 <file path=ppt/slides/slide13.xml><?xml version="1.0" encoding="utf-8"?>
-<p:sld xmlns:a="http://schemas.openxmlformats.org/drawingml/2006/main" xmlns:p="http://schemas.openxmlformats.org/presentationml/2006/main" xmlns:r="http://schemas.openxmlformats.org/officeDocument/2006/relationships">
+<p:sld xmlns:a="http://schemas.openxmlformats.org/drawingml/2006/main" xmlns:r="http://schemas.openxmlformats.org/officeDocument/2006/relationships" xmlns:p="http://schemas.openxmlformats.org/presentationml/2006/main">
   <p:cSld>
     <p:spTree>
       <p:nvGrpSpPr>
@@ -3351,10 +3844,53 @@
         <p:cNvGrpSpPr/>
         <p:nvPr/>
       </p:nvGrpSpPr>
-      <p:grpSpPr/>
-      <p:sp>
-        <p:nvSpPr>
-          <p:cNvPr id="2" name="Title 1"/>
+      <p:grpSpPr>
+        <a:xfrm>
+          <a:off x="0" y="0"/>
+          <a:ext cx="0" cy="0"/>
+          <a:chOff x="0" y="0"/>
+          <a:chExt cx="0" cy="0"/>
+        </a:xfrm>
+      </p:grpSpPr>
+      <p:pic>
+        <p:nvPicPr>
+          <p:cNvPr id="4" name="Picture 3">
+            <a:extLst>
+              <a:ext uri="{FF2B5EF4-FFF2-40B4-BE49-F238E27FC236}">
+                <a16:creationId xmlns:a16="http://schemas.microsoft.com/office/drawing/2014/main" id="{E6E5D0E3-15CB-D68E-3196-BB3CDB606775}"/>
+              </a:ext>
+            </a:extLst>
+          </p:cNvPr>
+          <p:cNvPicPr>
+            <a:picLocks noChangeAspect="1"/>
+          </p:cNvPicPr>
+          <p:nvPr/>
+        </p:nvPicPr>
+        <p:blipFill>
+          <a:blip r:embed="rId2"/>
+          <a:stretch>
+            <a:fillRect/>
+          </a:stretch>
+        </p:blipFill>
+        <p:spPr>
+          <a:xfrm>
+            <a:off x="0" y="0"/>
+            <a:ext cx="9144000" cy="6858000"/>
+          </a:xfrm>
+          <a:prstGeom prst="rect">
+            <a:avLst/>
+          </a:prstGeom>
+        </p:spPr>
+      </p:pic>
+      <p:sp>
+        <p:nvSpPr>
+          <p:cNvPr id="2" name="Title 1">
+            <a:extLst>
+              <a:ext uri="{FF2B5EF4-FFF2-40B4-BE49-F238E27FC236}">
+                <a16:creationId xmlns:a16="http://schemas.microsoft.com/office/drawing/2014/main" id="{8304707B-41C6-9AEA-6AC8-0A09C6292A85}"/>
+              </a:ext>
+            </a:extLst>
+          </p:cNvPr>
           <p:cNvSpPr>
             <a:spLocks noGrp="1"/>
           </p:cNvSpPr>
@@ -3364,18 +3900,31 @@
         </p:nvSpPr>
         <p:spPr/>
         <p:txBody>
-          <a:bodyPr/>
-          <a:lstStyle/>
-          <a:p>
-            <a:r>
-              <a:t>Voyager Item Ordering</a:t>
-            </a:r>
-          </a:p>
-        </p:txBody>
-      </p:sp>
-      <p:sp>
-        <p:nvSpPr>
-          <p:cNvPr id="3" name="Content Placeholder 2"/>
+          <a:bodyPr>
+            <a:normAutofit/>
+          </a:bodyPr>
+          <a:lstStyle/>
+          <a:p>
+            <a:r>
+              <a:rPr lang="en-US" sz="4000" dirty="0">
+                <a:solidFill>
+                  <a:schemeClr val="bg1"/>
+                </a:solidFill>
+              </a:rPr>
+              <a:t>Admin Add Category</a:t>
+            </a:r>
+          </a:p>
+        </p:txBody>
+      </p:sp>
+      <p:sp>
+        <p:nvSpPr>
+          <p:cNvPr id="3" name="Content Placeholder 2">
+            <a:extLst>
+              <a:ext uri="{FF2B5EF4-FFF2-40B4-BE49-F238E27FC236}">
+                <a16:creationId xmlns:a16="http://schemas.microsoft.com/office/drawing/2014/main" id="{30D13EF6-E858-C6AE-3E38-DA21FB8E3028}"/>
+              </a:ext>
+            </a:extLst>
+          </p:cNvPr>
           <p:cNvSpPr>
             <a:spLocks noGrp="1"/>
           </p:cNvSpPr>
@@ -3385,26 +3934,47 @@
         </p:nvSpPr>
         <p:spPr/>
         <p:txBody>
-          <a:bodyPr/>
-          <a:lstStyle/>
-          <a:p>
-            <a:r>
-              <a:t>Signed-in voyagers can:</a:t>
-            </a:r>
-          </a:p>
-          <a:p>
-            <a:r>
-              <a:t>• Add catering and stationary items to cart</a:t>
-            </a:r>
-          </a:p>
-          <a:p>
-            <a:r>
-              <a:t>• Place orders</a:t>
+          <a:bodyPr>
+            <a:normAutofit/>
+          </a:bodyPr>
+          <a:lstStyle/>
+          <a:p>
+            <a:pPr marL="0" indent="0">
+              <a:buNone/>
+            </a:pPr>
+            <a:r>
+              <a:rPr lang="en-US" sz="2400" dirty="0">
+                <a:solidFill>
+                  <a:schemeClr val="bg1"/>
+                </a:solidFill>
+              </a:rPr>
+              <a:t>Admins can create new categories like </a:t>
+            </a:r>
+            <a:r>
+              <a:rPr lang="en-US" sz="2400" b="1" dirty="0">
+                <a:solidFill>
+                  <a:schemeClr val="bg1"/>
+                </a:solidFill>
+              </a:rPr>
+              <a:t>Catering, Movie, Stationary, Party Hall, Salon, Fitness</a:t>
+            </a:r>
+            <a:r>
+              <a:rPr lang="en-US" sz="2400" dirty="0">
+                <a:solidFill>
+                  <a:schemeClr val="bg1"/>
+                </a:solidFill>
+              </a:rPr>
+              <a:t>. This enables organized content grouping, making it easy for voyagers to browse services and for admins to keep the system flexible for future additions.</a:t>
             </a:r>
           </a:p>
         </p:txBody>
       </p:sp>
     </p:spTree>
+    <p:extLst>
+      <p:ext uri="{BB962C8B-B14F-4D97-AF65-F5344CB8AC3E}">
+        <p14:creationId xmlns:p14="http://schemas.microsoft.com/office/powerpoint/2010/main" val="1662905558"/>
+      </p:ext>
+    </p:extLst>
   </p:cSld>
   <p:clrMapOvr>
     <a:masterClrMapping/>
@@ -3413,7 +3983,7 @@
 </file>
 
 <file path=ppt/slides/slide14.xml><?xml version="1.0" encoding="utf-8"?>
-<p:sld xmlns:a="http://schemas.openxmlformats.org/drawingml/2006/main" xmlns:p="http://schemas.openxmlformats.org/presentationml/2006/main" xmlns:r="http://schemas.openxmlformats.org/officeDocument/2006/relationships">
+<p:sld xmlns:a="http://schemas.openxmlformats.org/drawingml/2006/main" xmlns:r="http://schemas.openxmlformats.org/officeDocument/2006/relationships" xmlns:p="http://schemas.openxmlformats.org/presentationml/2006/main">
   <p:cSld>
     <p:spTree>
       <p:nvGrpSpPr>
@@ -3421,7 +3991,44 @@
         <p:cNvGrpSpPr/>
         <p:nvPr/>
       </p:nvGrpSpPr>
-      <p:grpSpPr/>
+      <p:grpSpPr>
+        <a:xfrm>
+          <a:off x="0" y="0"/>
+          <a:ext cx="0" cy="0"/>
+          <a:chOff x="0" y="0"/>
+          <a:chExt cx="0" cy="0"/>
+        </a:xfrm>
+      </p:grpSpPr>
+      <p:pic>
+        <p:nvPicPr>
+          <p:cNvPr id="4" name="Picture 3">
+            <a:extLst>
+              <a:ext uri="{FF2B5EF4-FFF2-40B4-BE49-F238E27FC236}">
+                <a16:creationId xmlns:a16="http://schemas.microsoft.com/office/drawing/2014/main" id="{F2C9D060-C5DC-B374-AFC8-CE035552D8C7}"/>
+              </a:ext>
+            </a:extLst>
+          </p:cNvPr>
+          <p:cNvPicPr>
+            <a:picLocks noChangeAspect="1"/>
+          </p:cNvPicPr>
+          <p:nvPr/>
+        </p:nvPicPr>
+        <p:blipFill>
+          <a:blip r:embed="rId2"/>
+          <a:stretch>
+            <a:fillRect/>
+          </a:stretch>
+        </p:blipFill>
+        <p:spPr>
+          <a:xfrm>
+            <a:off x="0" y="0"/>
+            <a:ext cx="9144000" cy="6858000"/>
+          </a:xfrm>
+          <a:prstGeom prst="rect">
+            <a:avLst/>
+          </a:prstGeom>
+        </p:spPr>
+      </p:pic>
       <p:sp>
         <p:nvSpPr>
           <p:cNvPr id="2" name="Title 1"/>
@@ -3438,7 +4045,12 @@
           <a:lstStyle/>
           <a:p>
             <a:r>
-              <a:t>Voyager Booking Experience</a:t>
+              <a:rPr dirty="0">
+                <a:solidFill>
+                  <a:schemeClr val="bg1"/>
+                </a:solidFill>
+              </a:rPr>
+              <a:t>Admin: Item Management</a:t>
             </a:r>
           </a:p>
         </p:txBody>
@@ -3455,32 +4067,124 @@
         </p:nvSpPr>
         <p:spPr/>
         <p:txBody>
-          <a:bodyPr/>
-          <a:lstStyle/>
-          <a:p>
-            <a:r>
-              <a:t>Voyagers can view item details and click 'Book Now' for:</a:t>
-            </a:r>
-          </a:p>
-          <a:p>
-            <a:r>
-              <a:t>• Movie</a:t>
-            </a:r>
-          </a:p>
-          <a:p>
-            <a:r>
-              <a:t>• Salon</a:t>
-            </a:r>
-          </a:p>
-          <a:p>
-            <a:r>
-              <a:t>• Party Hall</a:t>
-            </a:r>
-          </a:p>
-          <a:p>
-            <a:r>
-              <a:t>• Fitness</a:t>
-            </a:r>
+          <a:bodyPr>
+            <a:normAutofit/>
+          </a:bodyPr>
+          <a:lstStyle/>
+          <a:p>
+            <a:r>
+              <a:rPr lang="en-US" sz="2100" dirty="0">
+                <a:solidFill>
+                  <a:schemeClr val="bg1"/>
+                </a:solidFill>
+              </a:rPr>
+              <a:t>Within each category, admins can add detailed items (e.g., catering dishes, fitness packages). Each item includes names, prices, descriptions, and visuals, ensuring a rich menu of services visible to users.</a:t>
+            </a:r>
+          </a:p>
+          <a:p>
+            <a:r>
+              <a:rPr lang="en-US" sz="2000" dirty="0">
+                <a:solidFill>
+                  <a:schemeClr val="bg1"/>
+                </a:solidFill>
+              </a:rPr>
+              <a:t>Facilities</a:t>
+            </a:r>
+            <a:r>
+              <a:rPr sz="2000" dirty="0">
+                <a:solidFill>
+                  <a:schemeClr val="bg1"/>
+                </a:solidFill>
+              </a:rPr>
+              <a:t> includ</a:t>
+            </a:r>
+            <a:r>
+              <a:rPr lang="en-US" sz="2000" dirty="0">
+                <a:solidFill>
+                  <a:schemeClr val="bg1"/>
+                </a:solidFill>
+              </a:rPr>
+              <a:t>ing create, update and status change happened </a:t>
+            </a:r>
+            <a:r>
+              <a:rPr sz="2000" dirty="0">
+                <a:solidFill>
+                  <a:schemeClr val="bg1"/>
+                </a:solidFill>
+              </a:rPr>
+              <a:t>:</a:t>
+            </a:r>
+          </a:p>
+          <a:p>
+            <a:pPr lvl="1"/>
+            <a:r>
+              <a:rPr sz="2000" dirty="0">
+                <a:solidFill>
+                  <a:schemeClr val="bg1"/>
+                </a:solidFill>
+              </a:rPr>
+              <a:t>Catering</a:t>
+            </a:r>
+          </a:p>
+          <a:p>
+            <a:pPr lvl="1"/>
+            <a:r>
+              <a:rPr sz="2000" dirty="0">
+                <a:solidFill>
+                  <a:schemeClr val="bg1"/>
+                </a:solidFill>
+              </a:rPr>
+              <a:t>Movie</a:t>
+            </a:r>
+          </a:p>
+          <a:p>
+            <a:pPr lvl="1"/>
+            <a:r>
+              <a:rPr sz="2000" dirty="0">
+                <a:solidFill>
+                  <a:schemeClr val="bg1"/>
+                </a:solidFill>
+              </a:rPr>
+              <a:t>Stationary</a:t>
+            </a:r>
+          </a:p>
+          <a:p>
+            <a:pPr lvl="1"/>
+            <a:r>
+              <a:rPr sz="2000" dirty="0">
+                <a:solidFill>
+                  <a:schemeClr val="bg1"/>
+                </a:solidFill>
+              </a:rPr>
+              <a:t>Party Hall</a:t>
+            </a:r>
+          </a:p>
+          <a:p>
+            <a:pPr lvl="1"/>
+            <a:r>
+              <a:rPr sz="2000" dirty="0">
+                <a:solidFill>
+                  <a:schemeClr val="bg1"/>
+                </a:solidFill>
+              </a:rPr>
+              <a:t>Salon</a:t>
+            </a:r>
+          </a:p>
+          <a:p>
+            <a:pPr lvl="1"/>
+            <a:r>
+              <a:rPr sz="2000" dirty="0">
+                <a:solidFill>
+                  <a:schemeClr val="bg1"/>
+                </a:solidFill>
+              </a:rPr>
+              <a:t>Fitness</a:t>
+            </a:r>
+            <a:endParaRPr lang="en-US" sz="2000" dirty="0">
+              <a:solidFill>
+                <a:schemeClr val="bg1"/>
+              </a:solidFill>
+            </a:endParaRPr>
           </a:p>
         </p:txBody>
       </p:sp>
@@ -3493,7 +4197,7 @@
 </file>
 
 <file path=ppt/slides/slide15.xml><?xml version="1.0" encoding="utf-8"?>
-<p:sld xmlns:a="http://schemas.openxmlformats.org/drawingml/2006/main" xmlns:p="http://schemas.openxmlformats.org/presentationml/2006/main" xmlns:r="http://schemas.openxmlformats.org/officeDocument/2006/relationships">
+<p:sld xmlns:a="http://schemas.openxmlformats.org/drawingml/2006/main" xmlns:r="http://schemas.openxmlformats.org/officeDocument/2006/relationships" xmlns:p="http://schemas.openxmlformats.org/presentationml/2006/main">
   <p:cSld>
     <p:spTree>
       <p:nvGrpSpPr>
@@ -3501,10 +4205,53 @@
         <p:cNvGrpSpPr/>
         <p:nvPr/>
       </p:nvGrpSpPr>
-      <p:grpSpPr/>
-      <p:sp>
-        <p:nvSpPr>
-          <p:cNvPr id="2" name="Title 1"/>
+      <p:grpSpPr>
+        <a:xfrm>
+          <a:off x="0" y="0"/>
+          <a:ext cx="0" cy="0"/>
+          <a:chOff x="0" y="0"/>
+          <a:chExt cx="0" cy="0"/>
+        </a:xfrm>
+      </p:grpSpPr>
+      <p:pic>
+        <p:nvPicPr>
+          <p:cNvPr id="10" name="Picture 9">
+            <a:extLst>
+              <a:ext uri="{FF2B5EF4-FFF2-40B4-BE49-F238E27FC236}">
+                <a16:creationId xmlns:a16="http://schemas.microsoft.com/office/drawing/2014/main" id="{203AD58F-27C0-B57A-99BF-7D69C5A7B363}"/>
+              </a:ext>
+            </a:extLst>
+          </p:cNvPr>
+          <p:cNvPicPr>
+            <a:picLocks noChangeAspect="1"/>
+          </p:cNvPicPr>
+          <p:nvPr/>
+        </p:nvPicPr>
+        <p:blipFill>
+          <a:blip r:embed="rId2"/>
+          <a:stretch>
+            <a:fillRect/>
+          </a:stretch>
+        </p:blipFill>
+        <p:spPr>
+          <a:xfrm>
+            <a:off x="0" y="0"/>
+            <a:ext cx="9143999" cy="6858000"/>
+          </a:xfrm>
+          <a:prstGeom prst="rect">
+            <a:avLst/>
+          </a:prstGeom>
+        </p:spPr>
+      </p:pic>
+      <p:sp>
+        <p:nvSpPr>
+          <p:cNvPr id="2" name="Title 1">
+            <a:extLst>
+              <a:ext uri="{FF2B5EF4-FFF2-40B4-BE49-F238E27FC236}">
+                <a16:creationId xmlns:a16="http://schemas.microsoft.com/office/drawing/2014/main" id="{AC01ECC2-5CA9-E5BB-2876-F798D06F8C4B}"/>
+              </a:ext>
+            </a:extLst>
+          </p:cNvPr>
           <p:cNvSpPr>
             <a:spLocks noGrp="1"/>
           </p:cNvSpPr>
@@ -3512,20 +4259,38 @@
             <p:ph type="title"/>
           </p:nvPr>
         </p:nvSpPr>
-        <p:spPr/>
-        <p:txBody>
-          <a:bodyPr/>
-          <a:lstStyle/>
-          <a:p>
-            <a:r>
-              <a:t>Booking Forms</a:t>
-            </a:r>
-          </a:p>
-        </p:txBody>
-      </p:sp>
-      <p:sp>
-        <p:nvSpPr>
-          <p:cNvPr id="3" name="Content Placeholder 2"/>
+        <p:spPr>
+          <a:xfrm>
+            <a:off x="457200" y="138499"/>
+            <a:ext cx="8229600" cy="800183"/>
+          </a:xfrm>
+        </p:spPr>
+        <p:txBody>
+          <a:bodyPr>
+            <a:normAutofit fontScale="90000"/>
+          </a:bodyPr>
+          <a:lstStyle/>
+          <a:p>
+            <a:r>
+              <a:rPr lang="en-US" dirty="0">
+                <a:solidFill>
+                  <a:schemeClr val="bg1"/>
+                </a:solidFill>
+              </a:rPr>
+              <a:t>Admin - Add Movie Hall Service Form</a:t>
+            </a:r>
+          </a:p>
+        </p:txBody>
+      </p:sp>
+      <p:sp>
+        <p:nvSpPr>
+          <p:cNvPr id="3" name="Content Placeholder 2">
+            <a:extLst>
+              <a:ext uri="{FF2B5EF4-FFF2-40B4-BE49-F238E27FC236}">
+                <a16:creationId xmlns:a16="http://schemas.microsoft.com/office/drawing/2014/main" id="{EE72004D-D1E3-6227-D39C-FC5EC72759DE}"/>
+              </a:ext>
+            </a:extLst>
+          </p:cNvPr>
           <p:cNvSpPr>
             <a:spLocks noGrp="1"/>
           </p:cNvSpPr>
@@ -3533,28 +4298,377 @@
             <p:ph idx="1"/>
           </p:nvPr>
         </p:nvSpPr>
-        <p:spPr/>
-        <p:txBody>
-          <a:bodyPr/>
-          <a:lstStyle/>
-          <a:p>
-            <a:r>
-              <a:t>Salon: Select time, date, and requirements</a:t>
-            </a:r>
-          </a:p>
-          <a:p>
-            <a:r>
-              <a:t>Party Hall: Choose start/end time, date</a:t>
-            </a:r>
-          </a:p>
-          <a:p>
-            <a:r>
-              <a:t>Fitness: Choose slot and equipment</a:t>
-            </a:r>
+        <p:spPr>
+          <a:xfrm>
+            <a:off x="457200" y="1138989"/>
+            <a:ext cx="8229600" cy="5454315"/>
+          </a:xfrm>
+        </p:spPr>
+        <p:txBody>
+          <a:bodyPr>
+            <a:normAutofit/>
+          </a:bodyPr>
+          <a:lstStyle/>
+          <a:p>
+            <a:r>
+              <a:rPr lang="en-US" sz="1800" b="1" dirty="0">
+                <a:solidFill>
+                  <a:schemeClr val="bg1"/>
+                </a:solidFill>
+              </a:rPr>
+              <a:t>Description:</a:t>
+            </a:r>
+          </a:p>
+          <a:p>
+            <a:pPr lvl="1"/>
+            <a:r>
+              <a:rPr lang="en-US" sz="1400" dirty="0">
+                <a:solidFill>
+                  <a:schemeClr val="bg1"/>
+                </a:solidFill>
+              </a:rPr>
+              <a:t>This form is a part of the admin facility management panel where movie-related entertainment services can be added under a specific category (e.g., “Horror”, “Drama”, “Kids”). The form enables admins to fully configure showtime, movie details, seat pricing, food options, and more, all in one place. </a:t>
+            </a:r>
+          </a:p>
+          <a:p>
+            <a:r>
+              <a:rPr lang="en-US" sz="1800" b="1" dirty="0">
+                <a:solidFill>
+                  <a:schemeClr val="bg1"/>
+                </a:solidFill>
+              </a:rPr>
+              <a:t>Key Functional Sections:</a:t>
+            </a:r>
+          </a:p>
+          <a:p>
+            <a:pPr lvl="1"/>
+            <a:r>
+              <a:rPr lang="en-US" sz="1400" b="1" dirty="0">
+                <a:solidFill>
+                  <a:schemeClr val="bg1"/>
+                </a:solidFill>
+              </a:rPr>
+              <a:t>Select Show Time Slots</a:t>
+            </a:r>
+            <a:r>
+              <a:rPr lang="en-US" sz="1400" dirty="0">
+                <a:solidFill>
+                  <a:schemeClr val="bg1"/>
+                </a:solidFill>
+              </a:rPr>
+              <a:t>: </a:t>
+            </a:r>
+            <a:r>
+              <a:rPr lang="en-US" sz="1200" dirty="0">
+                <a:solidFill>
+                  <a:schemeClr val="bg1"/>
+                </a:solidFill>
+              </a:rPr>
+              <a:t>Admin can add multiple showtimes using a dropdown and an "Add Time" button. This helps schedule movies across the day in defined slots.</a:t>
+            </a:r>
+          </a:p>
+          <a:p>
+            <a:pPr lvl="1"/>
+            <a:r>
+              <a:rPr lang="en-US" sz="1400" b="1" dirty="0">
+                <a:solidFill>
+                  <a:schemeClr val="bg1"/>
+                </a:solidFill>
+              </a:rPr>
+              <a:t>Add Food Items: </a:t>
+            </a:r>
+            <a:r>
+              <a:rPr lang="en-US" sz="1200" dirty="0">
+                <a:solidFill>
+                  <a:schemeClr val="bg1"/>
+                </a:solidFill>
+              </a:rPr>
+              <a:t>A dynamic section to input food title, image URL, and price. Admin can add multiple food items associated with that show using the "+" button.</a:t>
+            </a:r>
+            <a:endParaRPr lang="en-US" sz="1200" b="1" dirty="0">
+              <a:solidFill>
+                <a:schemeClr val="bg1"/>
+              </a:solidFill>
+            </a:endParaRPr>
+          </a:p>
+          <a:p>
+            <a:pPr lvl="1"/>
+            <a:r>
+              <a:rPr lang="en-US" sz="1400" b="1" dirty="0">
+                <a:solidFill>
+                  <a:schemeClr val="bg1"/>
+                </a:solidFill>
+              </a:rPr>
+              <a:t>Movie Information Inputs:</a:t>
+            </a:r>
+          </a:p>
+          <a:p>
+            <a:pPr lvl="2"/>
+            <a:r>
+              <a:rPr lang="en-US" sz="1200" b="1" dirty="0">
+                <a:solidFill>
+                  <a:schemeClr val="bg1"/>
+                </a:solidFill>
+              </a:rPr>
+              <a:t>Movie Title &amp; Info Image</a:t>
+            </a:r>
+            <a:r>
+              <a:rPr lang="en-US" sz="1200" dirty="0">
+                <a:solidFill>
+                  <a:schemeClr val="bg1"/>
+                </a:solidFill>
+              </a:rPr>
+              <a:t> – Name of the movie and promotional image URL.</a:t>
+            </a:r>
+          </a:p>
+          <a:p>
+            <a:pPr lvl="2"/>
+            <a:r>
+              <a:rPr lang="en-US" sz="1200" b="1" dirty="0">
+                <a:solidFill>
+                  <a:schemeClr val="bg1"/>
+                </a:solidFill>
+              </a:rPr>
+              <a:t>Total Seats</a:t>
+            </a:r>
+            <a:r>
+              <a:rPr lang="en-US" sz="1200" dirty="0">
+                <a:solidFill>
+                  <a:schemeClr val="bg1"/>
+                </a:solidFill>
+              </a:rPr>
+              <a:t> – Define how many seats are available for the show.</a:t>
+            </a:r>
+          </a:p>
+          <a:p>
+            <a:pPr lvl="2"/>
+            <a:r>
+              <a:rPr lang="en-US" sz="1200" b="1" dirty="0">
+                <a:solidFill>
+                  <a:schemeClr val="bg1"/>
+                </a:solidFill>
+              </a:rPr>
+              <a:t>Hall Type</a:t>
+            </a:r>
+            <a:r>
+              <a:rPr lang="en-US" sz="1200" dirty="0">
+                <a:solidFill>
+                  <a:schemeClr val="bg1"/>
+                </a:solidFill>
+              </a:rPr>
+              <a:t> – Dropdown selection for hall type (e.g., Standard, AC, 3D).</a:t>
+            </a:r>
+          </a:p>
+          <a:p>
+            <a:pPr lvl="2"/>
+            <a:r>
+              <a:rPr lang="en-US" sz="1200" b="1" dirty="0">
+                <a:solidFill>
+                  <a:schemeClr val="bg1"/>
+                </a:solidFill>
+              </a:rPr>
+              <a:t>Released Date</a:t>
+            </a:r>
+            <a:r>
+              <a:rPr lang="en-US" sz="1200" dirty="0">
+                <a:solidFill>
+                  <a:schemeClr val="bg1"/>
+                </a:solidFill>
+              </a:rPr>
+              <a:t> – Calendar picker for movie release date.</a:t>
+            </a:r>
+          </a:p>
+          <a:p>
+            <a:pPr lvl="2"/>
+            <a:r>
+              <a:rPr lang="en-US" sz="1200" b="1" dirty="0">
+                <a:solidFill>
+                  <a:schemeClr val="bg1"/>
+                </a:solidFill>
+              </a:rPr>
+              <a:t>Movie Timing</a:t>
+            </a:r>
+            <a:r>
+              <a:rPr lang="en-US" sz="1200" dirty="0">
+                <a:solidFill>
+                  <a:schemeClr val="bg1"/>
+                </a:solidFill>
+              </a:rPr>
+              <a:t> – Time of the screening.</a:t>
+            </a:r>
+          </a:p>
+          <a:p>
+            <a:pPr lvl="2"/>
+            <a:r>
+              <a:rPr lang="en-US" sz="1200" b="1" dirty="0">
+                <a:solidFill>
+                  <a:schemeClr val="bg1"/>
+                </a:solidFill>
+              </a:rPr>
+              <a:t>Movie Language</a:t>
+            </a:r>
+            <a:r>
+              <a:rPr lang="en-US" sz="1200" dirty="0">
+                <a:solidFill>
+                  <a:schemeClr val="bg1"/>
+                </a:solidFill>
+              </a:rPr>
+              <a:t> – Enter primary spoken language for display.</a:t>
+            </a:r>
+          </a:p>
+          <a:p>
+            <a:pPr lvl="2"/>
+            <a:r>
+              <a:rPr lang="en-US" sz="1200" b="1" dirty="0">
+                <a:solidFill>
+                  <a:schemeClr val="bg1"/>
+                </a:solidFill>
+              </a:rPr>
+              <a:t>Seat Price</a:t>
+            </a:r>
+            <a:r>
+              <a:rPr lang="en-US" sz="1200" dirty="0">
+                <a:solidFill>
+                  <a:schemeClr val="bg1"/>
+                </a:solidFill>
+              </a:rPr>
+              <a:t> – Ticket cost for each seat.</a:t>
+            </a:r>
+            <a:endParaRPr lang="en-US" sz="1400" b="1" dirty="0">
+              <a:solidFill>
+                <a:schemeClr val="bg1"/>
+              </a:solidFill>
+            </a:endParaRPr>
+          </a:p>
+          <a:p>
+            <a:pPr lvl="1"/>
+            <a:r>
+              <a:rPr lang="en-US" sz="1400" b="1" dirty="0">
+                <a:solidFill>
+                  <a:schemeClr val="bg1"/>
+                </a:solidFill>
+              </a:rPr>
+              <a:t>Movie Description (with Editor Toolbar):</a:t>
+            </a:r>
+          </a:p>
+          <a:p>
+            <a:pPr lvl="2"/>
+            <a:r>
+              <a:rPr lang="en-US" sz="1200" dirty="0">
+                <a:solidFill>
+                  <a:schemeClr val="bg1"/>
+                </a:solidFill>
+              </a:rPr>
+              <a:t>A rich text editor is integrated with basic formatting controls (Bold, Italic, Underline, H1, H2, Link). This allows the admin to add descriptive movie content attractively.</a:t>
+            </a:r>
+            <a:endParaRPr lang="en-US" sz="1200" b="1" dirty="0">
+              <a:solidFill>
+                <a:schemeClr val="bg1"/>
+              </a:solidFill>
+            </a:endParaRPr>
+          </a:p>
+        </p:txBody>
+      </p:sp>
+      <p:sp>
+        <p:nvSpPr>
+          <p:cNvPr id="7" name="Rectangle 4">
+            <a:extLst>
+              <a:ext uri="{FF2B5EF4-FFF2-40B4-BE49-F238E27FC236}">
+                <a16:creationId xmlns:a16="http://schemas.microsoft.com/office/drawing/2014/main" id="{8F0A7528-B924-2A86-8450-24859A6CD85C}"/>
+              </a:ext>
+            </a:extLst>
+          </p:cNvPr>
+          <p:cNvSpPr>
+            <a:spLocks noChangeArrowheads="1"/>
+          </p:cNvSpPr>
+          <p:nvPr/>
+        </p:nvSpPr>
+        <p:spPr bwMode="auto">
+          <a:xfrm>
+            <a:off x="0" y="-138500"/>
+            <a:ext cx="239168" cy="276999"/>
+          </a:xfrm>
+          <a:prstGeom prst="rect">
+            <a:avLst/>
+          </a:prstGeom>
+          <a:noFill/>
+          <a:ln>
+            <a:noFill/>
+          </a:ln>
+          <a:effectLst/>
+          <a:extLst>
+            <a:ext uri="{909E8E84-426E-40DD-AFC4-6F175D3DCCD1}">
+              <a14:hiddenFill xmlns:a14="http://schemas.microsoft.com/office/drawing/2010/main">
+                <a:solidFill>
+                  <a:schemeClr val="accent1"/>
+                </a:solidFill>
+              </a14:hiddenFill>
+            </a:ext>
+            <a:ext uri="{91240B29-F687-4F45-9708-019B960494DF}">
+              <a14:hiddenLine xmlns:a14="http://schemas.microsoft.com/office/drawing/2010/main" w="9525">
+                <a:solidFill>
+                  <a:schemeClr val="tx1"/>
+                </a:solidFill>
+                <a:miter lim="800000"/>
+                <a:headEnd/>
+                <a:tailEnd/>
+              </a14:hiddenLine>
+            </a:ext>
+            <a:ext uri="{AF507438-7753-43E0-B8FC-AC1667EBCBE1}">
+              <a14:hiddenEffects xmlns:a14="http://schemas.microsoft.com/office/drawing/2010/main">
+                <a:effectLst>
+                  <a:outerShdw dist="35921" dir="2700000" algn="ctr" rotWithShape="0">
+                    <a:schemeClr val="bg2"/>
+                  </a:outerShdw>
+                </a:effectLst>
+              </a14:hiddenEffects>
+            </a:ext>
+          </a:extLst>
+        </p:spPr>
+        <p:txBody>
+          <a:bodyPr vert="horz" wrap="none" lIns="91440" tIns="45720" rIns="91440" bIns="45720" numCol="1" anchor="ctr" anchorCtr="0" compatLnSpc="1">
+            <a:prstTxWarp prst="textNoShape">
+              <a:avLst/>
+            </a:prstTxWarp>
+            <a:spAutoFit/>
+          </a:bodyPr>
+          <a:lstStyle/>
+          <a:p>
+            <a:pPr marL="0" marR="0" lvl="0" indent="0" algn="l" defTabSz="914400" rtl="0" eaLnBrk="0" fontAlgn="base" latinLnBrk="0" hangingPunct="0">
+              <a:lnSpc>
+                <a:spcPct val="100000"/>
+              </a:lnSpc>
+              <a:spcBef>
+                <a:spcPct val="0"/>
+              </a:spcBef>
+              <a:spcAft>
+                <a:spcPct val="0"/>
+              </a:spcAft>
+              <a:buClrTx/>
+              <a:buSzTx/>
+              <a:buFontTx/>
+              <a:buChar char="•"/>
+              <a:tabLst/>
+            </a:pPr>
+            <a:endParaRPr kumimoji="0" lang="en-US" altLang="en-US" sz="1200" b="0" i="0" u="none" strike="noStrike" cap="none" normalizeH="0" baseline="0" dirty="0">
+              <a:ln>
+                <a:noFill/>
+              </a:ln>
+              <a:solidFill>
+                <a:schemeClr val="tx1"/>
+              </a:solidFill>
+              <a:effectLst/>
+              <a:latin typeface="Arial" panose="020B0604020202020204" pitchFamily="34" charset="0"/>
+            </a:endParaRPr>
           </a:p>
         </p:txBody>
       </p:sp>
     </p:spTree>
+    <p:extLst>
+      <p:ext uri="{BB962C8B-B14F-4D97-AF65-F5344CB8AC3E}">
+        <p14:creationId xmlns:p14="http://schemas.microsoft.com/office/powerpoint/2010/main" val="16461562"/>
+      </p:ext>
+    </p:extLst>
   </p:cSld>
   <p:clrMapOvr>
     <a:masterClrMapping/>
@@ -3563,7 +4677,7 @@
 </file>
 
 <file path=ppt/slides/slide16.xml><?xml version="1.0" encoding="utf-8"?>
-<p:sld xmlns:a="http://schemas.openxmlformats.org/drawingml/2006/main" xmlns:p="http://schemas.openxmlformats.org/presentationml/2006/main" xmlns:r="http://schemas.openxmlformats.org/officeDocument/2006/relationships">
+<p:sld xmlns:a="http://schemas.openxmlformats.org/drawingml/2006/main" xmlns:r="http://schemas.openxmlformats.org/officeDocument/2006/relationships" xmlns:p="http://schemas.openxmlformats.org/presentationml/2006/main">
   <p:cSld>
     <p:spTree>
       <p:nvGrpSpPr>
@@ -3571,10 +4685,53 @@
         <p:cNvGrpSpPr/>
         <p:nvPr/>
       </p:nvGrpSpPr>
-      <p:grpSpPr/>
-      <p:sp>
-        <p:nvSpPr>
-          <p:cNvPr id="2" name="Title 1"/>
+      <p:grpSpPr>
+        <a:xfrm>
+          <a:off x="0" y="0"/>
+          <a:ext cx="0" cy="0"/>
+          <a:chOff x="0" y="0"/>
+          <a:chExt cx="0" cy="0"/>
+        </a:xfrm>
+      </p:grpSpPr>
+      <p:pic>
+        <p:nvPicPr>
+          <p:cNvPr id="5" name="Picture 4">
+            <a:extLst>
+              <a:ext uri="{FF2B5EF4-FFF2-40B4-BE49-F238E27FC236}">
+                <a16:creationId xmlns:a16="http://schemas.microsoft.com/office/drawing/2014/main" id="{4AF2FBBD-80EA-7BA0-61E0-464345784308}"/>
+              </a:ext>
+            </a:extLst>
+          </p:cNvPr>
+          <p:cNvPicPr>
+            <a:picLocks noChangeAspect="1"/>
+          </p:cNvPicPr>
+          <p:nvPr/>
+        </p:nvPicPr>
+        <p:blipFill>
+          <a:blip r:embed="rId2"/>
+          <a:stretch>
+            <a:fillRect/>
+          </a:stretch>
+        </p:blipFill>
+        <p:spPr>
+          <a:xfrm>
+            <a:off x="0" y="0"/>
+            <a:ext cx="9144000" cy="6858000"/>
+          </a:xfrm>
+          <a:prstGeom prst="rect">
+            <a:avLst/>
+          </a:prstGeom>
+        </p:spPr>
+      </p:pic>
+      <p:sp>
+        <p:nvSpPr>
+          <p:cNvPr id="2" name="Title 1">
+            <a:extLst>
+              <a:ext uri="{FF2B5EF4-FFF2-40B4-BE49-F238E27FC236}">
+                <a16:creationId xmlns:a16="http://schemas.microsoft.com/office/drawing/2014/main" id="{E6E56B5E-732E-842C-D16F-1DEAC989836E}"/>
+              </a:ext>
+            </a:extLst>
+          </p:cNvPr>
           <p:cNvSpPr>
             <a:spLocks noGrp="1"/>
           </p:cNvSpPr>
@@ -3582,20 +4739,38 @@
             <p:ph type="title"/>
           </p:nvPr>
         </p:nvSpPr>
-        <p:spPr/>
-        <p:txBody>
-          <a:bodyPr/>
-          <a:lstStyle/>
-          <a:p>
-            <a:r>
-              <a:t>Movie Booking System</a:t>
-            </a:r>
-          </a:p>
-        </p:txBody>
-      </p:sp>
-      <p:sp>
-        <p:nvSpPr>
-          <p:cNvPr id="3" name="Content Placeholder 2"/>
+        <p:spPr>
+          <a:xfrm>
+            <a:off x="457200" y="56147"/>
+            <a:ext cx="8229600" cy="858253"/>
+          </a:xfrm>
+        </p:spPr>
+        <p:txBody>
+          <a:bodyPr>
+            <a:normAutofit fontScale="90000"/>
+          </a:bodyPr>
+          <a:lstStyle/>
+          <a:p>
+            <a:r>
+              <a:rPr lang="en-US" dirty="0">
+                <a:solidFill>
+                  <a:schemeClr val="bg1"/>
+                </a:solidFill>
+              </a:rPr>
+              <a:t>Admin – Add Salon Service Interface</a:t>
+            </a:r>
+          </a:p>
+        </p:txBody>
+      </p:sp>
+      <p:sp>
+        <p:nvSpPr>
+          <p:cNvPr id="3" name="Content Placeholder 2">
+            <a:extLst>
+              <a:ext uri="{FF2B5EF4-FFF2-40B4-BE49-F238E27FC236}">
+                <a16:creationId xmlns:a16="http://schemas.microsoft.com/office/drawing/2014/main" id="{13F995A0-E075-F277-5673-F90111D8A7CB}"/>
+              </a:ext>
+            </a:extLst>
+          </p:cNvPr>
           <p:cNvSpPr>
             <a:spLocks noGrp="1"/>
           </p:cNvSpPr>
@@ -3603,38 +4778,363 @@
             <p:ph idx="1"/>
           </p:nvPr>
         </p:nvSpPr>
-        <p:spPr/>
-        <p:txBody>
-          <a:bodyPr/>
-          <a:lstStyle/>
-          <a:p>
-            <a:r>
-              <a:t>Voyagers select:</a:t>
-            </a:r>
-          </a:p>
-          <a:p>
-            <a:r>
-              <a:t>• Date</a:t>
-            </a:r>
-          </a:p>
-          <a:p>
-            <a:r>
-              <a:t>• Time slot</a:t>
-            </a:r>
-          </a:p>
-          <a:p>
-            <a:r>
-              <a:t>• Seat count and number</a:t>
-            </a:r>
-          </a:p>
-          <a:p>
-            <a:r>
-              <a:t>• Food items</a:t>
-            </a:r>
+        <p:spPr>
+          <a:xfrm>
+            <a:off x="457200" y="1171074"/>
+            <a:ext cx="8229600" cy="4955089"/>
+          </a:xfrm>
+        </p:spPr>
+        <p:txBody>
+          <a:bodyPr>
+            <a:normAutofit/>
+          </a:bodyPr>
+          <a:lstStyle/>
+          <a:p>
+            <a:r>
+              <a:rPr lang="en-US" sz="1800" b="1" dirty="0">
+                <a:solidFill>
+                  <a:schemeClr val="bg1"/>
+                </a:solidFill>
+              </a:rPr>
+              <a:t>Service Timing &amp; Slot Management:</a:t>
+            </a:r>
+          </a:p>
+          <a:p>
+            <a:pPr lvl="1"/>
+            <a:r>
+              <a:rPr lang="en-US" sz="1400" dirty="0">
+                <a:solidFill>
+                  <a:schemeClr val="bg1"/>
+                </a:solidFill>
+              </a:rPr>
+              <a:t>Admin can specify:</a:t>
+            </a:r>
+          </a:p>
+          <a:p>
+            <a:pPr lvl="2"/>
+            <a:r>
+              <a:rPr lang="en-US" sz="1200" dirty="0">
+                <a:solidFill>
+                  <a:schemeClr val="bg1"/>
+                </a:solidFill>
+              </a:rPr>
+              <a:t>Start time using a dropdown selector.</a:t>
+            </a:r>
+          </a:p>
+          <a:p>
+            <a:pPr lvl="2"/>
+            <a:r>
+              <a:rPr lang="en-US" sz="1200" dirty="0">
+                <a:solidFill>
+                  <a:schemeClr val="bg1"/>
+                </a:solidFill>
+              </a:rPr>
+              <a:t>Service Provider Count which defines how many appointments can be offered during that time.</a:t>
+            </a:r>
+          </a:p>
+          <a:p>
+            <a:pPr lvl="2"/>
+            <a:r>
+              <a:rPr lang="en-US" sz="1200" dirty="0">
+                <a:solidFill>
+                  <a:schemeClr val="bg1"/>
+                </a:solidFill>
+              </a:rPr>
+              <a:t>Ability to dynamically add or remove time blocks using the “+ Add Service” button.</a:t>
+            </a:r>
+            <a:endParaRPr lang="en-US" dirty="0">
+              <a:solidFill>
+                <a:schemeClr val="bg1"/>
+              </a:solidFill>
+            </a:endParaRPr>
+          </a:p>
+          <a:p>
+            <a:r>
+              <a:rPr lang="en-US" sz="1800" b="1" dirty="0">
+                <a:solidFill>
+                  <a:schemeClr val="bg1"/>
+                </a:solidFill>
+              </a:rPr>
+              <a:t>Add New Salon Service Section:</a:t>
+            </a:r>
+          </a:p>
+          <a:p>
+            <a:pPr lvl="1"/>
+            <a:r>
+              <a:rPr lang="en-US" sz="1400" b="1" dirty="0">
+                <a:solidFill>
+                  <a:schemeClr val="bg1"/>
+                </a:solidFill>
+              </a:rPr>
+              <a:t>Service Name:</a:t>
+            </a:r>
+            <a:r>
+              <a:rPr lang="en-US" sz="1400" dirty="0">
+                <a:solidFill>
+                  <a:schemeClr val="bg1"/>
+                </a:solidFill>
+              </a:rPr>
+              <a:t> Name/title of the specific beauty or wellness service.</a:t>
+            </a:r>
+          </a:p>
+          <a:p>
+            <a:pPr lvl="1"/>
+            <a:r>
+              <a:rPr lang="en-US" altLang="en-US" sz="1400" b="1" dirty="0">
+                <a:solidFill>
+                  <a:schemeClr val="bg1"/>
+                </a:solidFill>
+              </a:rPr>
+              <a:t>Service Time</a:t>
+            </a:r>
+            <a:r>
+              <a:rPr lang="en-US" altLang="en-US" sz="1400" dirty="0">
+                <a:solidFill>
+                  <a:schemeClr val="bg1"/>
+                </a:solidFill>
+              </a:rPr>
+              <a:t>: Duration of the session (e.g., 30 mins, 1 hour).</a:t>
+            </a:r>
+          </a:p>
+          <a:p>
+            <a:pPr lvl="1"/>
+            <a:r>
+              <a:rPr lang="en-US" altLang="en-US" sz="1400" b="1" dirty="0">
+                <a:solidFill>
+                  <a:schemeClr val="bg1"/>
+                </a:solidFill>
+              </a:rPr>
+              <a:t>Image</a:t>
+            </a:r>
+            <a:r>
+              <a:rPr lang="en-US" altLang="en-US" sz="1400" dirty="0">
+                <a:solidFill>
+                  <a:schemeClr val="bg1"/>
+                </a:solidFill>
+              </a:rPr>
+              <a:t>: Upload field or URL input for a visual representation of the service (e.g., facial image).</a:t>
+            </a:r>
+          </a:p>
+          <a:p>
+            <a:pPr lvl="1"/>
+            <a:r>
+              <a:rPr lang="en-US" altLang="en-US" sz="1400" b="1" dirty="0">
+                <a:solidFill>
+                  <a:schemeClr val="bg1"/>
+                </a:solidFill>
+              </a:rPr>
+              <a:t>Price</a:t>
+            </a:r>
+            <a:r>
+              <a:rPr lang="en-US" altLang="en-US" sz="1400" dirty="0">
+                <a:solidFill>
+                  <a:schemeClr val="bg1"/>
+                </a:solidFill>
+              </a:rPr>
+              <a:t>: Cost per session.</a:t>
+            </a:r>
+          </a:p>
+          <a:p>
+            <a:pPr lvl="1"/>
+            <a:r>
+              <a:rPr lang="en-US" altLang="en-US" sz="1400" b="1" dirty="0">
+                <a:solidFill>
+                  <a:schemeClr val="bg1"/>
+                </a:solidFill>
+              </a:rPr>
+              <a:t>Description Box</a:t>
+            </a:r>
+            <a:r>
+              <a:rPr lang="en-US" altLang="en-US" sz="1400" dirty="0">
+                <a:solidFill>
+                  <a:schemeClr val="bg1"/>
+                </a:solidFill>
+              </a:rPr>
+              <a:t>: Rich text editor supporting:</a:t>
+            </a:r>
+          </a:p>
+          <a:p>
+            <a:pPr lvl="2"/>
+            <a:r>
+              <a:rPr lang="en-US" altLang="en-US" sz="1400" dirty="0">
+                <a:solidFill>
+                  <a:schemeClr val="bg1"/>
+                </a:solidFill>
+              </a:rPr>
+              <a:t>Bold, Italic, Underline</a:t>
+            </a:r>
+          </a:p>
+          <a:p>
+            <a:pPr lvl="2"/>
+            <a:r>
+              <a:rPr lang="en-US" altLang="en-US" sz="1400" dirty="0">
+                <a:solidFill>
+                  <a:schemeClr val="bg1"/>
+                </a:solidFill>
+              </a:rPr>
+              <a:t>Heading levels (H1, H2)</a:t>
+            </a:r>
+          </a:p>
+          <a:p>
+            <a:pPr lvl="2"/>
+            <a:r>
+              <a:rPr lang="en-US" altLang="en-US" sz="1400" dirty="0">
+                <a:solidFill>
+                  <a:schemeClr val="bg1"/>
+                </a:solidFill>
+              </a:rPr>
+              <a:t>Hyperlinks for redirection or offers</a:t>
+            </a:r>
+            <a:endParaRPr lang="en-US" sz="1400" b="1" dirty="0">
+              <a:solidFill>
+                <a:schemeClr val="bg1"/>
+              </a:solidFill>
+            </a:endParaRPr>
+          </a:p>
+          <a:p>
+            <a:r>
+              <a:rPr lang="en-US" sz="1800" b="1" dirty="0">
+                <a:solidFill>
+                  <a:schemeClr val="bg1"/>
+                </a:solidFill>
+              </a:rPr>
+              <a:t>One-click Save:</a:t>
+            </a:r>
+          </a:p>
+          <a:p>
+            <a:pPr lvl="1"/>
+            <a:r>
+              <a:rPr lang="en-US" sz="1400" dirty="0">
+                <a:solidFill>
+                  <a:schemeClr val="bg1"/>
+                </a:solidFill>
+              </a:rPr>
+              <a:t>A dedicated </a:t>
+            </a:r>
+            <a:r>
+              <a:rPr lang="en-US" sz="1400" b="1" dirty="0">
+                <a:solidFill>
+                  <a:schemeClr val="bg1"/>
+                </a:solidFill>
+              </a:rPr>
+              <a:t>“Save Service”</a:t>
+            </a:r>
+            <a:r>
+              <a:rPr lang="en-US" sz="1400" dirty="0">
+                <a:solidFill>
+                  <a:schemeClr val="bg1"/>
+                </a:solidFill>
+              </a:rPr>
+              <a:t> button at the bottom stores the new salon service with real-time form validation.</a:t>
+            </a:r>
+            <a:endParaRPr lang="en-US" sz="1400" b="1" dirty="0">
+              <a:solidFill>
+                <a:schemeClr val="bg1"/>
+              </a:solidFill>
+            </a:endParaRPr>
+          </a:p>
+        </p:txBody>
+      </p:sp>
+      <p:sp>
+        <p:nvSpPr>
+          <p:cNvPr id="4" name="Rectangle 1">
+            <a:extLst>
+              <a:ext uri="{FF2B5EF4-FFF2-40B4-BE49-F238E27FC236}">
+                <a16:creationId xmlns:a16="http://schemas.microsoft.com/office/drawing/2014/main" id="{B38A7FB9-CAE9-236C-78B0-7EB8398E1A38}"/>
+              </a:ext>
+            </a:extLst>
+          </p:cNvPr>
+          <p:cNvSpPr>
+            <a:spLocks noChangeArrowheads="1"/>
+          </p:cNvSpPr>
+          <p:nvPr/>
+        </p:nvSpPr>
+        <p:spPr bwMode="auto">
+          <a:xfrm>
+            <a:off x="0" y="-184666"/>
+            <a:ext cx="184731" cy="369332"/>
+          </a:xfrm>
+          <a:prstGeom prst="rect">
+            <a:avLst/>
+          </a:prstGeom>
+          <a:noFill/>
+          <a:ln>
+            <a:noFill/>
+          </a:ln>
+          <a:effectLst/>
+          <a:extLst>
+            <a:ext uri="{909E8E84-426E-40DD-AFC4-6F175D3DCCD1}">
+              <a14:hiddenFill xmlns:a14="http://schemas.microsoft.com/office/drawing/2010/main">
+                <a:solidFill>
+                  <a:schemeClr val="accent1"/>
+                </a:solidFill>
+              </a14:hiddenFill>
+            </a:ext>
+            <a:ext uri="{91240B29-F687-4F45-9708-019B960494DF}">
+              <a14:hiddenLine xmlns:a14="http://schemas.microsoft.com/office/drawing/2010/main" w="9525">
+                <a:solidFill>
+                  <a:schemeClr val="tx1"/>
+                </a:solidFill>
+                <a:miter lim="800000"/>
+                <a:headEnd/>
+                <a:tailEnd/>
+              </a14:hiddenLine>
+            </a:ext>
+            <a:ext uri="{AF507438-7753-43E0-B8FC-AC1667EBCBE1}">
+              <a14:hiddenEffects xmlns:a14="http://schemas.microsoft.com/office/drawing/2010/main">
+                <a:effectLst>
+                  <a:outerShdw dist="35921" dir="2700000" algn="ctr" rotWithShape="0">
+                    <a:schemeClr val="bg2"/>
+                  </a:outerShdw>
+                </a:effectLst>
+              </a14:hiddenEffects>
+            </a:ext>
+          </a:extLst>
+        </p:spPr>
+        <p:txBody>
+          <a:bodyPr vert="horz" wrap="none" lIns="91440" tIns="45720" rIns="91440" bIns="45720" numCol="1" anchor="ctr" anchorCtr="0" compatLnSpc="1">
+            <a:prstTxWarp prst="textNoShape">
+              <a:avLst/>
+            </a:prstTxWarp>
+            <a:spAutoFit/>
+          </a:bodyPr>
+          <a:lstStyle/>
+          <a:p>
+            <a:pPr marL="0" marR="0" lvl="0" indent="0" algn="l" defTabSz="914400" rtl="0" eaLnBrk="0" fontAlgn="base" latinLnBrk="0" hangingPunct="0">
+              <a:lnSpc>
+                <a:spcPct val="100000"/>
+              </a:lnSpc>
+              <a:spcBef>
+                <a:spcPct val="0"/>
+              </a:spcBef>
+              <a:spcAft>
+                <a:spcPct val="0"/>
+              </a:spcAft>
+              <a:buClrTx/>
+              <a:buSzTx/>
+              <a:buFontTx/>
+              <a:buNone/>
+              <a:tabLst/>
+            </a:pPr>
+            <a:endParaRPr kumimoji="0" lang="en-US" altLang="en-US" sz="1800" b="0" i="0" u="none" strike="noStrike" cap="none" normalizeH="0" baseline="0" dirty="0">
+              <a:ln>
+                <a:noFill/>
+              </a:ln>
+              <a:solidFill>
+                <a:schemeClr val="tx1"/>
+              </a:solidFill>
+              <a:effectLst/>
+              <a:latin typeface="Arial" panose="020B0604020202020204" pitchFamily="34" charset="0"/>
+            </a:endParaRPr>
           </a:p>
         </p:txBody>
       </p:sp>
     </p:spTree>
+    <p:extLst>
+      <p:ext uri="{BB962C8B-B14F-4D97-AF65-F5344CB8AC3E}">
+        <p14:creationId xmlns:p14="http://schemas.microsoft.com/office/powerpoint/2010/main" val="337878891"/>
+      </p:ext>
+    </p:extLst>
   </p:cSld>
   <p:clrMapOvr>
     <a:masterClrMapping/>
@@ -3643,7 +5143,7 @@
 </file>
 
 <file path=ppt/slides/slide17.xml><?xml version="1.0" encoding="utf-8"?>
-<p:sld xmlns:a="http://schemas.openxmlformats.org/drawingml/2006/main" xmlns:p="http://schemas.openxmlformats.org/presentationml/2006/main" xmlns:r="http://schemas.openxmlformats.org/officeDocument/2006/relationships">
+<p:sld xmlns:a="http://schemas.openxmlformats.org/drawingml/2006/main" xmlns:r="http://schemas.openxmlformats.org/officeDocument/2006/relationships" xmlns:p="http://schemas.openxmlformats.org/presentationml/2006/main">
   <p:cSld>
     <p:spTree>
       <p:nvGrpSpPr>
@@ -3651,10 +5151,53 @@
         <p:cNvGrpSpPr/>
         <p:nvPr/>
       </p:nvGrpSpPr>
-      <p:grpSpPr/>
-      <p:sp>
-        <p:nvSpPr>
-          <p:cNvPr id="2" name="Title 1"/>
+      <p:grpSpPr>
+        <a:xfrm>
+          <a:off x="0" y="0"/>
+          <a:ext cx="0" cy="0"/>
+          <a:chOff x="0" y="0"/>
+          <a:chExt cx="0" cy="0"/>
+        </a:xfrm>
+      </p:grpSpPr>
+      <p:pic>
+        <p:nvPicPr>
+          <p:cNvPr id="10" name="Picture 9">
+            <a:extLst>
+              <a:ext uri="{FF2B5EF4-FFF2-40B4-BE49-F238E27FC236}">
+                <a16:creationId xmlns:a16="http://schemas.microsoft.com/office/drawing/2014/main" id="{7A180E5B-24C7-4E2A-B80C-2BF5AC29A333}"/>
+              </a:ext>
+            </a:extLst>
+          </p:cNvPr>
+          <p:cNvPicPr>
+            <a:picLocks noChangeAspect="1"/>
+          </p:cNvPicPr>
+          <p:nvPr/>
+        </p:nvPicPr>
+        <p:blipFill>
+          <a:blip r:embed="rId2"/>
+          <a:stretch>
+            <a:fillRect/>
+          </a:stretch>
+        </p:blipFill>
+        <p:spPr>
+          <a:xfrm>
+            <a:off x="0" y="0"/>
+            <a:ext cx="9144000" cy="6858000"/>
+          </a:xfrm>
+          <a:prstGeom prst="rect">
+            <a:avLst/>
+          </a:prstGeom>
+        </p:spPr>
+      </p:pic>
+      <p:sp>
+        <p:nvSpPr>
+          <p:cNvPr id="2" name="Title 1">
+            <a:extLst>
+              <a:ext uri="{FF2B5EF4-FFF2-40B4-BE49-F238E27FC236}">
+                <a16:creationId xmlns:a16="http://schemas.microsoft.com/office/drawing/2014/main" id="{2A7CD579-D646-60BC-8FB8-1FB0F0657C75}"/>
+              </a:ext>
+            </a:extLst>
+          </p:cNvPr>
           <p:cNvSpPr>
             <a:spLocks noGrp="1"/>
           </p:cNvSpPr>
@@ -3662,20 +5205,38 @@
             <p:ph type="title"/>
           </p:nvPr>
         </p:nvSpPr>
-        <p:spPr/>
-        <p:txBody>
-          <a:bodyPr/>
-          <a:lstStyle/>
-          <a:p>
-            <a:r>
-              <a:t>Booking Status Display</a:t>
-            </a:r>
-          </a:p>
-        </p:txBody>
-      </p:sp>
-      <p:sp>
-        <p:nvSpPr>
-          <p:cNvPr id="3" name="Content Placeholder 2"/>
+        <p:spPr>
+          <a:xfrm>
+            <a:off x="457200" y="104274"/>
+            <a:ext cx="8229600" cy="721894"/>
+          </a:xfrm>
+        </p:spPr>
+        <p:txBody>
+          <a:bodyPr>
+            <a:normAutofit fontScale="90000"/>
+          </a:bodyPr>
+          <a:lstStyle/>
+          <a:p>
+            <a:r>
+              <a:rPr lang="en-US" dirty="0">
+                <a:solidFill>
+                  <a:schemeClr val="bg1"/>
+                </a:solidFill>
+              </a:rPr>
+              <a:t>Admin – Add Fitness Service Interface</a:t>
+            </a:r>
+          </a:p>
+        </p:txBody>
+      </p:sp>
+      <p:sp>
+        <p:nvSpPr>
+          <p:cNvPr id="3" name="Content Placeholder 2">
+            <a:extLst>
+              <a:ext uri="{FF2B5EF4-FFF2-40B4-BE49-F238E27FC236}">
+                <a16:creationId xmlns:a16="http://schemas.microsoft.com/office/drawing/2014/main" id="{0B1C7953-FDCF-99E6-9B81-B7F904F16F2F}"/>
+              </a:ext>
+            </a:extLst>
+          </p:cNvPr>
           <p:cNvSpPr>
             <a:spLocks noGrp="1"/>
           </p:cNvSpPr>
@@ -3683,18 +5244,471 @@
             <p:ph idx="1"/>
           </p:nvPr>
         </p:nvSpPr>
-        <p:spPr/>
-        <p:txBody>
-          <a:bodyPr/>
-          <a:lstStyle/>
-          <a:p>
-            <a:r>
-              <a:t>Voyagers can see booking status (Booked / Accepted) after submitting requests</a:t>
-            </a:r>
+        <p:spPr>
+          <a:xfrm>
+            <a:off x="457200" y="1147012"/>
+            <a:ext cx="8229600" cy="4979152"/>
+          </a:xfrm>
+        </p:spPr>
+        <p:txBody>
+          <a:bodyPr>
+            <a:normAutofit/>
+          </a:bodyPr>
+          <a:lstStyle/>
+          <a:p>
+            <a:r>
+              <a:rPr lang="en-US" sz="1600" b="1" dirty="0">
+                <a:solidFill>
+                  <a:schemeClr val="bg1"/>
+                </a:solidFill>
+              </a:rPr>
+              <a:t>Select Service Slots</a:t>
+            </a:r>
+            <a:r>
+              <a:rPr lang="en-US" sz="1600" dirty="0">
+                <a:solidFill>
+                  <a:schemeClr val="bg1"/>
+                </a:solidFill>
+              </a:rPr>
+              <a:t>:</a:t>
+            </a:r>
+          </a:p>
+          <a:p>
+            <a:pPr lvl="1"/>
+            <a:r>
+              <a:rPr lang="en-US" sz="1600" dirty="0">
+                <a:solidFill>
+                  <a:schemeClr val="bg1"/>
+                </a:solidFill>
+              </a:rPr>
+              <a:t>Admin can choose available time slots from a dropdown and click </a:t>
+            </a:r>
+            <a:r>
+              <a:rPr lang="en-US" sz="1600" b="1" dirty="0">
+                <a:solidFill>
+                  <a:schemeClr val="bg1"/>
+                </a:solidFill>
+              </a:rPr>
+              <a:t>“Add Time”</a:t>
+            </a:r>
+            <a:r>
+              <a:rPr lang="en-US" sz="1600" dirty="0">
+                <a:solidFill>
+                  <a:schemeClr val="bg1"/>
+                </a:solidFill>
+              </a:rPr>
+              <a:t> to schedule sessions.</a:t>
+            </a:r>
+          </a:p>
+          <a:p>
+            <a:r>
+              <a:rPr lang="en-US" sz="1600" b="1" dirty="0">
+                <a:solidFill>
+                  <a:schemeClr val="bg1"/>
+                </a:solidFill>
+              </a:rPr>
+              <a:t>Equipment Items Section</a:t>
+            </a:r>
+            <a:r>
+              <a:rPr lang="en-US" sz="1600" dirty="0">
+                <a:solidFill>
+                  <a:schemeClr val="bg1"/>
+                </a:solidFill>
+              </a:rPr>
+              <a:t>:</a:t>
+            </a:r>
+          </a:p>
+          <a:p>
+            <a:pPr lvl="1"/>
+            <a:r>
+              <a:rPr lang="en-US" sz="1600" dirty="0">
+                <a:solidFill>
+                  <a:schemeClr val="bg1"/>
+                </a:solidFill>
+              </a:rPr>
+              <a:t>Enter </a:t>
+            </a:r>
+            <a:r>
+              <a:rPr lang="en-US" sz="1600" b="1" dirty="0">
+                <a:solidFill>
+                  <a:schemeClr val="bg1"/>
+                </a:solidFill>
+              </a:rPr>
+              <a:t>Title</a:t>
+            </a:r>
+            <a:r>
+              <a:rPr lang="en-US" sz="1600" dirty="0">
+                <a:solidFill>
+                  <a:schemeClr val="bg1"/>
+                </a:solidFill>
+              </a:rPr>
+              <a:t> and </a:t>
+            </a:r>
+            <a:r>
+              <a:rPr lang="en-US" sz="1600" b="1" dirty="0">
+                <a:solidFill>
+                  <a:schemeClr val="bg1"/>
+                </a:solidFill>
+              </a:rPr>
+              <a:t>Image URL</a:t>
+            </a:r>
+            <a:r>
+              <a:rPr lang="en-US" sz="1600" dirty="0">
+                <a:solidFill>
+                  <a:schemeClr val="bg1"/>
+                </a:solidFill>
+              </a:rPr>
+              <a:t> of gym equipment.</a:t>
+            </a:r>
+          </a:p>
+          <a:p>
+            <a:pPr lvl="1"/>
+            <a:r>
+              <a:rPr lang="en-US" sz="1600" dirty="0">
+                <a:solidFill>
+                  <a:schemeClr val="bg1"/>
+                </a:solidFill>
+              </a:rPr>
+              <a:t>Use the </a:t>
+            </a:r>
+            <a:r>
+              <a:rPr lang="en-US" sz="1600" b="1" dirty="0">
+                <a:solidFill>
+                  <a:schemeClr val="bg1"/>
+                </a:solidFill>
+              </a:rPr>
+              <a:t>“+ Add Equipment”</a:t>
+            </a:r>
+            <a:r>
+              <a:rPr lang="en-US" sz="1600" dirty="0">
+                <a:solidFill>
+                  <a:schemeClr val="bg1"/>
+                </a:solidFill>
+              </a:rPr>
+              <a:t> button to include multiple equipment items dynamically.</a:t>
+            </a:r>
+          </a:p>
+          <a:p>
+            <a:r>
+              <a:rPr lang="en-US" sz="1600" b="1" dirty="0">
+                <a:solidFill>
+                  <a:schemeClr val="bg1"/>
+                </a:solidFill>
+              </a:rPr>
+              <a:t>Service Details Section</a:t>
+            </a:r>
+            <a:r>
+              <a:rPr lang="en-US" sz="1600" dirty="0">
+                <a:solidFill>
+                  <a:schemeClr val="bg1"/>
+                </a:solidFill>
+              </a:rPr>
+              <a:t>:</a:t>
+            </a:r>
+          </a:p>
+          <a:p>
+            <a:pPr lvl="1"/>
+            <a:r>
+              <a:rPr lang="en-US" sz="1200" b="1" dirty="0">
+                <a:solidFill>
+                  <a:schemeClr val="bg1"/>
+                </a:solidFill>
+              </a:rPr>
+              <a:t>Service Name</a:t>
+            </a:r>
+            <a:r>
+              <a:rPr lang="en-US" sz="1200" dirty="0">
+                <a:solidFill>
+                  <a:schemeClr val="bg1"/>
+                </a:solidFill>
+              </a:rPr>
+              <a:t>: Name of the fitness service (e.g., Yoga, Cardio Training).</a:t>
+            </a:r>
+          </a:p>
+          <a:p>
+            <a:pPr lvl="1"/>
+            <a:r>
+              <a:rPr lang="en-US" altLang="en-US" sz="1200" b="1" dirty="0">
+                <a:solidFill>
+                  <a:schemeClr val="bg1"/>
+                </a:solidFill>
+                <a:latin typeface="Arial" panose="020B0604020202020204" pitchFamily="34" charset="0"/>
+              </a:rPr>
+              <a:t>Trainer Name</a:t>
+            </a:r>
+            <a:r>
+              <a:rPr lang="en-US" altLang="en-US" sz="1200" dirty="0">
+                <a:solidFill>
+                  <a:schemeClr val="bg1"/>
+                </a:solidFill>
+                <a:latin typeface="Arial" panose="020B0604020202020204" pitchFamily="34" charset="0"/>
+              </a:rPr>
+              <a:t>: Assigned trainer for the service.</a:t>
+            </a:r>
+          </a:p>
+          <a:p>
+            <a:pPr lvl="1"/>
+            <a:r>
+              <a:rPr lang="en-US" altLang="en-US" sz="1200" b="1" dirty="0">
+                <a:solidFill>
+                  <a:schemeClr val="bg1"/>
+                </a:solidFill>
+                <a:latin typeface="Arial" panose="020B0604020202020204" pitchFamily="34" charset="0"/>
+              </a:rPr>
+              <a:t>Price</a:t>
+            </a:r>
+            <a:r>
+              <a:rPr lang="en-US" altLang="en-US" sz="1200" dirty="0">
+                <a:solidFill>
+                  <a:schemeClr val="bg1"/>
+                </a:solidFill>
+                <a:latin typeface="Arial" panose="020B0604020202020204" pitchFamily="34" charset="0"/>
+              </a:rPr>
+              <a:t>: Cost of the fitness session.</a:t>
+            </a:r>
+          </a:p>
+          <a:p>
+            <a:pPr lvl="1"/>
+            <a:r>
+              <a:rPr lang="en-US" altLang="en-US" sz="1200" b="1" dirty="0">
+                <a:solidFill>
+                  <a:schemeClr val="bg1"/>
+                </a:solidFill>
+                <a:latin typeface="Arial" panose="020B0604020202020204" pitchFamily="34" charset="0"/>
+              </a:rPr>
+              <a:t>Image</a:t>
+            </a:r>
+            <a:r>
+              <a:rPr lang="en-US" altLang="en-US" sz="1200" dirty="0">
+                <a:solidFill>
+                  <a:schemeClr val="bg1"/>
+                </a:solidFill>
+                <a:latin typeface="Arial" panose="020B0604020202020204" pitchFamily="34" charset="0"/>
+              </a:rPr>
+              <a:t>: URL for a service image.</a:t>
+            </a:r>
+          </a:p>
+          <a:p>
+            <a:pPr lvl="1"/>
+            <a:r>
+              <a:rPr lang="en-US" altLang="en-US" sz="1200" b="1" dirty="0">
+                <a:solidFill>
+                  <a:schemeClr val="bg1"/>
+                </a:solidFill>
+                <a:latin typeface="Arial" panose="020B0604020202020204" pitchFamily="34" charset="0"/>
+              </a:rPr>
+              <a:t>Description Editor</a:t>
+            </a:r>
+            <a:r>
+              <a:rPr lang="en-US" altLang="en-US" sz="1200" dirty="0">
+                <a:solidFill>
+                  <a:schemeClr val="bg1"/>
+                </a:solidFill>
+                <a:latin typeface="Arial" panose="020B0604020202020204" pitchFamily="34" charset="0"/>
+              </a:rPr>
+              <a:t>: Rich text area to describe the service in detail using formatting options like Bold, Italic, Underline, H1, H2, and Links.</a:t>
+            </a:r>
+          </a:p>
+          <a:p>
+            <a:pPr lvl="1"/>
+            <a:endParaRPr lang="en-US" sz="1200" dirty="0"/>
+          </a:p>
+        </p:txBody>
+      </p:sp>
+      <p:sp>
+        <p:nvSpPr>
+          <p:cNvPr id="8" name="Rectangle 5">
+            <a:extLst>
+              <a:ext uri="{FF2B5EF4-FFF2-40B4-BE49-F238E27FC236}">
+                <a16:creationId xmlns:a16="http://schemas.microsoft.com/office/drawing/2014/main" id="{C0AF1DEB-03B2-D295-763C-32050C819301}"/>
+              </a:ext>
+            </a:extLst>
+          </p:cNvPr>
+          <p:cNvSpPr>
+            <a:spLocks noChangeArrowheads="1"/>
+          </p:cNvSpPr>
+          <p:nvPr/>
+        </p:nvSpPr>
+        <p:spPr bwMode="auto">
+          <a:xfrm>
+            <a:off x="0" y="-184666"/>
+            <a:ext cx="264816" cy="369332"/>
+          </a:xfrm>
+          <a:prstGeom prst="rect">
+            <a:avLst/>
+          </a:prstGeom>
+          <a:noFill/>
+          <a:ln>
+            <a:noFill/>
+          </a:ln>
+          <a:effectLst/>
+          <a:extLst>
+            <a:ext uri="{909E8E84-426E-40DD-AFC4-6F175D3DCCD1}">
+              <a14:hiddenFill xmlns:a14="http://schemas.microsoft.com/office/drawing/2010/main">
+                <a:solidFill>
+                  <a:schemeClr val="accent1"/>
+                </a:solidFill>
+              </a14:hiddenFill>
+            </a:ext>
+            <a:ext uri="{91240B29-F687-4F45-9708-019B960494DF}">
+              <a14:hiddenLine xmlns:a14="http://schemas.microsoft.com/office/drawing/2010/main" w="9525">
+                <a:solidFill>
+                  <a:schemeClr val="tx1"/>
+                </a:solidFill>
+                <a:miter lim="800000"/>
+                <a:headEnd/>
+                <a:tailEnd/>
+              </a14:hiddenLine>
+            </a:ext>
+            <a:ext uri="{AF507438-7753-43E0-B8FC-AC1667EBCBE1}">
+              <a14:hiddenEffects xmlns:a14="http://schemas.microsoft.com/office/drawing/2010/main">
+                <a:effectLst>
+                  <a:outerShdw dist="35921" dir="2700000" algn="ctr" rotWithShape="0">
+                    <a:schemeClr val="bg2"/>
+                  </a:outerShdw>
+                </a:effectLst>
+              </a14:hiddenEffects>
+            </a:ext>
+          </a:extLst>
+        </p:spPr>
+        <p:txBody>
+          <a:bodyPr vert="horz" wrap="none" lIns="91440" tIns="45720" rIns="91440" bIns="45720" numCol="1" anchor="ctr" anchorCtr="0" compatLnSpc="1">
+            <a:prstTxWarp prst="textNoShape">
+              <a:avLst/>
+            </a:prstTxWarp>
+            <a:spAutoFit/>
+          </a:bodyPr>
+          <a:lstStyle/>
+          <a:p>
+            <a:pPr marL="0" marR="0" lvl="0" indent="0" algn="l" defTabSz="914400" rtl="0" eaLnBrk="0" fontAlgn="base" latinLnBrk="0" hangingPunct="0">
+              <a:lnSpc>
+                <a:spcPct val="100000"/>
+              </a:lnSpc>
+              <a:spcBef>
+                <a:spcPct val="0"/>
+              </a:spcBef>
+              <a:spcAft>
+                <a:spcPct val="0"/>
+              </a:spcAft>
+              <a:buClrTx/>
+              <a:buSzTx/>
+              <a:buFontTx/>
+              <a:buChar char="•"/>
+              <a:tabLst/>
+            </a:pPr>
+            <a:endParaRPr kumimoji="0" lang="en-US" altLang="en-US" sz="1800" b="0" i="0" u="none" strike="noStrike" cap="none" normalizeH="0" baseline="0" dirty="0">
+              <a:ln>
+                <a:noFill/>
+              </a:ln>
+              <a:solidFill>
+                <a:schemeClr val="tx1"/>
+              </a:solidFill>
+              <a:effectLst/>
+              <a:latin typeface="Arial" panose="020B0604020202020204" pitchFamily="34" charset="0"/>
+            </a:endParaRPr>
+          </a:p>
+        </p:txBody>
+      </p:sp>
+      <p:sp>
+        <p:nvSpPr>
+          <p:cNvPr id="9" name="Rectangle 6">
+            <a:extLst>
+              <a:ext uri="{FF2B5EF4-FFF2-40B4-BE49-F238E27FC236}">
+                <a16:creationId xmlns:a16="http://schemas.microsoft.com/office/drawing/2014/main" id="{357D0AE1-AE89-E349-1D93-899456389554}"/>
+              </a:ext>
+            </a:extLst>
+          </p:cNvPr>
+          <p:cNvSpPr>
+            <a:spLocks noChangeArrowheads="1"/>
+          </p:cNvSpPr>
+          <p:nvPr/>
+        </p:nvSpPr>
+        <p:spPr bwMode="auto">
+          <a:xfrm>
+            <a:off x="0" y="-184666"/>
+            <a:ext cx="264816" cy="369332"/>
+          </a:xfrm>
+          <a:prstGeom prst="rect">
+            <a:avLst/>
+          </a:prstGeom>
+          <a:noFill/>
+          <a:ln>
+            <a:noFill/>
+          </a:ln>
+          <a:effectLst/>
+          <a:extLst>
+            <a:ext uri="{909E8E84-426E-40DD-AFC4-6F175D3DCCD1}">
+              <a14:hiddenFill xmlns:a14="http://schemas.microsoft.com/office/drawing/2010/main">
+                <a:solidFill>
+                  <a:schemeClr val="accent1"/>
+                </a:solidFill>
+              </a14:hiddenFill>
+            </a:ext>
+            <a:ext uri="{91240B29-F687-4F45-9708-019B960494DF}">
+              <a14:hiddenLine xmlns:a14="http://schemas.microsoft.com/office/drawing/2010/main" w="9525">
+                <a:solidFill>
+                  <a:schemeClr val="tx1"/>
+                </a:solidFill>
+                <a:miter lim="800000"/>
+                <a:headEnd/>
+                <a:tailEnd/>
+              </a14:hiddenLine>
+            </a:ext>
+            <a:ext uri="{AF507438-7753-43E0-B8FC-AC1667EBCBE1}">
+              <a14:hiddenEffects xmlns:a14="http://schemas.microsoft.com/office/drawing/2010/main">
+                <a:effectLst>
+                  <a:outerShdw dist="35921" dir="2700000" algn="ctr" rotWithShape="0">
+                    <a:schemeClr val="bg2"/>
+                  </a:outerShdw>
+                </a:effectLst>
+              </a14:hiddenEffects>
+            </a:ext>
+          </a:extLst>
+        </p:spPr>
+        <p:txBody>
+          <a:bodyPr vert="horz" wrap="none" lIns="91440" tIns="45720" rIns="91440" bIns="45720" numCol="1" anchor="ctr" anchorCtr="0" compatLnSpc="1">
+            <a:prstTxWarp prst="textNoShape">
+              <a:avLst/>
+            </a:prstTxWarp>
+            <a:spAutoFit/>
+          </a:bodyPr>
+          <a:lstStyle/>
+          <a:p>
+            <a:pPr marL="0" marR="0" lvl="0" indent="0" algn="l" defTabSz="914400" rtl="0" eaLnBrk="0" fontAlgn="base" latinLnBrk="0" hangingPunct="0">
+              <a:lnSpc>
+                <a:spcPct val="100000"/>
+              </a:lnSpc>
+              <a:spcBef>
+                <a:spcPct val="0"/>
+              </a:spcBef>
+              <a:spcAft>
+                <a:spcPct val="0"/>
+              </a:spcAft>
+              <a:buClrTx/>
+              <a:buSzTx/>
+              <a:buFontTx/>
+              <a:buChar char="•"/>
+              <a:tabLst/>
+            </a:pPr>
+            <a:endParaRPr kumimoji="0" lang="en-US" altLang="en-US" sz="1800" b="0" i="0" u="none" strike="noStrike" cap="none" normalizeH="0" baseline="0" dirty="0">
+              <a:ln>
+                <a:noFill/>
+              </a:ln>
+              <a:solidFill>
+                <a:schemeClr val="tx1"/>
+              </a:solidFill>
+              <a:effectLst/>
+              <a:latin typeface="Arial" panose="020B0604020202020204" pitchFamily="34" charset="0"/>
+            </a:endParaRPr>
           </a:p>
         </p:txBody>
       </p:sp>
     </p:spTree>
+    <p:extLst>
+      <p:ext uri="{BB962C8B-B14F-4D97-AF65-F5344CB8AC3E}">
+        <p14:creationId xmlns:p14="http://schemas.microsoft.com/office/powerpoint/2010/main" val="1203373305"/>
+      </p:ext>
+    </p:extLst>
   </p:cSld>
   <p:clrMapOvr>
     <a:masterClrMapping/>
@@ -3703,7 +5717,7 @@
 </file>
 
 <file path=ppt/slides/slide18.xml><?xml version="1.0" encoding="utf-8"?>
-<p:sld xmlns:a="http://schemas.openxmlformats.org/drawingml/2006/main" xmlns:p="http://schemas.openxmlformats.org/presentationml/2006/main" xmlns:r="http://schemas.openxmlformats.org/officeDocument/2006/relationships">
+<p:sld xmlns:a="http://schemas.openxmlformats.org/drawingml/2006/main" xmlns:r="http://schemas.openxmlformats.org/officeDocument/2006/relationships" xmlns:p="http://schemas.openxmlformats.org/presentationml/2006/main">
   <p:cSld>
     <p:spTree>
       <p:nvGrpSpPr>
@@ -3711,10 +5725,53 @@
         <p:cNvGrpSpPr/>
         <p:nvPr/>
       </p:nvGrpSpPr>
-      <p:grpSpPr/>
-      <p:sp>
-        <p:nvSpPr>
-          <p:cNvPr id="2" name="Title 1"/>
+      <p:grpSpPr>
+        <a:xfrm>
+          <a:off x="0" y="0"/>
+          <a:ext cx="0" cy="0"/>
+          <a:chOff x="0" y="0"/>
+          <a:chExt cx="0" cy="0"/>
+        </a:xfrm>
+      </p:grpSpPr>
+      <p:pic>
+        <p:nvPicPr>
+          <p:cNvPr id="4" name="Picture 3">
+            <a:extLst>
+              <a:ext uri="{FF2B5EF4-FFF2-40B4-BE49-F238E27FC236}">
+                <a16:creationId xmlns:a16="http://schemas.microsoft.com/office/drawing/2014/main" id="{16024675-A398-EF8A-1BA7-A862A3F63C72}"/>
+              </a:ext>
+            </a:extLst>
+          </p:cNvPr>
+          <p:cNvPicPr>
+            <a:picLocks noChangeAspect="1"/>
+          </p:cNvPicPr>
+          <p:nvPr/>
+        </p:nvPicPr>
+        <p:blipFill>
+          <a:blip r:embed="rId2"/>
+          <a:stretch>
+            <a:fillRect/>
+          </a:stretch>
+        </p:blipFill>
+        <p:spPr>
+          <a:xfrm>
+            <a:off x="0" y="0"/>
+            <a:ext cx="9144000" cy="6858000"/>
+          </a:xfrm>
+          <a:prstGeom prst="rect">
+            <a:avLst/>
+          </a:prstGeom>
+        </p:spPr>
+      </p:pic>
+      <p:sp>
+        <p:nvSpPr>
+          <p:cNvPr id="2" name="Title 1">
+            <a:extLst>
+              <a:ext uri="{FF2B5EF4-FFF2-40B4-BE49-F238E27FC236}">
+                <a16:creationId xmlns:a16="http://schemas.microsoft.com/office/drawing/2014/main" id="{E4CB4460-77B5-4559-0353-C750B5FE79B7}"/>
+              </a:ext>
+            </a:extLst>
+          </p:cNvPr>
           <p:cNvSpPr>
             <a:spLocks noGrp="1"/>
           </p:cNvSpPr>
@@ -3724,37 +5781,63 @@
         </p:nvSpPr>
         <p:spPr/>
         <p:txBody>
+          <a:bodyPr>
+            <a:normAutofit/>
+          </a:bodyPr>
+          <a:lstStyle/>
+          <a:p>
+            <a:r>
+              <a:rPr lang="en-US" dirty="0">
+                <a:solidFill>
+                  <a:schemeClr val="bg1"/>
+                </a:solidFill>
+              </a:rPr>
+              <a:t>Using TipTap Extension</a:t>
+            </a:r>
+          </a:p>
+        </p:txBody>
+      </p:sp>
+      <p:sp>
+        <p:nvSpPr>
+          <p:cNvPr id="3" name="Content Placeholder 2">
+            <a:extLst>
+              <a:ext uri="{FF2B5EF4-FFF2-40B4-BE49-F238E27FC236}">
+                <a16:creationId xmlns:a16="http://schemas.microsoft.com/office/drawing/2014/main" id="{1BE38023-FA8C-1C56-C80C-76DAF42DD93B}"/>
+              </a:ext>
+            </a:extLst>
+          </p:cNvPr>
+          <p:cNvSpPr>
+            <a:spLocks noGrp="1"/>
+          </p:cNvSpPr>
+          <p:nvPr>
+            <p:ph idx="1"/>
+          </p:nvPr>
+        </p:nvSpPr>
+        <p:spPr/>
+        <p:txBody>
           <a:bodyPr/>
           <a:lstStyle/>
           <a:p>
             <a:r>
-              <a:t>Frontend Libraries Used</a:t>
-            </a:r>
-          </a:p>
-        </p:txBody>
-      </p:sp>
-      <p:sp>
-        <p:nvSpPr>
-          <p:cNvPr id="3" name="Content Placeholder 2"/>
-          <p:cNvSpPr>
-            <a:spLocks noGrp="1"/>
-          </p:cNvSpPr>
-          <p:nvPr>
-            <p:ph idx="1"/>
-          </p:nvPr>
-        </p:nvSpPr>
-        <p:spPr/>
-        <p:txBody>
-          <a:bodyPr/>
-          <a:lstStyle/>
-          <a:p>
-            <a:r>
-              <a:t>@emotion/react, @mui/material, @tiptap/react, @tailwindcss/vite, framer-motion, axios, react-icons, etc.</a:t>
-            </a:r>
+              <a:rPr lang="en-US" sz="2100" dirty="0">
+                <a:solidFill>
+                  <a:schemeClr val="bg1"/>
+                </a:solidFill>
+              </a:rPr>
+              <a:t>TipTap provides a powerful WYSIWYG editor for admins to upload rich text descriptions. They can add formatted text, links, highlights, images, and more — ensuring that every service description is visually engaging.</a:t>
+            </a:r>
+          </a:p>
+          <a:p>
+            <a:endParaRPr lang="en-US" dirty="0"/>
           </a:p>
         </p:txBody>
       </p:sp>
     </p:spTree>
+    <p:extLst>
+      <p:ext uri="{BB962C8B-B14F-4D97-AF65-F5344CB8AC3E}">
+        <p14:creationId xmlns:p14="http://schemas.microsoft.com/office/powerpoint/2010/main" val="445671801"/>
+      </p:ext>
+    </p:extLst>
   </p:cSld>
   <p:clrMapOvr>
     <a:masterClrMapping/>
@@ -3763,7 +5846,7 @@
 </file>
 
 <file path=ppt/slides/slide19.xml><?xml version="1.0" encoding="utf-8"?>
-<p:sld xmlns:a="http://schemas.openxmlformats.org/drawingml/2006/main" xmlns:p="http://schemas.openxmlformats.org/presentationml/2006/main" xmlns:r="http://schemas.openxmlformats.org/officeDocument/2006/relationships">
+<p:sld xmlns:a="http://schemas.openxmlformats.org/drawingml/2006/main" xmlns:r="http://schemas.openxmlformats.org/officeDocument/2006/relationships" xmlns:p="http://schemas.openxmlformats.org/presentationml/2006/main">
   <p:cSld>
     <p:spTree>
       <p:nvGrpSpPr>
@@ -3771,10 +5854,53 @@
         <p:cNvGrpSpPr/>
         <p:nvPr/>
       </p:nvGrpSpPr>
-      <p:grpSpPr/>
-      <p:sp>
-        <p:nvSpPr>
-          <p:cNvPr id="2" name="Title 1"/>
+      <p:grpSpPr>
+        <a:xfrm>
+          <a:off x="0" y="0"/>
+          <a:ext cx="0" cy="0"/>
+          <a:chOff x="0" y="0"/>
+          <a:chExt cx="0" cy="0"/>
+        </a:xfrm>
+      </p:grpSpPr>
+      <p:pic>
+        <p:nvPicPr>
+          <p:cNvPr id="6" name="Picture 5">
+            <a:extLst>
+              <a:ext uri="{FF2B5EF4-FFF2-40B4-BE49-F238E27FC236}">
+                <a16:creationId xmlns:a16="http://schemas.microsoft.com/office/drawing/2014/main" id="{D333C051-9765-3D96-5C7B-8EB7041D5F64}"/>
+              </a:ext>
+            </a:extLst>
+          </p:cNvPr>
+          <p:cNvPicPr>
+            <a:picLocks noChangeAspect="1"/>
+          </p:cNvPicPr>
+          <p:nvPr/>
+        </p:nvPicPr>
+        <p:blipFill>
+          <a:blip r:embed="rId2"/>
+          <a:stretch>
+            <a:fillRect/>
+          </a:stretch>
+        </p:blipFill>
+        <p:spPr>
+          <a:xfrm>
+            <a:off x="0" y="0"/>
+            <a:ext cx="9144000" cy="6858000"/>
+          </a:xfrm>
+          <a:prstGeom prst="rect">
+            <a:avLst/>
+          </a:prstGeom>
+        </p:spPr>
+      </p:pic>
+      <p:sp>
+        <p:nvSpPr>
+          <p:cNvPr id="2" name="Title 1">
+            <a:extLst>
+              <a:ext uri="{FF2B5EF4-FFF2-40B4-BE49-F238E27FC236}">
+                <a16:creationId xmlns:a16="http://schemas.microsoft.com/office/drawing/2014/main" id="{BE0D05A4-091D-C03C-2603-0B2292EE5131}"/>
+              </a:ext>
+            </a:extLst>
+          </p:cNvPr>
           <p:cNvSpPr>
             <a:spLocks noGrp="1"/>
           </p:cNvSpPr>
@@ -3788,14 +5914,25 @@
           <a:lstStyle/>
           <a:p>
             <a:r>
-              <a:t>Backend Stack</a:t>
-            </a:r>
-          </a:p>
-        </p:txBody>
-      </p:sp>
-      <p:sp>
-        <p:nvSpPr>
-          <p:cNvPr id="3" name="Content Placeholder 2"/>
+              <a:rPr lang="en-US" dirty="0">
+                <a:solidFill>
+                  <a:schemeClr val="bg1"/>
+                </a:solidFill>
+              </a:rPr>
+              <a:t>Admin: Sidebar Navigation</a:t>
+            </a:r>
+          </a:p>
+        </p:txBody>
+      </p:sp>
+      <p:sp>
+        <p:nvSpPr>
+          <p:cNvPr id="3" name="Content Placeholder 2">
+            <a:extLst>
+              <a:ext uri="{FF2B5EF4-FFF2-40B4-BE49-F238E27FC236}">
+                <a16:creationId xmlns:a16="http://schemas.microsoft.com/office/drawing/2014/main" id="{E885366B-4337-633A-3DEC-2D25ED17E6AC}"/>
+              </a:ext>
+            </a:extLst>
+          </p:cNvPr>
           <p:cNvSpPr>
             <a:spLocks noGrp="1"/>
           </p:cNvSpPr>
@@ -3809,17 +5946,159 @@
           <a:lstStyle/>
           <a:p>
             <a:r>
-              <a:t>MongoDB database</a:t>
-            </a:r>
-          </a:p>
-          <a:p>
-            <a:r>
-              <a:t>Connection: mongodb://127.0.0.1:27017/cruise_management</a:t>
-            </a:r>
+              <a:rPr lang="en-US" sz="2100" dirty="0">
+                <a:solidFill>
+                  <a:schemeClr val="bg1"/>
+                </a:solidFill>
+              </a:rPr>
+              <a:t>Dashboard</a:t>
+            </a:r>
+          </a:p>
+          <a:p>
+            <a:r>
+              <a:rPr lang="en-US" altLang="en-US" sz="2100" dirty="0">
+                <a:solidFill>
+                  <a:schemeClr val="bg1"/>
+                </a:solidFill>
+              </a:rPr>
+              <a:t>Category Management</a:t>
+            </a:r>
+          </a:p>
+          <a:p>
+            <a:r>
+              <a:rPr lang="en-US" altLang="en-US" sz="2100" dirty="0">
+                <a:solidFill>
+                  <a:schemeClr val="bg1"/>
+                </a:solidFill>
+              </a:rPr>
+              <a:t>Facilities</a:t>
+            </a:r>
+          </a:p>
+          <a:p>
+            <a:r>
+              <a:rPr lang="en-US" altLang="en-US" sz="2100" dirty="0">
+                <a:solidFill>
+                  <a:schemeClr val="bg1"/>
+                </a:solidFill>
+              </a:rPr>
+              <a:t>View User</a:t>
+            </a:r>
+          </a:p>
+          <a:p>
+            <a:r>
+              <a:rPr lang="en-US" altLang="en-US" sz="2100" dirty="0">
+                <a:solidFill>
+                  <a:schemeClr val="bg1"/>
+                </a:solidFill>
+              </a:rPr>
+              <a:t>View Gallery, Contact, Feedback, and Testimonial under Miscellaneous</a:t>
+            </a:r>
+          </a:p>
+          <a:p>
+            <a:endParaRPr lang="en-US" dirty="0"/>
+          </a:p>
+        </p:txBody>
+      </p:sp>
+      <p:sp>
+        <p:nvSpPr>
+          <p:cNvPr id="5" name="Rectangle 2">
+            <a:extLst>
+              <a:ext uri="{FF2B5EF4-FFF2-40B4-BE49-F238E27FC236}">
+                <a16:creationId xmlns:a16="http://schemas.microsoft.com/office/drawing/2014/main" id="{934229EA-3EE6-D582-629B-0D88B68BA2B4}"/>
+              </a:ext>
+            </a:extLst>
+          </p:cNvPr>
+          <p:cNvSpPr>
+            <a:spLocks noChangeArrowheads="1"/>
+          </p:cNvSpPr>
+          <p:nvPr/>
+        </p:nvSpPr>
+        <p:spPr bwMode="auto">
+          <a:xfrm>
+            <a:off x="0" y="-184666"/>
+            <a:ext cx="264816" cy="369332"/>
+          </a:xfrm>
+          <a:prstGeom prst="rect">
+            <a:avLst/>
+          </a:prstGeom>
+          <a:noFill/>
+          <a:ln>
+            <a:noFill/>
+          </a:ln>
+          <a:effectLst/>
+          <a:extLst>
+            <a:ext uri="{909E8E84-426E-40DD-AFC4-6F175D3DCCD1}">
+              <a14:hiddenFill xmlns:a14="http://schemas.microsoft.com/office/drawing/2010/main">
+                <a:solidFill>
+                  <a:schemeClr val="accent1"/>
+                </a:solidFill>
+              </a14:hiddenFill>
+            </a:ext>
+            <a:ext uri="{91240B29-F687-4F45-9708-019B960494DF}">
+              <a14:hiddenLine xmlns:a14="http://schemas.microsoft.com/office/drawing/2010/main" w="9525">
+                <a:solidFill>
+                  <a:schemeClr val="tx1"/>
+                </a:solidFill>
+                <a:miter lim="800000"/>
+                <a:headEnd/>
+                <a:tailEnd/>
+              </a14:hiddenLine>
+            </a:ext>
+            <a:ext uri="{AF507438-7753-43E0-B8FC-AC1667EBCBE1}">
+              <a14:hiddenEffects xmlns:a14="http://schemas.microsoft.com/office/drawing/2010/main">
+                <a:effectLst>
+                  <a:outerShdw dist="35921" dir="2700000" algn="ctr" rotWithShape="0">
+                    <a:schemeClr val="bg2"/>
+                  </a:outerShdw>
+                </a:effectLst>
+              </a14:hiddenEffects>
+            </a:ext>
+          </a:extLst>
+        </p:spPr>
+        <p:txBody>
+          <a:bodyPr vert="horz" wrap="none" lIns="91440" tIns="45720" rIns="91440" bIns="45720" numCol="1" anchor="ctr" anchorCtr="0" compatLnSpc="1">
+            <a:prstTxWarp prst="textNoShape">
+              <a:avLst/>
+            </a:prstTxWarp>
+            <a:spAutoFit/>
+          </a:bodyPr>
+          <a:lstStyle/>
+          <a:p>
+            <a:pPr marL="0" marR="0" lvl="0" indent="0" algn="l" defTabSz="914400" rtl="0" eaLnBrk="0" fontAlgn="base" latinLnBrk="0" hangingPunct="0">
+              <a:lnSpc>
+                <a:spcPct val="100000"/>
+              </a:lnSpc>
+              <a:spcBef>
+                <a:spcPct val="0"/>
+              </a:spcBef>
+              <a:spcAft>
+                <a:spcPct val="0"/>
+              </a:spcAft>
+              <a:buClrTx/>
+              <a:buSzTx/>
+              <a:buFontTx/>
+              <a:buChar char="•"/>
+              <a:tabLst/>
+            </a:pPr>
+            <a:endParaRPr kumimoji="0" lang="en-US" altLang="en-US" sz="1800" b="0" i="0" u="none" strike="noStrike" cap="none" normalizeH="0" baseline="0" dirty="0">
+              <a:ln>
+                <a:noFill/>
+              </a:ln>
+              <a:solidFill>
+                <a:schemeClr val="tx1"/>
+              </a:solidFill>
+              <a:effectLst/>
+              <a:latin typeface="Arial" panose="020B0604020202020204" pitchFamily="34" charset="0"/>
+            </a:endParaRPr>
           </a:p>
         </p:txBody>
       </p:sp>
     </p:spTree>
+    <p:extLst>
+      <p:ext uri="{BB962C8B-B14F-4D97-AF65-F5344CB8AC3E}">
+        <p14:creationId xmlns:p14="http://schemas.microsoft.com/office/powerpoint/2010/main" val="361632726"/>
+      </p:ext>
+    </p:extLst>
   </p:cSld>
   <p:clrMapOvr>
     <a:masterClrMapping/>
@@ -3828,7 +6107,7 @@
 </file>
 
 <file path=ppt/slides/slide2.xml><?xml version="1.0" encoding="utf-8"?>
-<p:sld xmlns:a="http://schemas.openxmlformats.org/drawingml/2006/main" xmlns:p="http://schemas.openxmlformats.org/presentationml/2006/main" xmlns:r="http://schemas.openxmlformats.org/officeDocument/2006/relationships">
+<p:sld xmlns:a="http://schemas.openxmlformats.org/drawingml/2006/main" xmlns:r="http://schemas.openxmlformats.org/officeDocument/2006/relationships" xmlns:p="http://schemas.openxmlformats.org/presentationml/2006/main">
   <p:cSld>
     <p:spTree>
       <p:nvGrpSpPr>
@@ -3836,10 +6115,53 @@
         <p:cNvGrpSpPr/>
         <p:nvPr/>
       </p:nvGrpSpPr>
-      <p:grpSpPr/>
-      <p:sp>
-        <p:nvSpPr>
-          <p:cNvPr id="2" name="Title 1"/>
+      <p:grpSpPr>
+        <a:xfrm>
+          <a:off x="0" y="0"/>
+          <a:ext cx="0" cy="0"/>
+          <a:chOff x="0" y="0"/>
+          <a:chExt cx="0" cy="0"/>
+        </a:xfrm>
+      </p:grpSpPr>
+      <p:pic>
+        <p:nvPicPr>
+          <p:cNvPr id="11" name="Picture 10">
+            <a:extLst>
+              <a:ext uri="{FF2B5EF4-FFF2-40B4-BE49-F238E27FC236}">
+                <a16:creationId xmlns:a16="http://schemas.microsoft.com/office/drawing/2014/main" id="{A7A1F1A3-7206-8F3F-92E7-1B8E3EF00904}"/>
+              </a:ext>
+            </a:extLst>
+          </p:cNvPr>
+          <p:cNvPicPr>
+            <a:picLocks noChangeAspect="1"/>
+          </p:cNvPicPr>
+          <p:nvPr/>
+        </p:nvPicPr>
+        <p:blipFill>
+          <a:blip r:embed="rId2"/>
+          <a:stretch>
+            <a:fillRect/>
+          </a:stretch>
+        </p:blipFill>
+        <p:spPr>
+          <a:xfrm>
+            <a:off x="0" y="0"/>
+            <a:ext cx="9143999" cy="6858000"/>
+          </a:xfrm>
+          <a:prstGeom prst="rect">
+            <a:avLst/>
+          </a:prstGeom>
+        </p:spPr>
+      </p:pic>
+      <p:sp>
+        <p:nvSpPr>
+          <p:cNvPr id="2" name="Title 1">
+            <a:extLst>
+              <a:ext uri="{FF2B5EF4-FFF2-40B4-BE49-F238E27FC236}">
+                <a16:creationId xmlns:a16="http://schemas.microsoft.com/office/drawing/2014/main" id="{32E32E1F-B144-3955-E064-6376EBD44939}"/>
+              </a:ext>
+            </a:extLst>
+          </p:cNvPr>
           <p:cNvSpPr>
             <a:spLocks noGrp="1"/>
           </p:cNvSpPr>
@@ -3849,18 +6171,31 @@
         </p:nvSpPr>
         <p:spPr/>
         <p:txBody>
-          <a:bodyPr/>
-          <a:lstStyle/>
-          <a:p>
-            <a:r>
-              <a:t>Admin Features</a:t>
-            </a:r>
-          </a:p>
-        </p:txBody>
-      </p:sp>
-      <p:sp>
-        <p:nvSpPr>
-          <p:cNvPr id="3" name="Content Placeholder 2"/>
+          <a:bodyPr>
+            <a:noAutofit/>
+          </a:bodyPr>
+          <a:lstStyle/>
+          <a:p>
+            <a:r>
+              <a:rPr lang="en-US" sz="3600" dirty="0">
+                <a:solidFill>
+                  <a:schemeClr val="bg1"/>
+                </a:solidFill>
+              </a:rPr>
+              <a:t>User Interface – Feature Access on Home and Services</a:t>
+            </a:r>
+          </a:p>
+        </p:txBody>
+      </p:sp>
+      <p:sp>
+        <p:nvSpPr>
+          <p:cNvPr id="3" name="Content Placeholder 2">
+            <a:extLst>
+              <a:ext uri="{FF2B5EF4-FFF2-40B4-BE49-F238E27FC236}">
+                <a16:creationId xmlns:a16="http://schemas.microsoft.com/office/drawing/2014/main" id="{33500659-963C-B1DB-7519-D6BB2CA10355}"/>
+              </a:ext>
+            </a:extLst>
+          </p:cNvPr>
           <p:cNvSpPr>
             <a:spLocks noGrp="1"/>
           </p:cNvSpPr>
@@ -3868,28 +6203,415 @@
             <p:ph idx="1"/>
           </p:nvPr>
         </p:nvSpPr>
-        <p:spPr/>
-        <p:txBody>
-          <a:bodyPr/>
-          <a:lstStyle/>
-          <a:p>
-            <a:r>
-              <a:t>• Add categories</a:t>
-            </a:r>
-          </a:p>
-          <a:p>
-            <a:r>
-              <a:t>• Add users (Manager, Supervisor, Headcook)</a:t>
-            </a:r>
-          </a:p>
-          <a:p>
-            <a:r>
-              <a:t>• Upload descriptions using TipTap extension</a:t>
-            </a:r>
+        <p:spPr>
+          <a:xfrm>
+            <a:off x="457200" y="1600200"/>
+            <a:ext cx="8229600" cy="4616116"/>
+          </a:xfrm>
+        </p:spPr>
+        <p:txBody>
+          <a:bodyPr>
+            <a:normAutofit fontScale="92500" lnSpcReduction="10000"/>
+          </a:bodyPr>
+          <a:lstStyle/>
+          <a:p>
+            <a:r>
+              <a:rPr lang="en-US" sz="2400" dirty="0">
+                <a:solidFill>
+                  <a:schemeClr val="bg1"/>
+                </a:solidFill>
+              </a:rPr>
+              <a:t>Home Page Access</a:t>
+            </a:r>
+          </a:p>
+          <a:p>
+            <a:pPr lvl="1"/>
+            <a:r>
+              <a:rPr lang="en-US" sz="1800" dirty="0">
+                <a:solidFill>
+                  <a:schemeClr val="bg1"/>
+                </a:solidFill>
+              </a:rPr>
+              <a:t>A banner video showcasing the platform’s theme or welcome message.</a:t>
+            </a:r>
+            <a:r>
+              <a:rPr lang="en-US" altLang="en-US" sz="1800" dirty="0">
+                <a:solidFill>
+                  <a:schemeClr val="bg1"/>
+                </a:solidFill>
+                <a:latin typeface="Arial" panose="020B0604020202020204" pitchFamily="34" charset="0"/>
+              </a:rPr>
+              <a:t> </a:t>
+            </a:r>
+          </a:p>
+          <a:p>
+            <a:pPr lvl="1"/>
+            <a:r>
+              <a:rPr lang="en-US" altLang="en-US" sz="1800" dirty="0">
+                <a:solidFill>
+                  <a:schemeClr val="bg1"/>
+                </a:solidFill>
+                <a:latin typeface="Arial" panose="020B0604020202020204" pitchFamily="34" charset="0"/>
+              </a:rPr>
+              <a:t>A Facilities section highlighting the available services.</a:t>
+            </a:r>
+          </a:p>
+          <a:p>
+            <a:pPr lvl="1"/>
+            <a:r>
+              <a:rPr lang="en-US" altLang="en-US" sz="1800" dirty="0">
+                <a:solidFill>
+                  <a:schemeClr val="bg1"/>
+                </a:solidFill>
+                <a:latin typeface="Arial" panose="020B0604020202020204" pitchFamily="34" charset="0"/>
+              </a:rPr>
+              <a:t>A Testimonial section showing approved user experiences.</a:t>
+            </a:r>
+          </a:p>
+          <a:p>
+            <a:pPr lvl="1"/>
+            <a:r>
+              <a:rPr lang="en-US" altLang="en-US" sz="1800" dirty="0">
+                <a:solidFill>
+                  <a:schemeClr val="bg1"/>
+                </a:solidFill>
+                <a:latin typeface="Arial" panose="020B0604020202020204" pitchFamily="34" charset="0"/>
+              </a:rPr>
+              <a:t>A Gallery section displaying images of services and events in carousel.</a:t>
+            </a:r>
+          </a:p>
+          <a:p>
+            <a:pPr marL="457200" lvl="1" indent="0">
+              <a:buNone/>
+            </a:pPr>
+            <a:endParaRPr lang="en-US" dirty="0">
+              <a:solidFill>
+                <a:schemeClr val="bg1"/>
+              </a:solidFill>
+            </a:endParaRPr>
+          </a:p>
+          <a:p>
+            <a:r>
+              <a:rPr lang="en-US" sz="2800" dirty="0">
+                <a:solidFill>
+                  <a:schemeClr val="bg1"/>
+                </a:solidFill>
+              </a:rPr>
+              <a:t>Catering &amp; Stationary Items Viewing</a:t>
+            </a:r>
+          </a:p>
+          <a:p>
+            <a:pPr lvl="1"/>
+            <a:r>
+              <a:rPr lang="en-US" altLang="en-US" sz="1600" dirty="0">
+                <a:solidFill>
+                  <a:schemeClr val="bg1"/>
+                </a:solidFill>
+                <a:latin typeface="Arial" panose="020B0604020202020204" pitchFamily="34" charset="0"/>
+              </a:rPr>
+              <a:t>Users can browse through individual items listed under </a:t>
+            </a:r>
+            <a:r>
+              <a:rPr lang="en-US" altLang="en-US" sz="1600" b="1" dirty="0">
+                <a:solidFill>
+                  <a:schemeClr val="bg1"/>
+                </a:solidFill>
+                <a:latin typeface="Arial" panose="020B0604020202020204" pitchFamily="34" charset="0"/>
+              </a:rPr>
+              <a:t>Catering</a:t>
+            </a:r>
+            <a:r>
+              <a:rPr lang="en-US" altLang="en-US" sz="1600" dirty="0">
+                <a:solidFill>
+                  <a:schemeClr val="bg1"/>
+                </a:solidFill>
+                <a:latin typeface="Arial" panose="020B0604020202020204" pitchFamily="34" charset="0"/>
+              </a:rPr>
+              <a:t> and </a:t>
+            </a:r>
+            <a:r>
+              <a:rPr lang="en-US" altLang="en-US" sz="1600" b="1" dirty="0">
+                <a:solidFill>
+                  <a:schemeClr val="bg1"/>
+                </a:solidFill>
+                <a:latin typeface="Arial" panose="020B0604020202020204" pitchFamily="34" charset="0"/>
+              </a:rPr>
+              <a:t>Stationaries</a:t>
+            </a:r>
+            <a:r>
+              <a:rPr lang="en-US" altLang="en-US" sz="1600" dirty="0">
+                <a:solidFill>
+                  <a:schemeClr val="bg1"/>
+                </a:solidFill>
+                <a:latin typeface="Arial" panose="020B0604020202020204" pitchFamily="34" charset="0"/>
+              </a:rPr>
+              <a:t>.</a:t>
+            </a:r>
+          </a:p>
+          <a:p>
+            <a:pPr lvl="1"/>
+            <a:r>
+              <a:rPr lang="en-US" altLang="en-US" sz="1600" dirty="0">
+                <a:solidFill>
+                  <a:schemeClr val="bg1"/>
+                </a:solidFill>
+                <a:latin typeface="Arial" panose="020B0604020202020204" pitchFamily="34" charset="0"/>
+              </a:rPr>
+              <a:t>Cart or order functionality is disabled unless the user logs in.</a:t>
+            </a:r>
+          </a:p>
+          <a:p>
+            <a:pPr lvl="1"/>
+            <a:r>
+              <a:rPr lang="en-US" altLang="en-US" sz="1600" dirty="0">
+                <a:solidFill>
+                  <a:schemeClr val="bg1"/>
+                </a:solidFill>
+                <a:latin typeface="Arial" panose="020B0604020202020204" pitchFamily="34" charset="0"/>
+              </a:rPr>
+              <a:t>Ideal for previewing available options before placing an order.</a:t>
+            </a:r>
+          </a:p>
+          <a:p>
+            <a:pPr marL="457200" lvl="1" indent="0">
+              <a:buNone/>
+            </a:pPr>
+            <a:endParaRPr lang="en-US" sz="2400" dirty="0">
+              <a:solidFill>
+                <a:schemeClr val="bg1"/>
+              </a:solidFill>
+            </a:endParaRPr>
+          </a:p>
+          <a:p>
+            <a:r>
+              <a:rPr lang="en-US" sz="2800" dirty="0">
+                <a:solidFill>
+                  <a:schemeClr val="bg1"/>
+                </a:solidFill>
+              </a:rPr>
+              <a:t>Fitness, Salon, Movie &amp; Party Hall Services</a:t>
+            </a:r>
+          </a:p>
+          <a:p>
+            <a:pPr lvl="1"/>
+            <a:r>
+              <a:rPr lang="en-US" altLang="en-US" sz="1600" dirty="0">
+                <a:solidFill>
+                  <a:schemeClr val="bg1"/>
+                </a:solidFill>
+                <a:latin typeface="Arial" panose="020B0604020202020204" pitchFamily="34" charset="0"/>
+              </a:rPr>
+              <a:t>These services are fully visible to users (including images, timings, etc.).</a:t>
+            </a:r>
+          </a:p>
+          <a:p>
+            <a:pPr lvl="1"/>
+            <a:r>
+              <a:rPr lang="en-US" altLang="en-US" sz="1600" dirty="0">
+                <a:solidFill>
+                  <a:schemeClr val="bg1"/>
+                </a:solidFill>
+                <a:latin typeface="Arial" panose="020B0604020202020204" pitchFamily="34" charset="0"/>
+              </a:rPr>
+              <a:t>Booking is restricted – users must log in to make a reservation or place an order.</a:t>
+            </a:r>
+          </a:p>
+        </p:txBody>
+      </p:sp>
+      <p:sp>
+        <p:nvSpPr>
+          <p:cNvPr id="5" name="Rectangle 1">
+            <a:extLst>
+              <a:ext uri="{FF2B5EF4-FFF2-40B4-BE49-F238E27FC236}">
+                <a16:creationId xmlns:a16="http://schemas.microsoft.com/office/drawing/2014/main" id="{67E6B708-946D-75BC-AEDA-191D66A82F11}"/>
+              </a:ext>
+            </a:extLst>
+          </p:cNvPr>
+          <p:cNvSpPr>
+            <a:spLocks noChangeArrowheads="1"/>
+          </p:cNvSpPr>
+          <p:nvPr/>
+        </p:nvSpPr>
+        <p:spPr bwMode="auto">
+          <a:xfrm>
+            <a:off x="0" y="-184666"/>
+            <a:ext cx="264816" cy="369332"/>
+          </a:xfrm>
+          <a:prstGeom prst="rect">
+            <a:avLst/>
+          </a:prstGeom>
+          <a:noFill/>
+          <a:ln>
+            <a:noFill/>
+          </a:ln>
+          <a:effectLst/>
+          <a:extLst>
+            <a:ext uri="{909E8E84-426E-40DD-AFC4-6F175D3DCCD1}">
+              <a14:hiddenFill xmlns:a14="http://schemas.microsoft.com/office/drawing/2010/main">
+                <a:solidFill>
+                  <a:schemeClr val="accent1"/>
+                </a:solidFill>
+              </a14:hiddenFill>
+            </a:ext>
+            <a:ext uri="{91240B29-F687-4F45-9708-019B960494DF}">
+              <a14:hiddenLine xmlns:a14="http://schemas.microsoft.com/office/drawing/2010/main" w="9525">
+                <a:solidFill>
+                  <a:schemeClr val="tx1"/>
+                </a:solidFill>
+                <a:miter lim="800000"/>
+                <a:headEnd/>
+                <a:tailEnd/>
+              </a14:hiddenLine>
+            </a:ext>
+            <a:ext uri="{AF507438-7753-43E0-B8FC-AC1667EBCBE1}">
+              <a14:hiddenEffects xmlns:a14="http://schemas.microsoft.com/office/drawing/2010/main">
+                <a:effectLst>
+                  <a:outerShdw dist="35921" dir="2700000" algn="ctr" rotWithShape="0">
+                    <a:schemeClr val="bg2"/>
+                  </a:outerShdw>
+                </a:effectLst>
+              </a14:hiddenEffects>
+            </a:ext>
+          </a:extLst>
+        </p:spPr>
+        <p:txBody>
+          <a:bodyPr vert="horz" wrap="none" lIns="91440" tIns="45720" rIns="91440" bIns="45720" numCol="1" anchor="ctr" anchorCtr="0" compatLnSpc="1">
+            <a:prstTxWarp prst="textNoShape">
+              <a:avLst/>
+            </a:prstTxWarp>
+            <a:spAutoFit/>
+          </a:bodyPr>
+          <a:lstStyle/>
+          <a:p>
+            <a:pPr marL="0" marR="0" lvl="0" indent="0" algn="l" defTabSz="914400" rtl="0" eaLnBrk="0" fontAlgn="base" latinLnBrk="0" hangingPunct="0">
+              <a:lnSpc>
+                <a:spcPct val="100000"/>
+              </a:lnSpc>
+              <a:spcBef>
+                <a:spcPct val="0"/>
+              </a:spcBef>
+              <a:spcAft>
+                <a:spcPct val="0"/>
+              </a:spcAft>
+              <a:buClrTx/>
+              <a:buSzTx/>
+              <a:buFontTx/>
+              <a:buChar char="•"/>
+              <a:tabLst/>
+            </a:pPr>
+            <a:endParaRPr kumimoji="0" lang="en-US" altLang="en-US" sz="1800" b="0" i="0" u="none" strike="noStrike" cap="none" normalizeH="0" baseline="0" dirty="0">
+              <a:ln>
+                <a:noFill/>
+              </a:ln>
+              <a:solidFill>
+                <a:schemeClr val="tx1"/>
+              </a:solidFill>
+              <a:effectLst/>
+              <a:latin typeface="Arial" panose="020B0604020202020204" pitchFamily="34" charset="0"/>
+            </a:endParaRPr>
+          </a:p>
+        </p:txBody>
+      </p:sp>
+      <p:sp>
+        <p:nvSpPr>
+          <p:cNvPr id="6" name="Rectangle 2">
+            <a:extLst>
+              <a:ext uri="{FF2B5EF4-FFF2-40B4-BE49-F238E27FC236}">
+                <a16:creationId xmlns:a16="http://schemas.microsoft.com/office/drawing/2014/main" id="{14E3CE40-9E9B-59B5-73AF-2F0EC4F9186B}"/>
+              </a:ext>
+            </a:extLst>
+          </p:cNvPr>
+          <p:cNvSpPr>
+            <a:spLocks noChangeArrowheads="1"/>
+          </p:cNvSpPr>
+          <p:nvPr/>
+        </p:nvSpPr>
+        <p:spPr bwMode="auto">
+          <a:xfrm>
+            <a:off x="0" y="-184666"/>
+            <a:ext cx="264816" cy="369332"/>
+          </a:xfrm>
+          <a:prstGeom prst="rect">
+            <a:avLst/>
+          </a:prstGeom>
+          <a:noFill/>
+          <a:ln>
+            <a:noFill/>
+          </a:ln>
+          <a:effectLst/>
+          <a:extLst>
+            <a:ext uri="{909E8E84-426E-40DD-AFC4-6F175D3DCCD1}">
+              <a14:hiddenFill xmlns:a14="http://schemas.microsoft.com/office/drawing/2010/main">
+                <a:solidFill>
+                  <a:schemeClr val="accent1"/>
+                </a:solidFill>
+              </a14:hiddenFill>
+            </a:ext>
+            <a:ext uri="{91240B29-F687-4F45-9708-019B960494DF}">
+              <a14:hiddenLine xmlns:a14="http://schemas.microsoft.com/office/drawing/2010/main" w="9525">
+                <a:solidFill>
+                  <a:schemeClr val="tx1"/>
+                </a:solidFill>
+                <a:miter lim="800000"/>
+                <a:headEnd/>
+                <a:tailEnd/>
+              </a14:hiddenLine>
+            </a:ext>
+            <a:ext uri="{AF507438-7753-43E0-B8FC-AC1667EBCBE1}">
+              <a14:hiddenEffects xmlns:a14="http://schemas.microsoft.com/office/drawing/2010/main">
+                <a:effectLst>
+                  <a:outerShdw dist="35921" dir="2700000" algn="ctr" rotWithShape="0">
+                    <a:schemeClr val="bg2"/>
+                  </a:outerShdw>
+                </a:effectLst>
+              </a14:hiddenEffects>
+            </a:ext>
+          </a:extLst>
+        </p:spPr>
+        <p:txBody>
+          <a:bodyPr vert="horz" wrap="none" lIns="91440" tIns="45720" rIns="91440" bIns="45720" numCol="1" anchor="ctr" anchorCtr="0" compatLnSpc="1">
+            <a:prstTxWarp prst="textNoShape">
+              <a:avLst/>
+            </a:prstTxWarp>
+            <a:spAutoFit/>
+          </a:bodyPr>
+          <a:lstStyle/>
+          <a:p>
+            <a:pPr marL="0" marR="0" lvl="0" indent="0" algn="l" defTabSz="914400" rtl="0" eaLnBrk="0" fontAlgn="base" latinLnBrk="0" hangingPunct="0">
+              <a:lnSpc>
+                <a:spcPct val="100000"/>
+              </a:lnSpc>
+              <a:spcBef>
+                <a:spcPct val="0"/>
+              </a:spcBef>
+              <a:spcAft>
+                <a:spcPct val="0"/>
+              </a:spcAft>
+              <a:buClrTx/>
+              <a:buSzTx/>
+              <a:buFontTx/>
+              <a:buChar char="•"/>
+              <a:tabLst/>
+            </a:pPr>
+            <a:endParaRPr kumimoji="0" lang="en-US" altLang="en-US" sz="1800" b="0" i="0" u="none" strike="noStrike" cap="none" normalizeH="0" baseline="0" dirty="0">
+              <a:ln>
+                <a:noFill/>
+              </a:ln>
+              <a:solidFill>
+                <a:schemeClr val="tx1"/>
+              </a:solidFill>
+              <a:effectLst/>
+              <a:latin typeface="Arial" panose="020B0604020202020204" pitchFamily="34" charset="0"/>
+            </a:endParaRPr>
           </a:p>
         </p:txBody>
       </p:sp>
     </p:spTree>
+    <p:extLst>
+      <p:ext uri="{BB962C8B-B14F-4D97-AF65-F5344CB8AC3E}">
+        <p14:creationId xmlns:p14="http://schemas.microsoft.com/office/powerpoint/2010/main" val="333261275"/>
+      </p:ext>
+    </p:extLst>
   </p:cSld>
   <p:clrMapOvr>
     <a:masterClrMapping/>
@@ -3898,7 +6620,122 @@
 </file>
 
 <file path=ppt/slides/slide20.xml><?xml version="1.0" encoding="utf-8"?>
-<p:sld xmlns:a="http://schemas.openxmlformats.org/drawingml/2006/main" xmlns:p="http://schemas.openxmlformats.org/presentationml/2006/main" xmlns:r="http://schemas.openxmlformats.org/officeDocument/2006/relationships">
+<p:sld xmlns:a="http://schemas.openxmlformats.org/drawingml/2006/main" xmlns:r="http://schemas.openxmlformats.org/officeDocument/2006/relationships" xmlns:p="http://schemas.openxmlformats.org/presentationml/2006/main">
+  <p:cSld>
+    <p:bg>
+      <p:bgRef idx="1001">
+        <a:schemeClr val="bg1"/>
+      </p:bgRef>
+    </p:bg>
+    <p:spTree>
+      <p:nvGrpSpPr>
+        <p:cNvPr id="1" name=""/>
+        <p:cNvGrpSpPr/>
+        <p:nvPr/>
+      </p:nvGrpSpPr>
+      <p:grpSpPr>
+        <a:xfrm>
+          <a:off x="0" y="0"/>
+          <a:ext cx="0" cy="0"/>
+          <a:chOff x="0" y="0"/>
+          <a:chExt cx="0" cy="0"/>
+        </a:xfrm>
+      </p:grpSpPr>
+      <p:pic>
+        <p:nvPicPr>
+          <p:cNvPr id="4" name="Picture 3">
+            <a:extLst>
+              <a:ext uri="{FF2B5EF4-FFF2-40B4-BE49-F238E27FC236}">
+                <a16:creationId xmlns:a16="http://schemas.microsoft.com/office/drawing/2014/main" id="{6F2636F6-B535-DF0B-5012-189A04FF207B}"/>
+              </a:ext>
+            </a:extLst>
+          </p:cNvPr>
+          <p:cNvPicPr>
+            <a:picLocks noChangeAspect="1"/>
+          </p:cNvPicPr>
+          <p:nvPr/>
+        </p:nvPicPr>
+        <p:blipFill>
+          <a:blip r:embed="rId3"/>
+          <a:stretch>
+            <a:fillRect/>
+          </a:stretch>
+        </p:blipFill>
+        <p:spPr>
+          <a:xfrm>
+            <a:off x="0" y="0"/>
+            <a:ext cx="9144000" cy="6858000"/>
+          </a:xfrm>
+          <a:prstGeom prst="rect">
+            <a:avLst/>
+          </a:prstGeom>
+        </p:spPr>
+      </p:pic>
+      <p:sp>
+        <p:nvSpPr>
+          <p:cNvPr id="2" name="Title 1"/>
+          <p:cNvSpPr>
+            <a:spLocks noGrp="1"/>
+          </p:cNvSpPr>
+          <p:nvPr>
+            <p:ph type="title"/>
+          </p:nvPr>
+        </p:nvSpPr>
+        <p:spPr/>
+        <p:txBody>
+          <a:bodyPr/>
+          <a:lstStyle/>
+          <a:p>
+            <a:r>
+              <a:rPr dirty="0">
+                <a:solidFill>
+                  <a:schemeClr val="bg1"/>
+                </a:solidFill>
+              </a:rPr>
+              <a:t>Admin: Gallery Upload</a:t>
+            </a:r>
+          </a:p>
+        </p:txBody>
+      </p:sp>
+      <p:sp>
+        <p:nvSpPr>
+          <p:cNvPr id="3" name="Content Placeholder 2"/>
+          <p:cNvSpPr>
+            <a:spLocks noGrp="1"/>
+          </p:cNvSpPr>
+          <p:nvPr>
+            <p:ph idx="1"/>
+          </p:nvPr>
+        </p:nvSpPr>
+        <p:spPr/>
+        <p:txBody>
+          <a:bodyPr/>
+          <a:lstStyle/>
+          <a:p>
+            <a:pPr marL="0" indent="0">
+              <a:buNone/>
+            </a:pPr>
+            <a:r>
+              <a:rPr lang="en-US" dirty="0">
+                <a:solidFill>
+                  <a:schemeClr val="bg1"/>
+                </a:solidFill>
+              </a:rPr>
+              <a:t>Admins upload gallery images link that appear on the user-facing frontend gallery carousel, helping market the cruise experience. From party halls to spa facilities, these images showcase the luxury of Aurelia.</a:t>
+            </a:r>
+          </a:p>
+        </p:txBody>
+      </p:sp>
+    </p:spTree>
+  </p:cSld>
+  <p:clrMapOvr>
+    <a:overrideClrMapping bg1="lt1" tx1="dk1" bg2="lt2" tx2="dk2" accent1="accent1" accent2="accent2" accent3="accent3" accent4="accent4" accent5="accent5" accent6="accent6" hlink="hlink" folHlink="folHlink"/>
+  </p:clrMapOvr>
+</p:sld>
+</file>
+
+<file path=ppt/slides/slide21.xml><?xml version="1.0" encoding="utf-8"?>
+<p:sld xmlns:a="http://schemas.openxmlformats.org/drawingml/2006/main" xmlns:r="http://schemas.openxmlformats.org/officeDocument/2006/relationships" xmlns:p="http://schemas.openxmlformats.org/presentationml/2006/main">
   <p:cSld>
     <p:spTree>
       <p:nvGrpSpPr>
@@ -3906,7 +6743,44 @@
         <p:cNvGrpSpPr/>
         <p:nvPr/>
       </p:nvGrpSpPr>
-      <p:grpSpPr/>
+      <p:grpSpPr>
+        <a:xfrm>
+          <a:off x="0" y="0"/>
+          <a:ext cx="0" cy="0"/>
+          <a:chOff x="0" y="0"/>
+          <a:chExt cx="0" cy="0"/>
+        </a:xfrm>
+      </p:grpSpPr>
+      <p:pic>
+        <p:nvPicPr>
+          <p:cNvPr id="4" name="Picture 3">
+            <a:extLst>
+              <a:ext uri="{FF2B5EF4-FFF2-40B4-BE49-F238E27FC236}">
+                <a16:creationId xmlns:a16="http://schemas.microsoft.com/office/drawing/2014/main" id="{6ED6D85D-4D90-001E-F83F-E02772AF8F8A}"/>
+              </a:ext>
+            </a:extLst>
+          </p:cNvPr>
+          <p:cNvPicPr>
+            <a:picLocks noChangeAspect="1"/>
+          </p:cNvPicPr>
+          <p:nvPr/>
+        </p:nvPicPr>
+        <p:blipFill>
+          <a:blip r:embed="rId2"/>
+          <a:stretch>
+            <a:fillRect/>
+          </a:stretch>
+        </p:blipFill>
+        <p:spPr>
+          <a:xfrm>
+            <a:off x="0" y="0"/>
+            <a:ext cx="9144000" cy="6858000"/>
+          </a:xfrm>
+          <a:prstGeom prst="rect">
+            <a:avLst/>
+          </a:prstGeom>
+        </p:spPr>
+      </p:pic>
       <p:sp>
         <p:nvSpPr>
           <p:cNvPr id="2" name="Title 1"/>
@@ -3923,7 +6797,12 @@
           <a:lstStyle/>
           <a:p>
             <a:r>
-              <a:t>Backend Models</a:t>
+              <a:rPr dirty="0">
+                <a:solidFill>
+                  <a:schemeClr val="bg1"/>
+                </a:solidFill>
+              </a:rPr>
+              <a:t>Admin: Contact Form Visibility</a:t>
             </a:r>
           </a:p>
         </p:txBody>
@@ -3944,98 +6823,51 @@
           <a:lstStyle/>
           <a:p>
             <a:r>
-              <a:t>Includes:</a:t>
-            </a:r>
-          </a:p>
-          <a:p>
-            <a:r>
-              <a:t>BeautySalon, Booking, Category, CateringOrder, Contact, Fitness, FoodItem, Gallery, etc.</a:t>
-            </a:r>
-          </a:p>
-        </p:txBody>
-      </p:sp>
-    </p:spTree>
-  </p:cSld>
-  <p:clrMapOvr>
-    <a:masterClrMapping/>
-  </p:clrMapOvr>
-</p:sld>
-</file>
-
-<file path=ppt/slides/slide21.xml><?xml version="1.0" encoding="utf-8"?>
-<p:sld xmlns:a="http://schemas.openxmlformats.org/drawingml/2006/main" xmlns:p="http://schemas.openxmlformats.org/presentationml/2006/main" xmlns:r="http://schemas.openxmlformats.org/officeDocument/2006/relationships">
-  <p:cSld>
-    <p:spTree>
-      <p:nvGrpSpPr>
-        <p:cNvPr id="1" name=""/>
-        <p:cNvGrpSpPr/>
-        <p:nvPr/>
-      </p:nvGrpSpPr>
-      <p:grpSpPr/>
-      <p:sp>
-        <p:nvSpPr>
-          <p:cNvPr id="2" name="Title 1"/>
-          <p:cNvSpPr>
-            <a:spLocks noGrp="1"/>
-          </p:cNvSpPr>
-          <p:nvPr>
-            <p:ph type="title"/>
-          </p:nvPr>
-        </p:nvSpPr>
-        <p:spPr/>
-        <p:txBody>
-          <a:bodyPr/>
-          <a:lstStyle/>
-          <a:p>
-            <a:r>
-              <a:t>Routing Overview</a:t>
-            </a:r>
-          </a:p>
-        </p:txBody>
-      </p:sp>
-      <p:sp>
-        <p:nvSpPr>
-          <p:cNvPr id="3" name="Content Placeholder 2"/>
-          <p:cNvSpPr>
-            <a:spLocks noGrp="1"/>
-          </p:cNvSpPr>
-          <p:nvPr>
-            <p:ph idx="1"/>
-          </p:nvPr>
-        </p:nvSpPr>
-        <p:spPr/>
-        <p:txBody>
-          <a:bodyPr/>
-          <a:lstStyle/>
-          <a:p>
-            <a:r>
-              <a:t>Route Groups:</a:t>
-            </a:r>
-          </a:p>
-          <a:p>
-            <a:r>
-              <a:t>- /admin</a:t>
-            </a:r>
-          </a:p>
-          <a:p>
-            <a:r>
-              <a:t>- /common</a:t>
-            </a:r>
-          </a:p>
-          <a:p>
-            <a:r>
-              <a:t>- /voyager</a:t>
-            </a:r>
-          </a:p>
-          <a:p>
-            <a:r>
-              <a:t>- /headcook</a:t>
-            </a:r>
-          </a:p>
-          <a:p>
-            <a:r>
-              <a:t>- /supervisor</a:t>
-            </a:r>
+              <a:rPr dirty="0">
+                <a:solidFill>
+                  <a:schemeClr val="bg1"/>
+                </a:solidFill>
+              </a:rPr>
+              <a:t>Admin can view submissions from the contact form filled by </a:t>
+            </a:r>
+            <a:r>
+              <a:rPr lang="en-US" dirty="0">
+                <a:solidFill>
+                  <a:schemeClr val="bg1"/>
+                </a:solidFill>
+              </a:rPr>
+              <a:t>any frontend user</a:t>
+            </a:r>
+            <a:r>
+              <a:rPr dirty="0">
+                <a:solidFill>
+                  <a:schemeClr val="bg1"/>
+                </a:solidFill>
+              </a:rPr>
+              <a:t>.</a:t>
+            </a:r>
+            <a:endParaRPr lang="en-US" dirty="0">
+              <a:solidFill>
+                <a:schemeClr val="bg1"/>
+              </a:solidFill>
+            </a:endParaRPr>
+          </a:p>
+          <a:p>
+            <a:r>
+              <a:rPr lang="en-US" dirty="0">
+                <a:solidFill>
+                  <a:schemeClr val="bg1"/>
+                </a:solidFill>
+              </a:rPr>
+              <a:t>When a user fills out the Contact Us form, admin can view the inquiries in the dashboard, respond promptly, and track customer feedback, creating a stronger connection between staff and users</a:t>
+            </a:r>
+            <a:r>
+              <a:rPr lang="en-US" dirty="0"/>
+              <a:t>.</a:t>
+            </a:r>
+          </a:p>
+          <a:p>
+            <a:endParaRPr dirty="0"/>
           </a:p>
         </p:txBody>
       </p:sp>
@@ -4048,7 +6880,7 @@
 </file>
 
 <file path=ppt/slides/slide22.xml><?xml version="1.0" encoding="utf-8"?>
-<p:sld xmlns:a="http://schemas.openxmlformats.org/drawingml/2006/main" xmlns:p="http://schemas.openxmlformats.org/presentationml/2006/main" xmlns:r="http://schemas.openxmlformats.org/officeDocument/2006/relationships">
+<p:sld xmlns:a="http://schemas.openxmlformats.org/drawingml/2006/main" xmlns:r="http://schemas.openxmlformats.org/officeDocument/2006/relationships" xmlns:p="http://schemas.openxmlformats.org/presentationml/2006/main">
   <p:cSld>
     <p:spTree>
       <p:nvGrpSpPr>
@@ -4056,10 +6888,53 @@
         <p:cNvGrpSpPr/>
         <p:nvPr/>
       </p:nvGrpSpPr>
-      <p:grpSpPr/>
-      <p:sp>
-        <p:nvSpPr>
-          <p:cNvPr id="2" name="Title 1"/>
+      <p:grpSpPr>
+        <a:xfrm>
+          <a:off x="0" y="0"/>
+          <a:ext cx="0" cy="0"/>
+          <a:chOff x="0" y="0"/>
+          <a:chExt cx="0" cy="0"/>
+        </a:xfrm>
+      </p:grpSpPr>
+      <p:pic>
+        <p:nvPicPr>
+          <p:cNvPr id="6" name="Picture 5">
+            <a:extLst>
+              <a:ext uri="{FF2B5EF4-FFF2-40B4-BE49-F238E27FC236}">
+                <a16:creationId xmlns:a16="http://schemas.microsoft.com/office/drawing/2014/main" id="{CD38440D-8637-5840-9EB5-B9B6BD3B0075}"/>
+              </a:ext>
+            </a:extLst>
+          </p:cNvPr>
+          <p:cNvPicPr>
+            <a:picLocks noChangeAspect="1"/>
+          </p:cNvPicPr>
+          <p:nvPr/>
+        </p:nvPicPr>
+        <p:blipFill>
+          <a:blip r:embed="rId2"/>
+          <a:stretch>
+            <a:fillRect/>
+          </a:stretch>
+        </p:blipFill>
+        <p:spPr>
+          <a:xfrm>
+            <a:off x="0" y="0"/>
+            <a:ext cx="9143999" cy="6858000"/>
+          </a:xfrm>
+          <a:prstGeom prst="rect">
+            <a:avLst/>
+          </a:prstGeom>
+        </p:spPr>
+      </p:pic>
+      <p:sp>
+        <p:nvSpPr>
+          <p:cNvPr id="2" name="Title 1">
+            <a:extLst>
+              <a:ext uri="{FF2B5EF4-FFF2-40B4-BE49-F238E27FC236}">
+                <a16:creationId xmlns:a16="http://schemas.microsoft.com/office/drawing/2014/main" id="{FE2E2C45-BBBA-A458-5FA8-E7F78885854E}"/>
+              </a:ext>
+            </a:extLst>
+          </p:cNvPr>
           <p:cNvSpPr>
             <a:spLocks noGrp="1"/>
           </p:cNvSpPr>
@@ -4069,18 +6944,31 @@
         </p:nvSpPr>
         <p:spPr/>
         <p:txBody>
-          <a:bodyPr/>
-          <a:lstStyle/>
-          <a:p>
-            <a:r>
-              <a:t>Slot Usage Logic</a:t>
-            </a:r>
-          </a:p>
-        </p:txBody>
-      </p:sp>
-      <p:sp>
-        <p:nvSpPr>
-          <p:cNvPr id="3" name="Content Placeholder 2"/>
+          <a:bodyPr>
+            <a:normAutofit fontScale="90000"/>
+          </a:bodyPr>
+          <a:lstStyle/>
+          <a:p>
+            <a:r>
+              <a:rPr lang="en-US" dirty="0">
+                <a:solidFill>
+                  <a:schemeClr val="bg1"/>
+                </a:solidFill>
+              </a:rPr>
+              <a:t>Admin Review and Approval System</a:t>
+            </a:r>
+          </a:p>
+        </p:txBody>
+      </p:sp>
+      <p:sp>
+        <p:nvSpPr>
+          <p:cNvPr id="3" name="Content Placeholder 2">
+            <a:extLst>
+              <a:ext uri="{FF2B5EF4-FFF2-40B4-BE49-F238E27FC236}">
+                <a16:creationId xmlns:a16="http://schemas.microsoft.com/office/drawing/2014/main" id="{AE70A8BE-1D1A-827F-82EC-7A6A80BD8245}"/>
+              </a:ext>
+            </a:extLst>
+          </p:cNvPr>
           <p:cNvSpPr>
             <a:spLocks noGrp="1"/>
           </p:cNvSpPr>
@@ -4090,16 +6978,154 @@
         </p:nvSpPr>
         <p:spPr/>
         <p:txBody>
-          <a:bodyPr/>
-          <a:lstStyle/>
-          <a:p>
-            <a:r>
-              <a:t>SlotUsageSalon route ensures max slot use. E.g., if a slot allows 4 users, 5th cannot book.</a:t>
+          <a:bodyPr>
+            <a:normAutofit fontScale="92500" lnSpcReduction="10000"/>
+          </a:bodyPr>
+          <a:lstStyle/>
+          <a:p>
+            <a:r>
+              <a:rPr lang="en-US" dirty="0">
+                <a:solidFill>
+                  <a:schemeClr val="bg1"/>
+                </a:solidFill>
+              </a:rPr>
+              <a:t>Admin can view a list of </a:t>
+            </a:r>
+            <a:r>
+              <a:rPr lang="en-US" b="1" dirty="0">
+                <a:solidFill>
+                  <a:schemeClr val="bg1"/>
+                </a:solidFill>
+              </a:rPr>
+              <a:t>all submitted feedback and testimonials</a:t>
+            </a:r>
+            <a:r>
+              <a:rPr lang="en-US" dirty="0">
+                <a:solidFill>
+                  <a:schemeClr val="bg1"/>
+                </a:solidFill>
+              </a:rPr>
+              <a:t>.</a:t>
+            </a:r>
+          </a:p>
+          <a:p>
+            <a:r>
+              <a:rPr lang="en-US" dirty="0">
+                <a:solidFill>
+                  <a:schemeClr val="bg1"/>
+                </a:solidFill>
+              </a:rPr>
+              <a:t>Each testimonial has a </a:t>
+            </a:r>
+            <a:r>
+              <a:rPr lang="en-US" b="1" dirty="0">
+                <a:solidFill>
+                  <a:schemeClr val="bg1"/>
+                </a:solidFill>
+              </a:rPr>
+              <a:t>checkbox</a:t>
+            </a:r>
+            <a:r>
+              <a:rPr lang="en-US" dirty="0">
+                <a:solidFill>
+                  <a:schemeClr val="bg1"/>
+                </a:solidFill>
+              </a:rPr>
+              <a:t> to mark it as </a:t>
+            </a:r>
+            <a:r>
+              <a:rPr lang="en-US" b="1" dirty="0">
+                <a:solidFill>
+                  <a:schemeClr val="bg1"/>
+                </a:solidFill>
+              </a:rPr>
+              <a:t>"Active"</a:t>
+            </a:r>
+            <a:r>
+              <a:rPr lang="en-US" dirty="0">
+                <a:solidFill>
+                  <a:schemeClr val="bg1"/>
+                </a:solidFill>
+              </a:rPr>
+              <a:t> – only then it becomes visible on the frontend.</a:t>
+            </a:r>
+          </a:p>
+          <a:p>
+            <a:r>
+              <a:rPr lang="en-US" dirty="0">
+                <a:solidFill>
+                  <a:schemeClr val="bg1"/>
+                </a:solidFill>
+              </a:rPr>
+              <a:t>Admin can </a:t>
+            </a:r>
+            <a:r>
+              <a:rPr lang="en-US" b="1" dirty="0">
+                <a:solidFill>
+                  <a:schemeClr val="bg1"/>
+                </a:solidFill>
+              </a:rPr>
+              <a:t>click "View"</a:t>
+            </a:r>
+            <a:r>
+              <a:rPr lang="en-US" dirty="0">
+                <a:solidFill>
+                  <a:schemeClr val="bg1"/>
+                </a:solidFill>
+              </a:rPr>
+              <a:t> to open and read a single feedback/testimonial in detail.</a:t>
+            </a:r>
+          </a:p>
+          <a:p>
+            <a:r>
+              <a:rPr lang="en-US" dirty="0">
+                <a:solidFill>
+                  <a:schemeClr val="bg1"/>
+                </a:solidFill>
+              </a:rPr>
+              <a:t>This system allows for </a:t>
+            </a:r>
+            <a:r>
+              <a:rPr lang="en-US" b="1" dirty="0">
+                <a:solidFill>
+                  <a:schemeClr val="bg1"/>
+                </a:solidFill>
+              </a:rPr>
+              <a:t>moderation</a:t>
+            </a:r>
+            <a:r>
+              <a:rPr lang="en-US" dirty="0">
+                <a:solidFill>
+                  <a:schemeClr val="bg1"/>
+                </a:solidFill>
+              </a:rPr>
+              <a:t> and </a:t>
+            </a:r>
+            <a:r>
+              <a:rPr lang="en-US" b="1" dirty="0">
+                <a:solidFill>
+                  <a:schemeClr val="bg1"/>
+                </a:solidFill>
+              </a:rPr>
+              <a:t>control</a:t>
+            </a:r>
+            <a:r>
+              <a:rPr lang="en-US" dirty="0">
+                <a:solidFill>
+                  <a:schemeClr val="bg1"/>
+                </a:solidFill>
+              </a:rPr>
+              <a:t> over the published testimonials, ensuring quality and relevance.</a:t>
             </a:r>
           </a:p>
         </p:txBody>
       </p:sp>
     </p:spTree>
+    <p:extLst>
+      <p:ext uri="{BB962C8B-B14F-4D97-AF65-F5344CB8AC3E}">
+        <p14:creationId xmlns:p14="http://schemas.microsoft.com/office/powerpoint/2010/main" val="142537924"/>
+      </p:ext>
+    </p:extLst>
   </p:cSld>
   <p:clrMapOvr>
     <a:masterClrMapping/>
@@ -4108,7 +7134,7 @@
 </file>
 
 <file path=ppt/slides/slide23.xml><?xml version="1.0" encoding="utf-8"?>
-<p:sld xmlns:a="http://schemas.openxmlformats.org/drawingml/2006/main" xmlns:p="http://schemas.openxmlformats.org/presentationml/2006/main" xmlns:r="http://schemas.openxmlformats.org/officeDocument/2006/relationships">
+<p:sld xmlns:a="http://schemas.openxmlformats.org/drawingml/2006/main" xmlns:r="http://schemas.openxmlformats.org/officeDocument/2006/relationships" xmlns:p="http://schemas.openxmlformats.org/presentationml/2006/main">
   <p:cSld>
     <p:spTree>
       <p:nvGrpSpPr>
@@ -4116,7 +7142,44 @@
         <p:cNvGrpSpPr/>
         <p:nvPr/>
       </p:nvGrpSpPr>
-      <p:grpSpPr/>
+      <p:grpSpPr>
+        <a:xfrm>
+          <a:off x="0" y="0"/>
+          <a:ext cx="0" cy="0"/>
+          <a:chOff x="0" y="0"/>
+          <a:chExt cx="0" cy="0"/>
+        </a:xfrm>
+      </p:grpSpPr>
+      <p:pic>
+        <p:nvPicPr>
+          <p:cNvPr id="4" name="Picture 3">
+            <a:extLst>
+              <a:ext uri="{FF2B5EF4-FFF2-40B4-BE49-F238E27FC236}">
+                <a16:creationId xmlns:a16="http://schemas.microsoft.com/office/drawing/2014/main" id="{71C38347-F032-C442-BA74-E97662F8E9B0}"/>
+              </a:ext>
+            </a:extLst>
+          </p:cNvPr>
+          <p:cNvPicPr>
+            <a:picLocks noChangeAspect="1"/>
+          </p:cNvPicPr>
+          <p:nvPr/>
+        </p:nvPicPr>
+        <p:blipFill>
+          <a:blip r:embed="rId2"/>
+          <a:stretch>
+            <a:fillRect/>
+          </a:stretch>
+        </p:blipFill>
+        <p:spPr>
+          <a:xfrm>
+            <a:off x="0" y="0"/>
+            <a:ext cx="9144000" cy="6858000"/>
+          </a:xfrm>
+          <a:prstGeom prst="rect">
+            <a:avLst/>
+          </a:prstGeom>
+        </p:spPr>
+      </p:pic>
       <p:sp>
         <p:nvSpPr>
           <p:cNvPr id="2" name="Title 1"/>
@@ -4133,7 +7196,12 @@
           <a:lstStyle/>
           <a:p>
             <a:r>
-              <a:t>Contact, FAQ, and About</a:t>
+              <a:rPr dirty="0">
+                <a:solidFill>
+                  <a:schemeClr val="bg1"/>
+                </a:solidFill>
+              </a:rPr>
+              <a:t>User Role Management</a:t>
             </a:r>
           </a:p>
         </p:txBody>
@@ -4153,8 +7221,32 @@
           <a:bodyPr/>
           <a:lstStyle/>
           <a:p>
-            <a:r>
-              <a:t>Voyagers can access contact form, FAQ section, and About Us information from the frontend.</a:t>
+            <a:pPr marL="0" lvl="0" indent="0">
+              <a:buNone/>
+            </a:pPr>
+            <a:r>
+              <a:rPr lang="en-US" dirty="0">
+                <a:solidFill>
+                  <a:schemeClr val="bg1"/>
+                </a:solidFill>
+              </a:rPr>
+              <a:t>Admins can onboard </a:t>
+            </a:r>
+            <a:r>
+              <a:rPr lang="en-US" b="1" dirty="0">
+                <a:solidFill>
+                  <a:schemeClr val="bg1"/>
+                </a:solidFill>
+              </a:rPr>
+              <a:t>Manager, Supervisor, Head Cook</a:t>
+            </a:r>
+            <a:r>
+              <a:rPr lang="en-US" dirty="0">
+                <a:solidFill>
+                  <a:schemeClr val="bg1"/>
+                </a:solidFill>
+              </a:rPr>
+              <a:t> roles, setting initial usernames and passwords. This creates role-based access control, ensuring each department sees only its assigned tasks.</a:t>
             </a:r>
           </a:p>
         </p:txBody>
@@ -4168,7 +7260,7 @@
 </file>
 
 <file path=ppt/slides/slide24.xml><?xml version="1.0" encoding="utf-8"?>
-<p:sld xmlns:a="http://schemas.openxmlformats.org/drawingml/2006/main" xmlns:p="http://schemas.openxmlformats.org/presentationml/2006/main" xmlns:r="http://schemas.openxmlformats.org/officeDocument/2006/relationships">
+<p:sld xmlns:a="http://schemas.openxmlformats.org/drawingml/2006/main" xmlns:r="http://schemas.openxmlformats.org/officeDocument/2006/relationships" xmlns:p="http://schemas.openxmlformats.org/presentationml/2006/main">
   <p:cSld>
     <p:spTree>
       <p:nvGrpSpPr>
@@ -4176,7 +7268,44 @@
         <p:cNvGrpSpPr/>
         <p:nvPr/>
       </p:nvGrpSpPr>
-      <p:grpSpPr/>
+      <p:grpSpPr>
+        <a:xfrm>
+          <a:off x="0" y="0"/>
+          <a:ext cx="0" cy="0"/>
+          <a:chOff x="0" y="0"/>
+          <a:chExt cx="0" cy="0"/>
+        </a:xfrm>
+      </p:grpSpPr>
+      <p:pic>
+        <p:nvPicPr>
+          <p:cNvPr id="4" name="Picture 3">
+            <a:extLst>
+              <a:ext uri="{FF2B5EF4-FFF2-40B4-BE49-F238E27FC236}">
+                <a16:creationId xmlns:a16="http://schemas.microsoft.com/office/drawing/2014/main" id="{96804433-0B81-5C03-8825-6AF136FFA189}"/>
+              </a:ext>
+            </a:extLst>
+          </p:cNvPr>
+          <p:cNvPicPr>
+            <a:picLocks noChangeAspect="1"/>
+          </p:cNvPicPr>
+          <p:nvPr/>
+        </p:nvPicPr>
+        <p:blipFill>
+          <a:blip r:embed="rId2"/>
+          <a:stretch>
+            <a:fillRect/>
+          </a:stretch>
+        </p:blipFill>
+        <p:spPr>
+          <a:xfrm>
+            <a:off x="0" y="0"/>
+            <a:ext cx="9144000" cy="6858000"/>
+          </a:xfrm>
+          <a:prstGeom prst="rect">
+            <a:avLst/>
+          </a:prstGeom>
+        </p:spPr>
+      </p:pic>
       <p:sp>
         <p:nvSpPr>
           <p:cNvPr id="2" name="Title 1"/>
@@ -4193,7 +7322,12 @@
           <a:lstStyle/>
           <a:p>
             <a:r>
-              <a:t>Dashboards Overview</a:t>
+              <a:rPr dirty="0">
+                <a:solidFill>
+                  <a:schemeClr val="bg1"/>
+                </a:solidFill>
+              </a:rPr>
+              <a:t>User Role Dashboard</a:t>
             </a:r>
           </a:p>
         </p:txBody>
@@ -4210,32 +7344,25 @@
         </p:nvSpPr>
         <p:spPr/>
         <p:txBody>
-          <a:bodyPr/>
-          <a:lstStyle/>
-          <a:p>
-            <a:r>
-              <a:t>Separate dashboards for:</a:t>
-            </a:r>
-          </a:p>
-          <a:p>
-            <a:r>
-              <a:t>- Admin</a:t>
-            </a:r>
-          </a:p>
-          <a:p>
-            <a:r>
-              <a:t>- Manager</a:t>
-            </a:r>
-          </a:p>
-          <a:p>
-            <a:r>
-              <a:t>- Headcook</a:t>
-            </a:r>
-          </a:p>
-          <a:p>
-            <a:r>
-              <a:t>- Supervisor</a:t>
-            </a:r>
+          <a:bodyPr>
+            <a:normAutofit/>
+          </a:bodyPr>
+          <a:lstStyle/>
+          <a:p>
+            <a:pPr marL="0" indent="0">
+              <a:buNone/>
+            </a:pPr>
+            <a:r>
+              <a:rPr lang="en-US" dirty="0">
+                <a:solidFill>
+                  <a:schemeClr val="bg1"/>
+                </a:solidFill>
+              </a:rPr>
+              <a:t>Each role logs into a personalized dashboard using their username and password where they can update their name, password, and view assigned tasks. This secure access ensures department-level autonomy without compromising system-wide integrity.</a:t>
+            </a:r>
+          </a:p>
+          <a:p>
+            <a:endParaRPr dirty="0"/>
           </a:p>
         </p:txBody>
       </p:sp>
@@ -4248,7 +7375,7 @@
 </file>
 
 <file path=ppt/slides/slide25.xml><?xml version="1.0" encoding="utf-8"?>
-<p:sld xmlns:a="http://schemas.openxmlformats.org/drawingml/2006/main" xmlns:p="http://schemas.openxmlformats.org/presentationml/2006/main" xmlns:r="http://schemas.openxmlformats.org/officeDocument/2006/relationships">
+<p:sld xmlns:a="http://schemas.openxmlformats.org/drawingml/2006/main" xmlns:r="http://schemas.openxmlformats.org/officeDocument/2006/relationships" xmlns:p="http://schemas.openxmlformats.org/presentationml/2006/main">
   <p:cSld>
     <p:spTree>
       <p:nvGrpSpPr>
@@ -4256,7 +7383,44 @@
         <p:cNvGrpSpPr/>
         <p:nvPr/>
       </p:nvGrpSpPr>
-      <p:grpSpPr/>
+      <p:grpSpPr>
+        <a:xfrm>
+          <a:off x="0" y="0"/>
+          <a:ext cx="0" cy="0"/>
+          <a:chOff x="0" y="0"/>
+          <a:chExt cx="0" cy="0"/>
+        </a:xfrm>
+      </p:grpSpPr>
+      <p:pic>
+        <p:nvPicPr>
+          <p:cNvPr id="4" name="Picture 3">
+            <a:extLst>
+              <a:ext uri="{FF2B5EF4-FFF2-40B4-BE49-F238E27FC236}">
+                <a16:creationId xmlns:a16="http://schemas.microsoft.com/office/drawing/2014/main" id="{9B51CB73-46C1-8849-2C98-1D0FF50C19A8}"/>
+              </a:ext>
+            </a:extLst>
+          </p:cNvPr>
+          <p:cNvPicPr>
+            <a:picLocks noChangeAspect="1"/>
+          </p:cNvPicPr>
+          <p:nvPr/>
+        </p:nvPicPr>
+        <p:blipFill>
+          <a:blip r:embed="rId2"/>
+          <a:stretch>
+            <a:fillRect/>
+          </a:stretch>
+        </p:blipFill>
+        <p:spPr>
+          <a:xfrm>
+            <a:off x="0" y="0"/>
+            <a:ext cx="9144000" cy="6858000"/>
+          </a:xfrm>
+          <a:prstGeom prst="rect">
+            <a:avLst/>
+          </a:prstGeom>
+        </p:spPr>
+      </p:pic>
       <p:sp>
         <p:nvSpPr>
           <p:cNvPr id="2" name="Title 1"/>
@@ -4273,7 +7437,12 @@
           <a:lstStyle/>
           <a:p>
             <a:r>
-              <a:t>Project Title Slide</a:t>
+              <a:rPr dirty="0">
+                <a:solidFill>
+                  <a:schemeClr val="bg1"/>
+                </a:solidFill>
+              </a:rPr>
+              <a:t>Manager Functionalities</a:t>
             </a:r>
           </a:p>
         </p:txBody>
@@ -4293,14 +7462,30 @@
           <a:bodyPr/>
           <a:lstStyle/>
           <a:p>
-            <a:r>
-              <a:t>Cruise Management System - Aurelia</a:t>
-            </a:r>
-          </a:p>
-          <a:p>
-            <a:r>
-              <a:t>Elegant | Nautical | Luxury | Modern | Minimal</a:t>
-            </a:r>
+            <a:pPr lvl="0"/>
+            <a:r>
+              <a:rPr lang="en-US" dirty="0">
+                <a:solidFill>
+                  <a:schemeClr val="bg1"/>
+                </a:solidFill>
+              </a:rPr>
+              <a:t>The Manager can accept or reject bookings for Party Hall, Salon, and Fitness services. For movie bookings, they simply monitor details, ensuring smooth coordination without approvals.</a:t>
+            </a:r>
+          </a:p>
+          <a:p>
+            <a:r>
+              <a:rPr lang="en-US" dirty="0">
+                <a:solidFill>
+                  <a:schemeClr val="bg1"/>
+                </a:solidFill>
+              </a:rPr>
+              <a:t>Manager can change their name.</a:t>
+            </a:r>
+            <a:endParaRPr dirty="0">
+              <a:solidFill>
+                <a:schemeClr val="bg1"/>
+              </a:solidFill>
+            </a:endParaRPr>
           </a:p>
         </p:txBody>
       </p:sp>
@@ -4312,8 +7497,8 @@
 </p:sld>
 </file>
 
-<file path=ppt/slides/slide3.xml><?xml version="1.0" encoding="utf-8"?>
-<p:sld xmlns:a="http://schemas.openxmlformats.org/drawingml/2006/main" xmlns:p="http://schemas.openxmlformats.org/presentationml/2006/main" xmlns:r="http://schemas.openxmlformats.org/officeDocument/2006/relationships">
+<file path=ppt/slides/slide26.xml><?xml version="1.0" encoding="utf-8"?>
+<p:sld xmlns:a="http://schemas.openxmlformats.org/drawingml/2006/main" xmlns:r="http://schemas.openxmlformats.org/officeDocument/2006/relationships" xmlns:p="http://schemas.openxmlformats.org/presentationml/2006/main">
   <p:cSld>
     <p:spTree>
       <p:nvGrpSpPr>
@@ -4321,7 +7506,44 @@
         <p:cNvGrpSpPr/>
         <p:nvPr/>
       </p:nvGrpSpPr>
-      <p:grpSpPr/>
+      <p:grpSpPr>
+        <a:xfrm>
+          <a:off x="0" y="0"/>
+          <a:ext cx="0" cy="0"/>
+          <a:chOff x="0" y="0"/>
+          <a:chExt cx="0" cy="0"/>
+        </a:xfrm>
+      </p:grpSpPr>
+      <p:pic>
+        <p:nvPicPr>
+          <p:cNvPr id="4" name="Picture 3">
+            <a:extLst>
+              <a:ext uri="{FF2B5EF4-FFF2-40B4-BE49-F238E27FC236}">
+                <a16:creationId xmlns:a16="http://schemas.microsoft.com/office/drawing/2014/main" id="{B12C4933-9B9C-34CE-DB76-A74C0CDE4B94}"/>
+              </a:ext>
+            </a:extLst>
+          </p:cNvPr>
+          <p:cNvPicPr>
+            <a:picLocks noChangeAspect="1"/>
+          </p:cNvPicPr>
+          <p:nvPr/>
+        </p:nvPicPr>
+        <p:blipFill>
+          <a:blip r:embed="rId2"/>
+          <a:stretch>
+            <a:fillRect/>
+          </a:stretch>
+        </p:blipFill>
+        <p:spPr>
+          <a:xfrm>
+            <a:off x="0" y="0"/>
+            <a:ext cx="9144000" cy="6858000"/>
+          </a:xfrm>
+          <a:prstGeom prst="rect">
+            <a:avLst/>
+          </a:prstGeom>
+        </p:spPr>
+      </p:pic>
       <p:sp>
         <p:nvSpPr>
           <p:cNvPr id="2" name="Title 1"/>
@@ -4338,7 +7560,28 @@
           <a:lstStyle/>
           <a:p>
             <a:r>
-              <a:t>Admin: Item Management</a:t>
+              <a:rPr dirty="0">
+                <a:solidFill>
+                  <a:schemeClr val="bg1"/>
+                </a:solidFill>
+              </a:rPr>
+              <a:t>Head </a:t>
+            </a:r>
+            <a:r>
+              <a:rPr lang="en-US" dirty="0">
+                <a:solidFill>
+                  <a:schemeClr val="bg1"/>
+                </a:solidFill>
+              </a:rPr>
+              <a:t>C</a:t>
+            </a:r>
+            <a:r>
+              <a:rPr dirty="0">
+                <a:solidFill>
+                  <a:schemeClr val="bg1"/>
+                </a:solidFill>
+              </a:rPr>
+              <a:t>ook Functionalities</a:t>
             </a:r>
           </a:p>
         </p:txBody>
@@ -4358,39 +7601,1783 @@
           <a:bodyPr/>
           <a:lstStyle/>
           <a:p>
-            <a:r>
-              <a:t>Categories include:</a:t>
-            </a:r>
-          </a:p>
-          <a:p>
-            <a:r>
-              <a:t>- Catering</a:t>
-            </a:r>
-          </a:p>
-          <a:p>
-            <a:r>
-              <a:t>- Movie</a:t>
-            </a:r>
-          </a:p>
-          <a:p>
-            <a:r>
-              <a:t>- Stationary</a:t>
-            </a:r>
-          </a:p>
-          <a:p>
-            <a:r>
-              <a:t>- Party Hall</a:t>
-            </a:r>
-          </a:p>
-          <a:p>
-            <a:r>
-              <a:t>- Salon</a:t>
-            </a:r>
-          </a:p>
-          <a:p>
-            <a:r>
-              <a:t>- Fitness</a:t>
-            </a:r>
+            <a:pPr marL="0" lvl="0" indent="0">
+              <a:buNone/>
+            </a:pPr>
+            <a:r>
+              <a:rPr lang="en-US" dirty="0">
+                <a:solidFill>
+                  <a:schemeClr val="bg1"/>
+                </a:solidFill>
+              </a:rPr>
+              <a:t>The Head Cook views catering orders submitted by users and marks them accepted when ready, maintaining tight control over kitchen operations and ensuring prompt food service.</a:t>
+            </a:r>
+          </a:p>
+          <a:p>
+            <a:endParaRPr dirty="0"/>
+          </a:p>
+        </p:txBody>
+      </p:sp>
+    </p:spTree>
+  </p:cSld>
+  <p:clrMapOvr>
+    <a:masterClrMapping/>
+  </p:clrMapOvr>
+</p:sld>
+</file>
+
+<file path=ppt/slides/slide27.xml><?xml version="1.0" encoding="utf-8"?>
+<p:sld xmlns:a="http://schemas.openxmlformats.org/drawingml/2006/main" xmlns:r="http://schemas.openxmlformats.org/officeDocument/2006/relationships" xmlns:p="http://schemas.openxmlformats.org/presentationml/2006/main">
+  <p:cSld>
+    <p:spTree>
+      <p:nvGrpSpPr>
+        <p:cNvPr id="1" name=""/>
+        <p:cNvGrpSpPr/>
+        <p:nvPr/>
+      </p:nvGrpSpPr>
+      <p:grpSpPr>
+        <a:xfrm>
+          <a:off x="0" y="0"/>
+          <a:ext cx="0" cy="0"/>
+          <a:chOff x="0" y="0"/>
+          <a:chExt cx="0" cy="0"/>
+        </a:xfrm>
+      </p:grpSpPr>
+      <p:pic>
+        <p:nvPicPr>
+          <p:cNvPr id="4" name="Picture 3">
+            <a:extLst>
+              <a:ext uri="{FF2B5EF4-FFF2-40B4-BE49-F238E27FC236}">
+                <a16:creationId xmlns:a16="http://schemas.microsoft.com/office/drawing/2014/main" id="{53E50AB3-6CF4-F324-4048-B6FFF9D11091}"/>
+              </a:ext>
+            </a:extLst>
+          </p:cNvPr>
+          <p:cNvPicPr>
+            <a:picLocks noChangeAspect="1"/>
+          </p:cNvPicPr>
+          <p:nvPr/>
+        </p:nvPicPr>
+        <p:blipFill>
+          <a:blip r:embed="rId2"/>
+          <a:stretch>
+            <a:fillRect/>
+          </a:stretch>
+        </p:blipFill>
+        <p:spPr>
+          <a:xfrm>
+            <a:off x="0" y="0"/>
+            <a:ext cx="9144000" cy="6858000"/>
+          </a:xfrm>
+          <a:prstGeom prst="rect">
+            <a:avLst/>
+          </a:prstGeom>
+        </p:spPr>
+      </p:pic>
+      <p:sp>
+        <p:nvSpPr>
+          <p:cNvPr id="2" name="Title 1"/>
+          <p:cNvSpPr>
+            <a:spLocks noGrp="1"/>
+          </p:cNvSpPr>
+          <p:nvPr>
+            <p:ph type="title"/>
+          </p:nvPr>
+        </p:nvSpPr>
+        <p:spPr/>
+        <p:txBody>
+          <a:bodyPr/>
+          <a:lstStyle/>
+          <a:p>
+            <a:r>
+              <a:rPr dirty="0">
+                <a:solidFill>
+                  <a:schemeClr val="bg1"/>
+                </a:solidFill>
+              </a:rPr>
+              <a:t>Supervisor Functionalities</a:t>
+            </a:r>
+          </a:p>
+        </p:txBody>
+      </p:sp>
+      <p:sp>
+        <p:nvSpPr>
+          <p:cNvPr id="3" name="Content Placeholder 2"/>
+          <p:cNvSpPr>
+            <a:spLocks noGrp="1"/>
+          </p:cNvSpPr>
+          <p:nvPr>
+            <p:ph idx="1"/>
+          </p:nvPr>
+        </p:nvSpPr>
+        <p:spPr/>
+        <p:txBody>
+          <a:bodyPr/>
+          <a:lstStyle/>
+          <a:p>
+            <a:pPr marL="0" lvl="0" indent="0">
+              <a:buNone/>
+            </a:pPr>
+            <a:r>
+              <a:rPr lang="en-US" dirty="0">
+                <a:solidFill>
+                  <a:schemeClr val="bg1"/>
+                </a:solidFill>
+              </a:rPr>
+              <a:t>Supervisors handle stationary orders, confirming deliveries and updating statuses, ensuring that onboard logistics stay on track.</a:t>
+            </a:r>
+          </a:p>
+        </p:txBody>
+      </p:sp>
+    </p:spTree>
+  </p:cSld>
+  <p:clrMapOvr>
+    <a:masterClrMapping/>
+  </p:clrMapOvr>
+</p:sld>
+</file>
+
+<file path=ppt/slides/slide28.xml><?xml version="1.0" encoding="utf-8"?>
+<p:sld xmlns:a="http://schemas.openxmlformats.org/drawingml/2006/main" xmlns:r="http://schemas.openxmlformats.org/officeDocument/2006/relationships" xmlns:p="http://schemas.openxmlformats.org/presentationml/2006/main">
+  <p:cSld>
+    <p:spTree>
+      <p:nvGrpSpPr>
+        <p:cNvPr id="1" name=""/>
+        <p:cNvGrpSpPr/>
+        <p:nvPr/>
+      </p:nvGrpSpPr>
+      <p:grpSpPr>
+        <a:xfrm>
+          <a:off x="0" y="0"/>
+          <a:ext cx="0" cy="0"/>
+          <a:chOff x="0" y="0"/>
+          <a:chExt cx="0" cy="0"/>
+        </a:xfrm>
+      </p:grpSpPr>
+      <p:pic>
+        <p:nvPicPr>
+          <p:cNvPr id="4" name="Picture 3">
+            <a:extLst>
+              <a:ext uri="{FF2B5EF4-FFF2-40B4-BE49-F238E27FC236}">
+                <a16:creationId xmlns:a16="http://schemas.microsoft.com/office/drawing/2014/main" id="{02ED68AC-6AB5-CF49-C325-EF7D33D04EB7}"/>
+              </a:ext>
+            </a:extLst>
+          </p:cNvPr>
+          <p:cNvPicPr>
+            <a:picLocks noChangeAspect="1"/>
+          </p:cNvPicPr>
+          <p:nvPr/>
+        </p:nvPicPr>
+        <p:blipFill>
+          <a:blip r:embed="rId2"/>
+          <a:stretch>
+            <a:fillRect/>
+          </a:stretch>
+        </p:blipFill>
+        <p:spPr>
+          <a:xfrm>
+            <a:off x="0" y="0"/>
+            <a:ext cx="9144000" cy="6858000"/>
+          </a:xfrm>
+          <a:prstGeom prst="rect">
+            <a:avLst/>
+          </a:prstGeom>
+        </p:spPr>
+      </p:pic>
+      <p:sp>
+        <p:nvSpPr>
+          <p:cNvPr id="2" name="Title 1">
+            <a:extLst>
+              <a:ext uri="{FF2B5EF4-FFF2-40B4-BE49-F238E27FC236}">
+                <a16:creationId xmlns:a16="http://schemas.microsoft.com/office/drawing/2014/main" id="{DF48EBCE-E25A-B049-D31A-113BE7A9A7A1}"/>
+              </a:ext>
+            </a:extLst>
+          </p:cNvPr>
+          <p:cNvSpPr>
+            <a:spLocks noGrp="1"/>
+          </p:cNvSpPr>
+          <p:nvPr>
+            <p:ph type="title"/>
+          </p:nvPr>
+        </p:nvSpPr>
+        <p:spPr/>
+        <p:txBody>
+          <a:bodyPr>
+            <a:normAutofit/>
+          </a:bodyPr>
+          <a:lstStyle/>
+          <a:p>
+            <a:r>
+              <a:rPr lang="en-US" dirty="0">
+                <a:solidFill>
+                  <a:schemeClr val="bg1"/>
+                </a:solidFill>
+              </a:rPr>
+              <a:t>Voyager Booking Status</a:t>
+            </a:r>
+          </a:p>
+        </p:txBody>
+      </p:sp>
+      <p:sp>
+        <p:nvSpPr>
+          <p:cNvPr id="3" name="Content Placeholder 2">
+            <a:extLst>
+              <a:ext uri="{FF2B5EF4-FFF2-40B4-BE49-F238E27FC236}">
+                <a16:creationId xmlns:a16="http://schemas.microsoft.com/office/drawing/2014/main" id="{834E163C-C51B-3577-DF68-E6BF8119E336}"/>
+              </a:ext>
+            </a:extLst>
+          </p:cNvPr>
+          <p:cNvSpPr>
+            <a:spLocks noGrp="1"/>
+          </p:cNvSpPr>
+          <p:nvPr>
+            <p:ph idx="1"/>
+          </p:nvPr>
+        </p:nvSpPr>
+        <p:spPr/>
+        <p:txBody>
+          <a:bodyPr/>
+          <a:lstStyle/>
+          <a:p>
+            <a:pPr marL="0" indent="0">
+              <a:buNone/>
+            </a:pPr>
+            <a:r>
+              <a:rPr lang="en-US" dirty="0">
+                <a:solidFill>
+                  <a:schemeClr val="bg1"/>
+                </a:solidFill>
+              </a:rPr>
+              <a:t>Voyagers can review all bookings, see live statuses (e.g., </a:t>
+            </a:r>
+            <a:r>
+              <a:rPr lang="en-US" b="1" dirty="0">
+                <a:solidFill>
+                  <a:schemeClr val="bg1"/>
+                </a:solidFill>
+              </a:rPr>
+              <a:t>Booking</a:t>
+            </a:r>
+            <a:r>
+              <a:rPr lang="en-US" dirty="0">
+                <a:solidFill>
+                  <a:schemeClr val="bg1"/>
+                </a:solidFill>
+              </a:rPr>
+              <a:t>, </a:t>
+            </a:r>
+            <a:r>
+              <a:rPr lang="en-US" b="1" dirty="0">
+                <a:solidFill>
+                  <a:schemeClr val="bg1"/>
+                </a:solidFill>
+              </a:rPr>
+              <a:t>Accepted</a:t>
+            </a:r>
+            <a:r>
+              <a:rPr lang="en-US" dirty="0">
+                <a:solidFill>
+                  <a:schemeClr val="bg1"/>
+                </a:solidFill>
+              </a:rPr>
+              <a:t>), and track progress.</a:t>
+            </a:r>
+          </a:p>
+        </p:txBody>
+      </p:sp>
+    </p:spTree>
+    <p:extLst>
+      <p:ext uri="{BB962C8B-B14F-4D97-AF65-F5344CB8AC3E}">
+        <p14:creationId xmlns:p14="http://schemas.microsoft.com/office/powerpoint/2010/main" val="2328232201"/>
+      </p:ext>
+    </p:extLst>
+  </p:cSld>
+  <p:clrMapOvr>
+    <a:masterClrMapping/>
+  </p:clrMapOvr>
+</p:sld>
+</file>
+
+<file path=ppt/slides/slide29.xml><?xml version="1.0" encoding="utf-8"?>
+<p:sld xmlns:a="http://schemas.openxmlformats.org/drawingml/2006/main" xmlns:r="http://schemas.openxmlformats.org/officeDocument/2006/relationships" xmlns:p="http://schemas.openxmlformats.org/presentationml/2006/main">
+  <p:cSld>
+    <p:spTree>
+      <p:nvGrpSpPr>
+        <p:cNvPr id="1" name=""/>
+        <p:cNvGrpSpPr/>
+        <p:nvPr/>
+      </p:nvGrpSpPr>
+      <p:grpSpPr>
+        <a:xfrm>
+          <a:off x="0" y="0"/>
+          <a:ext cx="0" cy="0"/>
+          <a:chOff x="0" y="0"/>
+          <a:chExt cx="0" cy="0"/>
+        </a:xfrm>
+      </p:grpSpPr>
+      <p:pic>
+        <p:nvPicPr>
+          <p:cNvPr id="4" name="Picture 3">
+            <a:extLst>
+              <a:ext uri="{FF2B5EF4-FFF2-40B4-BE49-F238E27FC236}">
+                <a16:creationId xmlns:a16="http://schemas.microsoft.com/office/drawing/2014/main" id="{A2313DB2-DC8E-2083-E795-58B9D5FB190E}"/>
+              </a:ext>
+            </a:extLst>
+          </p:cNvPr>
+          <p:cNvPicPr>
+            <a:picLocks noChangeAspect="1"/>
+          </p:cNvPicPr>
+          <p:nvPr/>
+        </p:nvPicPr>
+        <p:blipFill>
+          <a:blip r:embed="rId2"/>
+          <a:stretch>
+            <a:fillRect/>
+          </a:stretch>
+        </p:blipFill>
+        <p:spPr>
+          <a:xfrm>
+            <a:off x="0" y="0"/>
+            <a:ext cx="9144000" cy="6858000"/>
+          </a:xfrm>
+          <a:prstGeom prst="rect">
+            <a:avLst/>
+          </a:prstGeom>
+        </p:spPr>
+      </p:pic>
+      <p:sp>
+        <p:nvSpPr>
+          <p:cNvPr id="2" name="Title 1">
+            <a:extLst>
+              <a:ext uri="{FF2B5EF4-FFF2-40B4-BE49-F238E27FC236}">
+                <a16:creationId xmlns:a16="http://schemas.microsoft.com/office/drawing/2014/main" id="{848B38CC-94AC-206E-8E2B-8500DFC821BF}"/>
+              </a:ext>
+            </a:extLst>
+          </p:cNvPr>
+          <p:cNvSpPr>
+            <a:spLocks noGrp="1"/>
+          </p:cNvSpPr>
+          <p:nvPr>
+            <p:ph type="title"/>
+          </p:nvPr>
+        </p:nvSpPr>
+        <p:spPr/>
+        <p:txBody>
+          <a:bodyPr>
+            <a:normAutofit/>
+          </a:bodyPr>
+          <a:lstStyle/>
+          <a:p>
+            <a:r>
+              <a:rPr lang="en-US" sz="3100" dirty="0">
+                <a:solidFill>
+                  <a:schemeClr val="bg1"/>
+                </a:solidFill>
+              </a:rPr>
+              <a:t>Admin, Manager, Head Cook, Supervisor Dashboards</a:t>
+            </a:r>
+            <a:endParaRPr lang="en-US" dirty="0">
+              <a:solidFill>
+                <a:schemeClr val="bg1"/>
+              </a:solidFill>
+            </a:endParaRPr>
+          </a:p>
+        </p:txBody>
+      </p:sp>
+      <p:sp>
+        <p:nvSpPr>
+          <p:cNvPr id="3" name="Content Placeholder 2">
+            <a:extLst>
+              <a:ext uri="{FF2B5EF4-FFF2-40B4-BE49-F238E27FC236}">
+                <a16:creationId xmlns:a16="http://schemas.microsoft.com/office/drawing/2014/main" id="{FC5BFA21-43F6-254C-5DBA-B5F452481342}"/>
+              </a:ext>
+            </a:extLst>
+          </p:cNvPr>
+          <p:cNvSpPr>
+            <a:spLocks noGrp="1"/>
+          </p:cNvSpPr>
+          <p:nvPr>
+            <p:ph idx="1"/>
+          </p:nvPr>
+        </p:nvSpPr>
+        <p:spPr/>
+        <p:txBody>
+          <a:bodyPr/>
+          <a:lstStyle/>
+          <a:p>
+            <a:pPr marL="0" indent="0">
+              <a:buNone/>
+            </a:pPr>
+            <a:r>
+              <a:rPr lang="en-US" dirty="0">
+                <a:solidFill>
+                  <a:schemeClr val="bg1"/>
+                </a:solidFill>
+              </a:rPr>
+              <a:t>Each role’s dashboard is tailored, showing relevant metrics, action buttons, and analytics — ensuring smooth daily operations.</a:t>
+            </a:r>
+          </a:p>
+        </p:txBody>
+      </p:sp>
+    </p:spTree>
+    <p:extLst>
+      <p:ext uri="{BB962C8B-B14F-4D97-AF65-F5344CB8AC3E}">
+        <p14:creationId xmlns:p14="http://schemas.microsoft.com/office/powerpoint/2010/main" val="3324857676"/>
+      </p:ext>
+    </p:extLst>
+  </p:cSld>
+  <p:clrMapOvr>
+    <a:masterClrMapping/>
+  </p:clrMapOvr>
+</p:sld>
+</file>
+
+<file path=ppt/slides/slide3.xml><?xml version="1.0" encoding="utf-8"?>
+<p:sld xmlns:a="http://schemas.openxmlformats.org/drawingml/2006/main" xmlns:r="http://schemas.openxmlformats.org/officeDocument/2006/relationships" xmlns:p="http://schemas.openxmlformats.org/presentationml/2006/main">
+  <p:cSld>
+    <p:spTree>
+      <p:nvGrpSpPr>
+        <p:cNvPr id="1" name=""/>
+        <p:cNvGrpSpPr/>
+        <p:nvPr/>
+      </p:nvGrpSpPr>
+      <p:grpSpPr>
+        <a:xfrm>
+          <a:off x="0" y="0"/>
+          <a:ext cx="0" cy="0"/>
+          <a:chOff x="0" y="0"/>
+          <a:chExt cx="0" cy="0"/>
+        </a:xfrm>
+      </p:grpSpPr>
+      <p:pic>
+        <p:nvPicPr>
+          <p:cNvPr id="4" name="Picture 3">
+            <a:extLst>
+              <a:ext uri="{FF2B5EF4-FFF2-40B4-BE49-F238E27FC236}">
+                <a16:creationId xmlns:a16="http://schemas.microsoft.com/office/drawing/2014/main" id="{6CE958E8-3E1F-B802-C37A-FDA176D1E290}"/>
+              </a:ext>
+            </a:extLst>
+          </p:cNvPr>
+          <p:cNvPicPr>
+            <a:picLocks noChangeAspect="1"/>
+          </p:cNvPicPr>
+          <p:nvPr/>
+        </p:nvPicPr>
+        <p:blipFill>
+          <a:blip r:embed="rId2"/>
+          <a:stretch>
+            <a:fillRect/>
+          </a:stretch>
+        </p:blipFill>
+        <p:spPr>
+          <a:xfrm>
+            <a:off x="0" y="0"/>
+            <a:ext cx="9144000" cy="6858000"/>
+          </a:xfrm>
+          <a:prstGeom prst="rect">
+            <a:avLst/>
+          </a:prstGeom>
+        </p:spPr>
+      </p:pic>
+      <p:sp>
+        <p:nvSpPr>
+          <p:cNvPr id="2" name="Title 1"/>
+          <p:cNvSpPr>
+            <a:spLocks noGrp="1"/>
+          </p:cNvSpPr>
+          <p:nvPr>
+            <p:ph type="title"/>
+          </p:nvPr>
+        </p:nvSpPr>
+        <p:spPr/>
+        <p:txBody>
+          <a:bodyPr/>
+          <a:lstStyle/>
+          <a:p>
+            <a:r>
+              <a:rPr lang="en-US" dirty="0">
+                <a:solidFill>
+                  <a:schemeClr val="bg1"/>
+                </a:solidFill>
+              </a:rPr>
+              <a:t>Us</a:t>
+            </a:r>
+            <a:r>
+              <a:rPr dirty="0">
+                <a:solidFill>
+                  <a:schemeClr val="bg1"/>
+                </a:solidFill>
+              </a:rPr>
+              <a:t>er Signup and Login</a:t>
+            </a:r>
+          </a:p>
+        </p:txBody>
+      </p:sp>
+      <p:sp>
+        <p:nvSpPr>
+          <p:cNvPr id="3" name="Content Placeholder 2"/>
+          <p:cNvSpPr>
+            <a:spLocks noGrp="1"/>
+          </p:cNvSpPr>
+          <p:nvPr>
+            <p:ph idx="1"/>
+          </p:nvPr>
+        </p:nvSpPr>
+        <p:spPr/>
+        <p:txBody>
+          <a:bodyPr/>
+          <a:lstStyle/>
+          <a:p>
+            <a:pPr marL="0" lvl="0" indent="0">
+              <a:buNone/>
+            </a:pPr>
+            <a:r>
+              <a:rPr lang="en-US" dirty="0">
+                <a:solidFill>
+                  <a:schemeClr val="bg1"/>
+                </a:solidFill>
+              </a:rPr>
+              <a:t>Users can register and log in, gaining access to interactive features like adding items to the cart or booking services.</a:t>
+            </a:r>
+          </a:p>
+        </p:txBody>
+      </p:sp>
+    </p:spTree>
+  </p:cSld>
+  <p:clrMapOvr>
+    <a:masterClrMapping/>
+  </p:clrMapOvr>
+</p:sld>
+</file>
+
+<file path=ppt/slides/slide30.xml><?xml version="1.0" encoding="utf-8"?>
+<p:sld xmlns:a="http://schemas.openxmlformats.org/drawingml/2006/main" xmlns:r="http://schemas.openxmlformats.org/officeDocument/2006/relationships" xmlns:p="http://schemas.openxmlformats.org/presentationml/2006/main">
+  <p:cSld>
+    <p:spTree>
+      <p:nvGrpSpPr>
+        <p:cNvPr id="1" name=""/>
+        <p:cNvGrpSpPr/>
+        <p:nvPr/>
+      </p:nvGrpSpPr>
+      <p:grpSpPr>
+        <a:xfrm>
+          <a:off x="0" y="0"/>
+          <a:ext cx="0" cy="0"/>
+          <a:chOff x="0" y="0"/>
+          <a:chExt cx="0" cy="0"/>
+        </a:xfrm>
+      </p:grpSpPr>
+      <p:pic>
+        <p:nvPicPr>
+          <p:cNvPr id="4" name="Picture 3">
+            <a:extLst>
+              <a:ext uri="{FF2B5EF4-FFF2-40B4-BE49-F238E27FC236}">
+                <a16:creationId xmlns:a16="http://schemas.microsoft.com/office/drawing/2014/main" id="{9A55555A-A783-7ABC-3B20-55F7EF3F4275}"/>
+              </a:ext>
+            </a:extLst>
+          </p:cNvPr>
+          <p:cNvPicPr>
+            <a:picLocks noChangeAspect="1"/>
+          </p:cNvPicPr>
+          <p:nvPr/>
+        </p:nvPicPr>
+        <p:blipFill>
+          <a:blip r:embed="rId2"/>
+          <a:stretch>
+            <a:fillRect/>
+          </a:stretch>
+        </p:blipFill>
+        <p:spPr>
+          <a:xfrm>
+            <a:off x="0" y="0"/>
+            <a:ext cx="9144000" cy="6858000"/>
+          </a:xfrm>
+          <a:prstGeom prst="rect">
+            <a:avLst/>
+          </a:prstGeom>
+        </p:spPr>
+      </p:pic>
+      <p:sp>
+        <p:nvSpPr>
+          <p:cNvPr id="2" name="Title 1"/>
+          <p:cNvSpPr>
+            <a:spLocks noGrp="1"/>
+          </p:cNvSpPr>
+          <p:nvPr>
+            <p:ph type="title"/>
+          </p:nvPr>
+        </p:nvSpPr>
+        <p:spPr/>
+        <p:txBody>
+          <a:bodyPr/>
+          <a:lstStyle/>
+          <a:p>
+            <a:r>
+              <a:rPr dirty="0">
+                <a:solidFill>
+                  <a:schemeClr val="bg1"/>
+                </a:solidFill>
+              </a:rPr>
+              <a:t>Frontend Libraries Used</a:t>
+            </a:r>
+          </a:p>
+        </p:txBody>
+      </p:sp>
+      <p:sp>
+        <p:nvSpPr>
+          <p:cNvPr id="3" name="Content Placeholder 2"/>
+          <p:cNvSpPr>
+            <a:spLocks noGrp="1"/>
+          </p:cNvSpPr>
+          <p:nvPr>
+            <p:ph idx="1"/>
+          </p:nvPr>
+        </p:nvSpPr>
+        <p:spPr/>
+        <p:txBody>
+          <a:bodyPr>
+            <a:normAutofit fontScale="47500" lnSpcReduction="20000"/>
+          </a:bodyPr>
+          <a:lstStyle/>
+          <a:p>
+            <a:r>
+              <a:rPr lang="en-US" dirty="0" err="1">
+                <a:solidFill>
+                  <a:schemeClr val="bg1"/>
+                </a:solidFill>
+              </a:rPr>
+              <a:t>aceternity</a:t>
+            </a:r>
+            <a:r>
+              <a:rPr lang="en-US" dirty="0">
+                <a:solidFill>
+                  <a:schemeClr val="bg1"/>
+                </a:solidFill>
+              </a:rPr>
+              <a:t> </a:t>
+            </a:r>
+            <a:r>
+              <a:rPr lang="en-US" dirty="0" err="1">
+                <a:solidFill>
+                  <a:schemeClr val="bg1"/>
+                </a:solidFill>
+              </a:rPr>
+              <a:t>ui</a:t>
+            </a:r>
+            <a:r>
+              <a:rPr lang="en-US" dirty="0">
+                <a:solidFill>
+                  <a:schemeClr val="bg1"/>
+                </a:solidFill>
+              </a:rPr>
+              <a:t>, </a:t>
+            </a:r>
+          </a:p>
+          <a:p>
+            <a:r>
+              <a:rPr lang="en-US" dirty="0">
+                <a:solidFill>
+                  <a:schemeClr val="bg1"/>
+                </a:solidFill>
+              </a:rPr>
+              <a:t>@headlessui/react,  </a:t>
+            </a:r>
+          </a:p>
+          <a:p>
+            <a:r>
+              <a:rPr lang="en-US" dirty="0">
+                <a:solidFill>
+                  <a:schemeClr val="bg1"/>
+                </a:solidFill>
+              </a:rPr>
+              <a:t>@heroicons/react, </a:t>
+            </a:r>
+          </a:p>
+          <a:p>
+            <a:r>
+              <a:rPr dirty="0">
+                <a:solidFill>
+                  <a:schemeClr val="bg1"/>
+                </a:solidFill>
+              </a:rPr>
+              <a:t>@emotion/react, </a:t>
+            </a:r>
+            <a:endParaRPr lang="en-US" dirty="0">
+              <a:solidFill>
+                <a:schemeClr val="bg1"/>
+              </a:solidFill>
+            </a:endParaRPr>
+          </a:p>
+          <a:p>
+            <a:r>
+              <a:rPr dirty="0">
+                <a:solidFill>
+                  <a:schemeClr val="bg1"/>
+                </a:solidFill>
+              </a:rPr>
+              <a:t>@mui/material, </a:t>
+            </a:r>
+            <a:endParaRPr lang="en-US" dirty="0">
+              <a:solidFill>
+                <a:schemeClr val="bg1"/>
+              </a:solidFill>
+            </a:endParaRPr>
+          </a:p>
+          <a:p>
+            <a:r>
+              <a:rPr dirty="0">
+                <a:solidFill>
+                  <a:schemeClr val="bg1"/>
+                </a:solidFill>
+              </a:rPr>
+              <a:t>@tiptap/react, </a:t>
+            </a:r>
+            <a:endParaRPr lang="en-US" dirty="0">
+              <a:solidFill>
+                <a:schemeClr val="bg1"/>
+              </a:solidFill>
+            </a:endParaRPr>
+          </a:p>
+          <a:p>
+            <a:r>
+              <a:rPr dirty="0">
+                <a:solidFill>
+                  <a:schemeClr val="bg1"/>
+                </a:solidFill>
+              </a:rPr>
+              <a:t>@tailwindcss/vite, </a:t>
+            </a:r>
+            <a:endParaRPr lang="en-US" dirty="0">
+              <a:solidFill>
+                <a:schemeClr val="bg1"/>
+              </a:solidFill>
+            </a:endParaRPr>
+          </a:p>
+          <a:p>
+            <a:r>
+              <a:rPr dirty="0">
+                <a:solidFill>
+                  <a:schemeClr val="bg1"/>
+                </a:solidFill>
+              </a:rPr>
+              <a:t>framer-motion, </a:t>
+            </a:r>
+            <a:endParaRPr lang="en-US" dirty="0">
+              <a:solidFill>
+                <a:schemeClr val="bg1"/>
+              </a:solidFill>
+            </a:endParaRPr>
+          </a:p>
+          <a:p>
+            <a:r>
+              <a:rPr lang="en-US" dirty="0">
+                <a:solidFill>
+                  <a:schemeClr val="bg1"/>
+                </a:solidFill>
+              </a:rPr>
+              <a:t>slick-carousel</a:t>
+            </a:r>
+          </a:p>
+          <a:p>
+            <a:r>
+              <a:rPr lang="en-US" dirty="0">
+                <a:solidFill>
+                  <a:schemeClr val="bg1"/>
+                </a:solidFill>
+              </a:rPr>
+              <a:t>date-</a:t>
+            </a:r>
+            <a:r>
+              <a:rPr lang="en-US" dirty="0" err="1">
+                <a:solidFill>
+                  <a:schemeClr val="bg1"/>
+                </a:solidFill>
+              </a:rPr>
+              <a:t>fns</a:t>
+            </a:r>
+            <a:endParaRPr lang="en-US" dirty="0">
+              <a:solidFill>
+                <a:schemeClr val="bg1"/>
+              </a:solidFill>
+            </a:endParaRPr>
+          </a:p>
+          <a:p>
+            <a:r>
+              <a:rPr lang="en-US" dirty="0" err="1">
+                <a:solidFill>
+                  <a:schemeClr val="bg1"/>
+                </a:solidFill>
+              </a:rPr>
+              <a:t>dayjs</a:t>
+            </a:r>
+            <a:endParaRPr lang="en-US" dirty="0">
+              <a:solidFill>
+                <a:schemeClr val="bg1"/>
+              </a:solidFill>
+            </a:endParaRPr>
+          </a:p>
+          <a:p>
+            <a:r>
+              <a:rPr lang="en-US" dirty="0">
+                <a:solidFill>
+                  <a:schemeClr val="bg1"/>
+                </a:solidFill>
+              </a:rPr>
+              <a:t>react-</a:t>
+            </a:r>
+            <a:r>
+              <a:rPr lang="en-US" dirty="0" err="1">
+                <a:solidFill>
+                  <a:schemeClr val="bg1"/>
+                </a:solidFill>
+              </a:rPr>
+              <a:t>datepicker</a:t>
+            </a:r>
+            <a:endParaRPr lang="en-US" dirty="0">
+              <a:solidFill>
+                <a:schemeClr val="bg1"/>
+              </a:solidFill>
+            </a:endParaRPr>
+          </a:p>
+          <a:p>
+            <a:r>
+              <a:rPr lang="en-US" dirty="0">
+                <a:solidFill>
+                  <a:schemeClr val="bg1"/>
+                </a:solidFill>
+              </a:rPr>
+              <a:t>tailwind-merge</a:t>
+            </a:r>
+          </a:p>
+          <a:p>
+            <a:r>
+              <a:rPr dirty="0" err="1">
+                <a:solidFill>
+                  <a:schemeClr val="bg1"/>
+                </a:solidFill>
+              </a:rPr>
+              <a:t>axios</a:t>
+            </a:r>
+            <a:r>
+              <a:rPr dirty="0">
+                <a:solidFill>
+                  <a:schemeClr val="bg1"/>
+                </a:solidFill>
+              </a:rPr>
+              <a:t>, </a:t>
+            </a:r>
+            <a:endParaRPr lang="en-US" dirty="0">
+              <a:solidFill>
+                <a:schemeClr val="bg1"/>
+              </a:solidFill>
+            </a:endParaRPr>
+          </a:p>
+          <a:p>
+            <a:r>
+              <a:rPr dirty="0">
+                <a:solidFill>
+                  <a:schemeClr val="bg1"/>
+                </a:solidFill>
+              </a:rPr>
+              <a:t>react-icons, etc.</a:t>
+            </a:r>
+            <a:endParaRPr lang="en-US" dirty="0">
+              <a:solidFill>
+                <a:schemeClr val="bg1"/>
+              </a:solidFill>
+            </a:endParaRPr>
+          </a:p>
+          <a:p>
+            <a:r>
+              <a:rPr lang="en-US" dirty="0">
+                <a:solidFill>
+                  <a:schemeClr val="bg1"/>
+                </a:solidFill>
+              </a:rPr>
+              <a:t>and other modern libraries, Aurelia offers an elegant, interactive, and responsive experience.</a:t>
+            </a:r>
+          </a:p>
+        </p:txBody>
+      </p:sp>
+    </p:spTree>
+  </p:cSld>
+  <p:clrMapOvr>
+    <a:masterClrMapping/>
+  </p:clrMapOvr>
+</p:sld>
+</file>
+
+<file path=ppt/slides/slide31.xml><?xml version="1.0" encoding="utf-8"?>
+<p:sld xmlns:a="http://schemas.openxmlformats.org/drawingml/2006/main" xmlns:r="http://schemas.openxmlformats.org/officeDocument/2006/relationships" xmlns:p="http://schemas.openxmlformats.org/presentationml/2006/main">
+  <p:cSld>
+    <p:spTree>
+      <p:nvGrpSpPr>
+        <p:cNvPr id="1" name=""/>
+        <p:cNvGrpSpPr/>
+        <p:nvPr/>
+      </p:nvGrpSpPr>
+      <p:grpSpPr>
+        <a:xfrm>
+          <a:off x="0" y="0"/>
+          <a:ext cx="0" cy="0"/>
+          <a:chOff x="0" y="0"/>
+          <a:chExt cx="0" cy="0"/>
+        </a:xfrm>
+      </p:grpSpPr>
+      <p:pic>
+        <p:nvPicPr>
+          <p:cNvPr id="5" name="Picture 4">
+            <a:extLst>
+              <a:ext uri="{FF2B5EF4-FFF2-40B4-BE49-F238E27FC236}">
+                <a16:creationId xmlns:a16="http://schemas.microsoft.com/office/drawing/2014/main" id="{A2F001F5-BA17-722C-50DF-8049FC0D0BF9}"/>
+              </a:ext>
+            </a:extLst>
+          </p:cNvPr>
+          <p:cNvPicPr>
+            <a:picLocks noChangeAspect="1"/>
+          </p:cNvPicPr>
+          <p:nvPr/>
+        </p:nvPicPr>
+        <p:blipFill>
+          <a:blip r:embed="rId2"/>
+          <a:stretch>
+            <a:fillRect/>
+          </a:stretch>
+        </p:blipFill>
+        <p:spPr>
+          <a:xfrm>
+            <a:off x="0" y="0"/>
+            <a:ext cx="9143999" cy="6858000"/>
+          </a:xfrm>
+          <a:prstGeom prst="rect">
+            <a:avLst/>
+          </a:prstGeom>
+        </p:spPr>
+      </p:pic>
+      <p:sp>
+        <p:nvSpPr>
+          <p:cNvPr id="2" name="Title 1"/>
+          <p:cNvSpPr>
+            <a:spLocks noGrp="1"/>
+          </p:cNvSpPr>
+          <p:nvPr>
+            <p:ph type="title"/>
+          </p:nvPr>
+        </p:nvSpPr>
+        <p:spPr/>
+        <p:txBody>
+          <a:bodyPr/>
+          <a:lstStyle/>
+          <a:p>
+            <a:r>
+              <a:rPr lang="en-US" dirty="0">
+                <a:solidFill>
+                  <a:schemeClr val="bg1"/>
+                </a:solidFill>
+              </a:rPr>
+              <a:t>Backend Architecture &amp; Models</a:t>
+            </a:r>
+          </a:p>
+        </p:txBody>
+      </p:sp>
+      <p:sp>
+        <p:nvSpPr>
+          <p:cNvPr id="3" name="Content Placeholder 2"/>
+          <p:cNvSpPr>
+            <a:spLocks noGrp="1"/>
+          </p:cNvSpPr>
+          <p:nvPr>
+            <p:ph idx="1"/>
+          </p:nvPr>
+        </p:nvSpPr>
+        <p:spPr/>
+        <p:txBody>
+          <a:bodyPr>
+            <a:normAutofit/>
+          </a:bodyPr>
+          <a:lstStyle/>
+          <a:p>
+            <a:r>
+              <a:rPr sz="2800" dirty="0">
+                <a:solidFill>
+                  <a:schemeClr val="bg1"/>
+                </a:solidFill>
+              </a:rPr>
+              <a:t>MongoDB database</a:t>
+            </a:r>
+          </a:p>
+          <a:p>
+            <a:r>
+              <a:rPr sz="2800" dirty="0">
+                <a:solidFill>
+                  <a:schemeClr val="bg1"/>
+                </a:solidFill>
+              </a:rPr>
+              <a:t>Connection: mongodb://127.0.0.1:27017/cruise_management</a:t>
+            </a:r>
+            <a:endParaRPr lang="en-US" sz="2800" dirty="0">
+              <a:solidFill>
+                <a:schemeClr val="bg1"/>
+              </a:solidFill>
+            </a:endParaRPr>
+          </a:p>
+          <a:p>
+            <a:r>
+              <a:rPr lang="en-US" sz="2600" dirty="0">
+                <a:solidFill>
+                  <a:schemeClr val="bg1"/>
+                </a:solidFill>
+              </a:rPr>
+              <a:t>The system uses a MongoDB database (mongodb://127.0.0.1:27017/cruise_management) with models like </a:t>
+            </a:r>
+            <a:r>
+              <a:rPr lang="en-US" sz="2600" b="1" dirty="0" err="1">
+                <a:solidFill>
+                  <a:schemeClr val="bg1"/>
+                </a:solidFill>
+              </a:rPr>
+              <a:t>BeautySalon</a:t>
+            </a:r>
+            <a:r>
+              <a:rPr lang="en-US" sz="2600" b="1" dirty="0">
+                <a:solidFill>
+                  <a:schemeClr val="bg1"/>
+                </a:solidFill>
+              </a:rPr>
+              <a:t>, Booking, </a:t>
+            </a:r>
+            <a:r>
+              <a:rPr lang="en-US" sz="2600" b="1" dirty="0" err="1">
+                <a:solidFill>
+                  <a:schemeClr val="bg1"/>
+                </a:solidFill>
+              </a:rPr>
+              <a:t>CateringOrder</a:t>
+            </a:r>
+            <a:r>
+              <a:rPr lang="en-US" sz="2600" b="1" dirty="0">
+                <a:solidFill>
+                  <a:schemeClr val="bg1"/>
+                </a:solidFill>
+              </a:rPr>
+              <a:t>, Contact, Fitness, </a:t>
+            </a:r>
+            <a:r>
+              <a:rPr lang="en-US" sz="2600" b="1" dirty="0" err="1">
+                <a:solidFill>
+                  <a:schemeClr val="bg1"/>
+                </a:solidFill>
+              </a:rPr>
+              <a:t>FoodItem</a:t>
+            </a:r>
+            <a:r>
+              <a:rPr lang="en-US" sz="2600" b="1" dirty="0">
+                <a:solidFill>
+                  <a:schemeClr val="bg1"/>
+                </a:solidFill>
+              </a:rPr>
+              <a:t>, Gallery, </a:t>
+            </a:r>
+            <a:r>
+              <a:rPr lang="en-US" sz="2600" b="1" dirty="0" err="1">
+                <a:solidFill>
+                  <a:schemeClr val="bg1"/>
+                </a:solidFill>
+              </a:rPr>
+              <a:t>MovieBooking</a:t>
+            </a:r>
+            <a:r>
+              <a:rPr lang="en-US" sz="2600" b="1" dirty="0">
+                <a:solidFill>
+                  <a:schemeClr val="bg1"/>
+                </a:solidFill>
+              </a:rPr>
+              <a:t>, Notification, </a:t>
+            </a:r>
+            <a:r>
+              <a:rPr lang="en-US" sz="2600" b="1" dirty="0" err="1">
+                <a:solidFill>
+                  <a:schemeClr val="bg1"/>
+                </a:solidFill>
+              </a:rPr>
+              <a:t>PartyHall</a:t>
+            </a:r>
+            <a:r>
+              <a:rPr lang="en-US" sz="2600" b="1" dirty="0">
+                <a:solidFill>
+                  <a:schemeClr val="bg1"/>
+                </a:solidFill>
+              </a:rPr>
+              <a:t>, SlotUsageSalon, </a:t>
+            </a:r>
+            <a:r>
+              <a:rPr lang="en-US" sz="2600" b="1" dirty="0" err="1">
+                <a:solidFill>
+                  <a:schemeClr val="bg1"/>
+                </a:solidFill>
+              </a:rPr>
+              <a:t>StationaryOrder</a:t>
+            </a:r>
+            <a:r>
+              <a:rPr lang="en-US" sz="2600" b="1" dirty="0">
+                <a:solidFill>
+                  <a:schemeClr val="bg1"/>
+                </a:solidFill>
+              </a:rPr>
+              <a:t>, User</a:t>
+            </a:r>
+            <a:r>
+              <a:rPr lang="en-US" sz="2600" dirty="0">
+                <a:solidFill>
+                  <a:schemeClr val="bg1"/>
+                </a:solidFill>
+              </a:rPr>
+              <a:t>.</a:t>
+            </a:r>
+            <a:endParaRPr sz="2600" dirty="0">
+              <a:solidFill>
+                <a:schemeClr val="bg1"/>
+              </a:solidFill>
+            </a:endParaRPr>
+          </a:p>
+        </p:txBody>
+      </p:sp>
+    </p:spTree>
+  </p:cSld>
+  <p:clrMapOvr>
+    <a:masterClrMapping/>
+  </p:clrMapOvr>
+</p:sld>
+</file>
+
+<file path=ppt/slides/slide32.xml><?xml version="1.0" encoding="utf-8"?>
+<p:sld xmlns:a="http://schemas.openxmlformats.org/drawingml/2006/main" xmlns:r="http://schemas.openxmlformats.org/officeDocument/2006/relationships" xmlns:p="http://schemas.openxmlformats.org/presentationml/2006/main">
+  <p:cSld>
+    <p:spTree>
+      <p:nvGrpSpPr>
+        <p:cNvPr id="1" name=""/>
+        <p:cNvGrpSpPr/>
+        <p:nvPr/>
+      </p:nvGrpSpPr>
+      <p:grpSpPr>
+        <a:xfrm>
+          <a:off x="0" y="0"/>
+          <a:ext cx="0" cy="0"/>
+          <a:chOff x="0" y="0"/>
+          <a:chExt cx="0" cy="0"/>
+        </a:xfrm>
+      </p:grpSpPr>
+      <p:pic>
+        <p:nvPicPr>
+          <p:cNvPr id="4" name="Picture 3">
+            <a:extLst>
+              <a:ext uri="{FF2B5EF4-FFF2-40B4-BE49-F238E27FC236}">
+                <a16:creationId xmlns:a16="http://schemas.microsoft.com/office/drawing/2014/main" id="{9A406BC0-208C-1001-8BCD-C52A8966574C}"/>
+              </a:ext>
+            </a:extLst>
+          </p:cNvPr>
+          <p:cNvPicPr>
+            <a:picLocks noChangeAspect="1"/>
+          </p:cNvPicPr>
+          <p:nvPr/>
+        </p:nvPicPr>
+        <p:blipFill>
+          <a:blip r:embed="rId2"/>
+          <a:stretch>
+            <a:fillRect/>
+          </a:stretch>
+        </p:blipFill>
+        <p:spPr>
+          <a:xfrm>
+            <a:off x="0" y="0"/>
+            <a:ext cx="9144000" cy="6858000"/>
+          </a:xfrm>
+          <a:prstGeom prst="rect">
+            <a:avLst/>
+          </a:prstGeom>
+        </p:spPr>
+      </p:pic>
+      <p:sp>
+        <p:nvSpPr>
+          <p:cNvPr id="2" name="Title 1"/>
+          <p:cNvSpPr>
+            <a:spLocks noGrp="1"/>
+          </p:cNvSpPr>
+          <p:nvPr>
+            <p:ph type="title"/>
+          </p:nvPr>
+        </p:nvSpPr>
+        <p:spPr/>
+        <p:txBody>
+          <a:bodyPr/>
+          <a:lstStyle/>
+          <a:p>
+            <a:r>
+              <a:rPr dirty="0">
+                <a:solidFill>
+                  <a:schemeClr val="bg1"/>
+                </a:solidFill>
+              </a:rPr>
+              <a:t>Routing Overview</a:t>
+            </a:r>
+          </a:p>
+        </p:txBody>
+      </p:sp>
+      <p:sp>
+        <p:nvSpPr>
+          <p:cNvPr id="3" name="Content Placeholder 2"/>
+          <p:cNvSpPr>
+            <a:spLocks noGrp="1"/>
+          </p:cNvSpPr>
+          <p:nvPr>
+            <p:ph idx="1"/>
+          </p:nvPr>
+        </p:nvSpPr>
+        <p:spPr/>
+        <p:txBody>
+          <a:bodyPr/>
+          <a:lstStyle/>
+          <a:p>
+            <a:r>
+              <a:rPr dirty="0">
+                <a:solidFill>
+                  <a:schemeClr val="bg1"/>
+                </a:solidFill>
+              </a:rPr>
+              <a:t>Route Groups:</a:t>
+            </a:r>
+          </a:p>
+          <a:p>
+            <a:pPr lvl="1"/>
+            <a:r>
+              <a:rPr dirty="0">
+                <a:solidFill>
+                  <a:schemeClr val="bg1"/>
+                </a:solidFill>
+              </a:rPr>
+              <a:t> /admin</a:t>
+            </a:r>
+          </a:p>
+          <a:p>
+            <a:pPr lvl="1"/>
+            <a:r>
+              <a:rPr dirty="0">
+                <a:solidFill>
+                  <a:schemeClr val="bg1"/>
+                </a:solidFill>
+              </a:rPr>
+              <a:t> /common</a:t>
+            </a:r>
+          </a:p>
+          <a:p>
+            <a:pPr lvl="1"/>
+            <a:r>
+              <a:rPr dirty="0">
+                <a:solidFill>
+                  <a:schemeClr val="bg1"/>
+                </a:solidFill>
+              </a:rPr>
+              <a:t> /voyager</a:t>
+            </a:r>
+          </a:p>
+          <a:p>
+            <a:pPr lvl="1"/>
+            <a:r>
+              <a:rPr dirty="0">
+                <a:solidFill>
+                  <a:schemeClr val="bg1"/>
+                </a:solidFill>
+              </a:rPr>
+              <a:t> /headcook</a:t>
+            </a:r>
+          </a:p>
+          <a:p>
+            <a:pPr lvl="1"/>
+            <a:r>
+              <a:rPr dirty="0">
+                <a:solidFill>
+                  <a:schemeClr val="bg1"/>
+                </a:solidFill>
+              </a:rPr>
+              <a:t> /supervisor</a:t>
+            </a:r>
+            <a:endParaRPr lang="en-US" dirty="0">
+              <a:solidFill>
+                <a:schemeClr val="bg1"/>
+              </a:solidFill>
+            </a:endParaRPr>
+          </a:p>
+          <a:p>
+            <a:pPr lvl="1"/>
+            <a:r>
+              <a:rPr lang="en-US" dirty="0">
+                <a:solidFill>
+                  <a:schemeClr val="bg1"/>
+                </a:solidFill>
+              </a:rPr>
+              <a:t> /user</a:t>
+            </a:r>
+            <a:endParaRPr dirty="0">
+              <a:solidFill>
+                <a:schemeClr val="bg1"/>
+              </a:solidFill>
+            </a:endParaRPr>
+          </a:p>
+        </p:txBody>
+      </p:sp>
+    </p:spTree>
+  </p:cSld>
+  <p:clrMapOvr>
+    <a:masterClrMapping/>
+  </p:clrMapOvr>
+</p:sld>
+</file>
+
+<file path=ppt/slides/slide33.xml><?xml version="1.0" encoding="utf-8"?>
+<p:sld xmlns:a="http://schemas.openxmlformats.org/drawingml/2006/main" xmlns:r="http://schemas.openxmlformats.org/officeDocument/2006/relationships" xmlns:p="http://schemas.openxmlformats.org/presentationml/2006/main">
+  <p:cSld>
+    <p:spTree>
+      <p:nvGrpSpPr>
+        <p:cNvPr id="1" name=""/>
+        <p:cNvGrpSpPr/>
+        <p:nvPr/>
+      </p:nvGrpSpPr>
+      <p:grpSpPr>
+        <a:xfrm>
+          <a:off x="0" y="0"/>
+          <a:ext cx="0" cy="0"/>
+          <a:chOff x="0" y="0"/>
+          <a:chExt cx="0" cy="0"/>
+        </a:xfrm>
+      </p:grpSpPr>
+      <p:pic>
+        <p:nvPicPr>
+          <p:cNvPr id="4" name="Picture 3">
+            <a:extLst>
+              <a:ext uri="{FF2B5EF4-FFF2-40B4-BE49-F238E27FC236}">
+                <a16:creationId xmlns:a16="http://schemas.microsoft.com/office/drawing/2014/main" id="{DA6A7934-6776-214C-43BD-80492C31BD78}"/>
+              </a:ext>
+            </a:extLst>
+          </p:cNvPr>
+          <p:cNvPicPr>
+            <a:picLocks noChangeAspect="1"/>
+          </p:cNvPicPr>
+          <p:nvPr/>
+        </p:nvPicPr>
+        <p:blipFill>
+          <a:blip r:embed="rId2"/>
+          <a:stretch>
+            <a:fillRect/>
+          </a:stretch>
+        </p:blipFill>
+        <p:spPr>
+          <a:xfrm>
+            <a:off x="0" y="0"/>
+            <a:ext cx="9144000" cy="6858000"/>
+          </a:xfrm>
+          <a:prstGeom prst="rect">
+            <a:avLst/>
+          </a:prstGeom>
+        </p:spPr>
+      </p:pic>
+      <p:sp>
+        <p:nvSpPr>
+          <p:cNvPr id="2" name="Title 1"/>
+          <p:cNvSpPr>
+            <a:spLocks noGrp="1"/>
+          </p:cNvSpPr>
+          <p:nvPr>
+            <p:ph type="title"/>
+          </p:nvPr>
+        </p:nvSpPr>
+        <p:spPr/>
+        <p:txBody>
+          <a:bodyPr/>
+          <a:lstStyle/>
+          <a:p>
+            <a:r>
+              <a:rPr dirty="0">
+                <a:solidFill>
+                  <a:schemeClr val="bg1"/>
+                </a:solidFill>
+              </a:rPr>
+              <a:t>Dashboards Overview</a:t>
+            </a:r>
+          </a:p>
+        </p:txBody>
+      </p:sp>
+      <p:sp>
+        <p:nvSpPr>
+          <p:cNvPr id="3" name="Content Placeholder 2"/>
+          <p:cNvSpPr>
+            <a:spLocks noGrp="1"/>
+          </p:cNvSpPr>
+          <p:nvPr>
+            <p:ph idx="1"/>
+          </p:nvPr>
+        </p:nvSpPr>
+        <p:spPr/>
+        <p:txBody>
+          <a:bodyPr/>
+          <a:lstStyle/>
+          <a:p>
+            <a:r>
+              <a:rPr dirty="0">
+                <a:solidFill>
+                  <a:schemeClr val="bg1"/>
+                </a:solidFill>
+              </a:rPr>
+              <a:t>Separate dashboards for:</a:t>
+            </a:r>
+          </a:p>
+          <a:p>
+            <a:pPr lvl="1"/>
+            <a:r>
+              <a:rPr dirty="0">
+                <a:solidFill>
+                  <a:schemeClr val="bg1"/>
+                </a:solidFill>
+              </a:rPr>
+              <a:t>Admin</a:t>
+            </a:r>
+          </a:p>
+          <a:p>
+            <a:pPr lvl="1"/>
+            <a:r>
+              <a:rPr dirty="0">
+                <a:solidFill>
+                  <a:schemeClr val="bg1"/>
+                </a:solidFill>
+              </a:rPr>
+              <a:t>Manager</a:t>
+            </a:r>
+          </a:p>
+          <a:p>
+            <a:pPr lvl="1"/>
+            <a:r>
+              <a:rPr dirty="0">
+                <a:solidFill>
+                  <a:schemeClr val="bg1"/>
+                </a:solidFill>
+              </a:rPr>
+              <a:t>Headcook</a:t>
+            </a:r>
+          </a:p>
+          <a:p>
+            <a:pPr lvl="1"/>
+            <a:r>
+              <a:rPr dirty="0">
+                <a:solidFill>
+                  <a:schemeClr val="bg1"/>
+                </a:solidFill>
+              </a:rPr>
+              <a:t>Supervisor</a:t>
+            </a:r>
+          </a:p>
+        </p:txBody>
+      </p:sp>
+    </p:spTree>
+  </p:cSld>
+  <p:clrMapOvr>
+    <a:masterClrMapping/>
+  </p:clrMapOvr>
+</p:sld>
+</file>
+
+<file path=ppt/slides/slide34.xml><?xml version="1.0" encoding="utf-8"?>
+<p:sld xmlns:a="http://schemas.openxmlformats.org/drawingml/2006/main" xmlns:r="http://schemas.openxmlformats.org/officeDocument/2006/relationships" xmlns:p="http://schemas.openxmlformats.org/presentationml/2006/main">
+  <p:cSld>
+    <p:spTree>
+      <p:nvGrpSpPr>
+        <p:cNvPr id="1" name=""/>
+        <p:cNvGrpSpPr/>
+        <p:nvPr/>
+      </p:nvGrpSpPr>
+      <p:grpSpPr>
+        <a:xfrm>
+          <a:off x="0" y="0"/>
+          <a:ext cx="0" cy="0"/>
+          <a:chOff x="0" y="0"/>
+          <a:chExt cx="0" cy="0"/>
+        </a:xfrm>
+      </p:grpSpPr>
+      <p:pic>
+        <p:nvPicPr>
+          <p:cNvPr id="4" name="Picture 3">
+            <a:extLst>
+              <a:ext uri="{FF2B5EF4-FFF2-40B4-BE49-F238E27FC236}">
+                <a16:creationId xmlns:a16="http://schemas.microsoft.com/office/drawing/2014/main" id="{FBC27DC2-3C24-9476-C742-1E871608D304}"/>
+              </a:ext>
+            </a:extLst>
+          </p:cNvPr>
+          <p:cNvPicPr>
+            <a:picLocks noChangeAspect="1"/>
+          </p:cNvPicPr>
+          <p:nvPr/>
+        </p:nvPicPr>
+        <p:blipFill>
+          <a:blip r:embed="rId2"/>
+          <a:stretch>
+            <a:fillRect/>
+          </a:stretch>
+        </p:blipFill>
+        <p:spPr>
+          <a:xfrm>
+            <a:off x="0" y="0"/>
+            <a:ext cx="9144000" cy="6858000"/>
+          </a:xfrm>
+          <a:prstGeom prst="rect">
+            <a:avLst/>
+          </a:prstGeom>
+        </p:spPr>
+      </p:pic>
+      <p:sp>
+        <p:nvSpPr>
+          <p:cNvPr id="2" name="Title 1">
+            <a:extLst>
+              <a:ext uri="{FF2B5EF4-FFF2-40B4-BE49-F238E27FC236}">
+                <a16:creationId xmlns:a16="http://schemas.microsoft.com/office/drawing/2014/main" id="{063C3D49-E56E-FC32-D1CA-682B2EC59A62}"/>
+              </a:ext>
+            </a:extLst>
+          </p:cNvPr>
+          <p:cNvSpPr>
+            <a:spLocks noGrp="1"/>
+          </p:cNvSpPr>
+          <p:nvPr>
+            <p:ph type="title"/>
+          </p:nvPr>
+        </p:nvSpPr>
+        <p:spPr/>
+        <p:txBody>
+          <a:bodyPr>
+            <a:normAutofit/>
+          </a:bodyPr>
+          <a:lstStyle/>
+          <a:p>
+            <a:r>
+              <a:rPr lang="en-US" dirty="0">
+                <a:solidFill>
+                  <a:schemeClr val="bg1"/>
+                </a:solidFill>
+              </a:rPr>
+              <a:t>Aurelia Project Summary</a:t>
+            </a:r>
+          </a:p>
+        </p:txBody>
+      </p:sp>
+      <p:sp>
+        <p:nvSpPr>
+          <p:cNvPr id="3" name="Content Placeholder 2">
+            <a:extLst>
+              <a:ext uri="{FF2B5EF4-FFF2-40B4-BE49-F238E27FC236}">
+                <a16:creationId xmlns:a16="http://schemas.microsoft.com/office/drawing/2014/main" id="{186B3210-7B3A-E9FB-A2D2-E4AEBE6237C5}"/>
+              </a:ext>
+            </a:extLst>
+          </p:cNvPr>
+          <p:cNvSpPr>
+            <a:spLocks noGrp="1"/>
+          </p:cNvSpPr>
+          <p:nvPr>
+            <p:ph idx="1"/>
+          </p:nvPr>
+        </p:nvSpPr>
+        <p:spPr/>
+        <p:txBody>
+          <a:bodyPr/>
+          <a:lstStyle/>
+          <a:p>
+            <a:pPr marL="0" indent="0">
+              <a:buNone/>
+            </a:pPr>
+            <a:r>
+              <a:rPr lang="en-US" dirty="0">
+                <a:solidFill>
+                  <a:schemeClr val="bg1"/>
+                </a:solidFill>
+              </a:rPr>
+              <a:t>Aurelia represents a full-stack solution for cruise management, blending operational control, elegant design, and voyager satisfaction — redefining how cruise services operate in the digital age.</a:t>
+            </a:r>
+          </a:p>
+        </p:txBody>
+      </p:sp>
+    </p:spTree>
+    <p:extLst>
+      <p:ext uri="{BB962C8B-B14F-4D97-AF65-F5344CB8AC3E}">
+        <p14:creationId xmlns:p14="http://schemas.microsoft.com/office/powerpoint/2010/main" val="573363502"/>
+      </p:ext>
+    </p:extLst>
+  </p:cSld>
+  <p:clrMapOvr>
+    <a:masterClrMapping/>
+  </p:clrMapOvr>
+</p:sld>
+</file>
+
+<file path=ppt/slides/slide35.xml><?xml version="1.0" encoding="utf-8"?>
+<p:sld xmlns:a="http://schemas.openxmlformats.org/drawingml/2006/main" xmlns:r="http://schemas.openxmlformats.org/officeDocument/2006/relationships" xmlns:p="http://schemas.openxmlformats.org/presentationml/2006/main">
+  <p:cSld>
+    <p:spTree>
+      <p:nvGrpSpPr>
+        <p:cNvPr id="1" name=""/>
+        <p:cNvGrpSpPr/>
+        <p:nvPr/>
+      </p:nvGrpSpPr>
+      <p:grpSpPr>
+        <a:xfrm>
+          <a:off x="0" y="0"/>
+          <a:ext cx="0" cy="0"/>
+          <a:chOff x="0" y="0"/>
+          <a:chExt cx="0" cy="0"/>
+        </a:xfrm>
+      </p:grpSpPr>
+      <p:pic>
+        <p:nvPicPr>
+          <p:cNvPr id="4" name="Picture 3">
+            <a:extLst>
+              <a:ext uri="{FF2B5EF4-FFF2-40B4-BE49-F238E27FC236}">
+                <a16:creationId xmlns:a16="http://schemas.microsoft.com/office/drawing/2014/main" id="{09A1AF5D-0301-9E74-C4D9-A55371E0F54D}"/>
+              </a:ext>
+            </a:extLst>
+          </p:cNvPr>
+          <p:cNvPicPr>
+            <a:picLocks noChangeAspect="1"/>
+          </p:cNvPicPr>
+          <p:nvPr/>
+        </p:nvPicPr>
+        <p:blipFill>
+          <a:blip r:embed="rId2"/>
+          <a:stretch>
+            <a:fillRect/>
+          </a:stretch>
+        </p:blipFill>
+        <p:spPr>
+          <a:xfrm>
+            <a:off x="0" y="0"/>
+            <a:ext cx="9144000" cy="6858000"/>
+          </a:xfrm>
+          <a:prstGeom prst="rect">
+            <a:avLst/>
+          </a:prstGeom>
+        </p:spPr>
+      </p:pic>
+      <p:sp>
+        <p:nvSpPr>
+          <p:cNvPr id="2" name="Title 1"/>
+          <p:cNvSpPr>
+            <a:spLocks noGrp="1"/>
+          </p:cNvSpPr>
+          <p:nvPr>
+            <p:ph type="title"/>
+          </p:nvPr>
+        </p:nvSpPr>
+        <p:spPr/>
+        <p:txBody>
+          <a:bodyPr/>
+          <a:lstStyle/>
+          <a:p>
+            <a:r>
+              <a:rPr lang="en-US" dirty="0">
+                <a:solidFill>
+                  <a:schemeClr val="bg1"/>
+                </a:solidFill>
+              </a:rPr>
+              <a:t>Thank You</a:t>
+            </a:r>
+            <a:endParaRPr dirty="0">
+              <a:solidFill>
+                <a:schemeClr val="bg1"/>
+              </a:solidFill>
+            </a:endParaRPr>
+          </a:p>
+        </p:txBody>
+      </p:sp>
+      <p:sp>
+        <p:nvSpPr>
+          <p:cNvPr id="3" name="Content Placeholder 2"/>
+          <p:cNvSpPr>
+            <a:spLocks noGrp="1"/>
+          </p:cNvSpPr>
+          <p:nvPr>
+            <p:ph idx="1"/>
+          </p:nvPr>
+        </p:nvSpPr>
+        <p:spPr/>
+        <p:txBody>
+          <a:bodyPr/>
+          <a:lstStyle/>
+          <a:p>
+            <a:r>
+              <a:rPr sz="2000" dirty="0">
+                <a:solidFill>
+                  <a:schemeClr val="bg1"/>
+                </a:solidFill>
+              </a:rPr>
+              <a:t>Cruise Management System - Aurelia</a:t>
+            </a:r>
+          </a:p>
+          <a:p>
+            <a:r>
+              <a:rPr sz="2000" dirty="0">
+                <a:solidFill>
+                  <a:schemeClr val="bg1"/>
+                </a:solidFill>
+              </a:rPr>
+              <a:t>Elegant | Nautical | Luxury | Modern | Minimal</a:t>
+            </a:r>
+            <a:endParaRPr lang="en-US" sz="2000" dirty="0">
+              <a:solidFill>
+                <a:schemeClr val="bg1"/>
+              </a:solidFill>
+            </a:endParaRPr>
+          </a:p>
+          <a:p>
+            <a:pPr>
+              <a:buFont typeface="Arial" panose="020B0604020202020204" pitchFamily="34" charset="0"/>
+              <a:buChar char="•"/>
+              <a:defRPr sz="2000"/>
+            </a:pPr>
+            <a:r>
+              <a:rPr lang="en-US" dirty="0">
+                <a:solidFill>
+                  <a:schemeClr val="bg1"/>
+                </a:solidFill>
+              </a:rPr>
+              <a:t>Thank you for reviewing this weather app project!</a:t>
+            </a:r>
+          </a:p>
+          <a:p>
+            <a:pPr>
+              <a:buFont typeface="Arial" panose="020B0604020202020204" pitchFamily="34" charset="0"/>
+              <a:buChar char="•"/>
+              <a:defRPr sz="2000"/>
+            </a:pPr>
+            <a:r>
+              <a:rPr lang="en-US" dirty="0">
+                <a:solidFill>
+                  <a:schemeClr val="bg1"/>
+                </a:solidFill>
+              </a:rPr>
+              <a:t>Feel free to explore the code on GitHub or test the </a:t>
+            </a:r>
+            <a:r>
+              <a:rPr lang="en-US" dirty="0">
+                <a:solidFill>
+                  <a:schemeClr val="bg1"/>
+                </a:solidFill>
+                <a:hlinkClick r:id="rId3">
+                  <a:extLst>
+                    <a:ext uri="{A12FA001-AC4F-418D-AE19-62706E023703}">
+                      <ahyp:hlinkClr xmlns:ahyp="http://schemas.microsoft.com/office/drawing/2018/hyperlinkcolor" val="tx"/>
+                    </a:ext>
+                  </a:extLst>
+                </a:hlinkClick>
+              </a:rPr>
+              <a:t>Live demo</a:t>
+            </a:r>
+            <a:endParaRPr dirty="0">
+              <a:solidFill>
+                <a:schemeClr val="bg1"/>
+              </a:solidFill>
+            </a:endParaRPr>
           </a:p>
         </p:txBody>
       </p:sp>
@@ -4403,7 +9390,7 @@
 </file>
 
 <file path=ppt/slides/slide4.xml><?xml version="1.0" encoding="utf-8"?>
-<p:sld xmlns:a="http://schemas.openxmlformats.org/drawingml/2006/main" xmlns:p="http://schemas.openxmlformats.org/presentationml/2006/main" xmlns:r="http://schemas.openxmlformats.org/officeDocument/2006/relationships">
+<p:sld xmlns:a="http://schemas.openxmlformats.org/drawingml/2006/main" xmlns:r="http://schemas.openxmlformats.org/officeDocument/2006/relationships" xmlns:p="http://schemas.openxmlformats.org/presentationml/2006/main">
   <p:cSld>
     <p:spTree>
       <p:nvGrpSpPr>
@@ -4411,7 +9398,44 @@
         <p:cNvGrpSpPr/>
         <p:nvPr/>
       </p:nvGrpSpPr>
-      <p:grpSpPr/>
+      <p:grpSpPr>
+        <a:xfrm>
+          <a:off x="0" y="0"/>
+          <a:ext cx="0" cy="0"/>
+          <a:chOff x="0" y="0"/>
+          <a:chExt cx="0" cy="0"/>
+        </a:xfrm>
+      </p:grpSpPr>
+      <p:pic>
+        <p:nvPicPr>
+          <p:cNvPr id="4" name="Picture 3">
+            <a:extLst>
+              <a:ext uri="{FF2B5EF4-FFF2-40B4-BE49-F238E27FC236}">
+                <a16:creationId xmlns:a16="http://schemas.microsoft.com/office/drawing/2014/main" id="{C712FDFB-4CCF-23FE-04A1-654184FDFCBD}"/>
+              </a:ext>
+            </a:extLst>
+          </p:cNvPr>
+          <p:cNvPicPr>
+            <a:picLocks noChangeAspect="1"/>
+          </p:cNvPicPr>
+          <p:nvPr/>
+        </p:nvPicPr>
+        <p:blipFill>
+          <a:blip r:embed="rId2"/>
+          <a:stretch>
+            <a:fillRect/>
+          </a:stretch>
+        </p:blipFill>
+        <p:spPr>
+          <a:xfrm>
+            <a:off x="0" y="0"/>
+            <a:ext cx="9144000" cy="6858000"/>
+          </a:xfrm>
+          <a:prstGeom prst="rect">
+            <a:avLst/>
+          </a:prstGeom>
+        </p:spPr>
+      </p:pic>
       <p:sp>
         <p:nvSpPr>
           <p:cNvPr id="2" name="Title 1"/>
@@ -4428,7 +9452,20 @@
           <a:lstStyle/>
           <a:p>
             <a:r>
-              <a:t>Admin: Gallery Upload</a:t>
+              <a:rPr lang="en-US" dirty="0">
+                <a:solidFill>
+                  <a:schemeClr val="bg1"/>
+                </a:solidFill>
+              </a:rPr>
+              <a:t>Us</a:t>
+            </a:r>
+            <a:r>
+              <a:rPr dirty="0">
+                <a:solidFill>
+                  <a:schemeClr val="bg1"/>
+                </a:solidFill>
+              </a:rPr>
+              <a:t>er Notifications</a:t>
             </a:r>
           </a:p>
         </p:txBody>
@@ -4448,13 +9485,26 @@
           <a:bodyPr/>
           <a:lstStyle/>
           <a:p>
-            <a:r>
-              <a:t>Admin can upload images used in the frontend gallery carousel or content display.</a:t>
+            <a:pPr marL="0" lvl="0" indent="0">
+              <a:buNone/>
+            </a:pPr>
+            <a:r>
+              <a:rPr lang="en-US" dirty="0">
+                <a:solidFill>
+                  <a:schemeClr val="bg1"/>
+                </a:solidFill>
+              </a:rPr>
+              <a:t>Once any section (Party Hall, Salon, Fitness, Catering, Stationary) is accepted, the system automatically sends a notification to the voyager, confirming the date and details.</a:t>
             </a:r>
           </a:p>
         </p:txBody>
       </p:sp>
     </p:spTree>
+    <p:extLst>
+      <p:ext uri="{BB962C8B-B14F-4D97-AF65-F5344CB8AC3E}">
+        <p14:creationId xmlns:p14="http://schemas.microsoft.com/office/powerpoint/2010/main" val="3636713374"/>
+      </p:ext>
+    </p:extLst>
   </p:cSld>
   <p:clrMapOvr>
     <a:masterClrMapping/>
@@ -4463,7 +9513,7 @@
 </file>
 
 <file path=ppt/slides/slide5.xml><?xml version="1.0" encoding="utf-8"?>
-<p:sld xmlns:a="http://schemas.openxmlformats.org/drawingml/2006/main" xmlns:p="http://schemas.openxmlformats.org/presentationml/2006/main" xmlns:r="http://schemas.openxmlformats.org/officeDocument/2006/relationships">
+<p:sld xmlns:a="http://schemas.openxmlformats.org/drawingml/2006/main" xmlns:r="http://schemas.openxmlformats.org/officeDocument/2006/relationships" xmlns:p="http://schemas.openxmlformats.org/presentationml/2006/main">
   <p:cSld>
     <p:spTree>
       <p:nvGrpSpPr>
@@ -4471,7 +9521,44 @@
         <p:cNvGrpSpPr/>
         <p:nvPr/>
       </p:nvGrpSpPr>
-      <p:grpSpPr/>
+      <p:grpSpPr>
+        <a:xfrm>
+          <a:off x="0" y="0"/>
+          <a:ext cx="0" cy="0"/>
+          <a:chOff x="0" y="0"/>
+          <a:chExt cx="0" cy="0"/>
+        </a:xfrm>
+      </p:grpSpPr>
+      <p:pic>
+        <p:nvPicPr>
+          <p:cNvPr id="4" name="Picture 3">
+            <a:extLst>
+              <a:ext uri="{FF2B5EF4-FFF2-40B4-BE49-F238E27FC236}">
+                <a16:creationId xmlns:a16="http://schemas.microsoft.com/office/drawing/2014/main" id="{8246A465-43F5-D397-7D39-4423B44F3BC9}"/>
+              </a:ext>
+            </a:extLst>
+          </p:cNvPr>
+          <p:cNvPicPr>
+            <a:picLocks noChangeAspect="1"/>
+          </p:cNvPicPr>
+          <p:nvPr/>
+        </p:nvPicPr>
+        <p:blipFill>
+          <a:blip r:embed="rId2"/>
+          <a:stretch>
+            <a:fillRect/>
+          </a:stretch>
+        </p:blipFill>
+        <p:spPr>
+          <a:xfrm>
+            <a:off x="0" y="0"/>
+            <a:ext cx="9144000" cy="6858000"/>
+          </a:xfrm>
+          <a:prstGeom prst="rect">
+            <a:avLst/>
+          </a:prstGeom>
+        </p:spPr>
+      </p:pic>
       <p:sp>
         <p:nvSpPr>
           <p:cNvPr id="2" name="Title 1"/>
@@ -4488,7 +9575,20 @@
           <a:lstStyle/>
           <a:p>
             <a:r>
-              <a:t>Admin: Contact Form Visibility</a:t>
+              <a:rPr lang="en-US" dirty="0">
+                <a:solidFill>
+                  <a:schemeClr val="bg1"/>
+                </a:solidFill>
+              </a:rPr>
+              <a:t>Us</a:t>
+            </a:r>
+            <a:r>
+              <a:rPr dirty="0">
+                <a:solidFill>
+                  <a:schemeClr val="bg1"/>
+                </a:solidFill>
+              </a:rPr>
+              <a:t>er Item Ordering</a:t>
             </a:r>
           </a:p>
         </p:txBody>
@@ -4508,13 +9608,47 @@
           <a:bodyPr/>
           <a:lstStyle/>
           <a:p>
-            <a:r>
-              <a:t>Admin can view submissions from the contact form filled by voyagers.</a:t>
-            </a:r>
+            <a:pPr marL="0" indent="0">
+              <a:buNone/>
+            </a:pPr>
+            <a:r>
+              <a:rPr lang="en-US" dirty="0">
+                <a:solidFill>
+                  <a:schemeClr val="bg1"/>
+                </a:solidFill>
+              </a:rPr>
+              <a:t>After logging in, voyagers can explore items, click </a:t>
+            </a:r>
+            <a:r>
+              <a:rPr lang="en-US" b="1" dirty="0">
+                <a:solidFill>
+                  <a:schemeClr val="bg1"/>
+                </a:solidFill>
+              </a:rPr>
+              <a:t>Add to Cart</a:t>
+            </a:r>
+            <a:r>
+              <a:rPr lang="en-US" dirty="0">
+                <a:solidFill>
+                  <a:schemeClr val="bg1"/>
+                </a:solidFill>
+              </a:rPr>
+              <a:t>, and proceed to checkout, making ordering seamless and intuitive.</a:t>
+            </a:r>
+            <a:endParaRPr dirty="0">
+              <a:solidFill>
+                <a:schemeClr val="bg1"/>
+              </a:solidFill>
+            </a:endParaRPr>
           </a:p>
         </p:txBody>
       </p:sp>
     </p:spTree>
+    <p:extLst>
+      <p:ext uri="{BB962C8B-B14F-4D97-AF65-F5344CB8AC3E}">
+        <p14:creationId xmlns:p14="http://schemas.microsoft.com/office/powerpoint/2010/main" val="2883878746"/>
+      </p:ext>
+    </p:extLst>
   </p:cSld>
   <p:clrMapOvr>
     <a:masterClrMapping/>
@@ -4523,7 +9657,7 @@
 </file>
 
 <file path=ppt/slides/slide6.xml><?xml version="1.0" encoding="utf-8"?>
-<p:sld xmlns:a="http://schemas.openxmlformats.org/drawingml/2006/main" xmlns:p="http://schemas.openxmlformats.org/presentationml/2006/main" xmlns:r="http://schemas.openxmlformats.org/officeDocument/2006/relationships">
+<p:sld xmlns:a="http://schemas.openxmlformats.org/drawingml/2006/main" xmlns:r="http://schemas.openxmlformats.org/officeDocument/2006/relationships" xmlns:p="http://schemas.openxmlformats.org/presentationml/2006/main">
   <p:cSld>
     <p:spTree>
       <p:nvGrpSpPr>
@@ -4531,7 +9665,44 @@
         <p:cNvGrpSpPr/>
         <p:nvPr/>
       </p:nvGrpSpPr>
-      <p:grpSpPr/>
+      <p:grpSpPr>
+        <a:xfrm>
+          <a:off x="0" y="0"/>
+          <a:ext cx="0" cy="0"/>
+          <a:chOff x="0" y="0"/>
+          <a:chExt cx="0" cy="0"/>
+        </a:xfrm>
+      </p:grpSpPr>
+      <p:pic>
+        <p:nvPicPr>
+          <p:cNvPr id="4" name="Picture 3">
+            <a:extLst>
+              <a:ext uri="{FF2B5EF4-FFF2-40B4-BE49-F238E27FC236}">
+                <a16:creationId xmlns:a16="http://schemas.microsoft.com/office/drawing/2014/main" id="{9CDDB735-E56B-6ABB-F8B2-DF128741EB85}"/>
+              </a:ext>
+            </a:extLst>
+          </p:cNvPr>
+          <p:cNvPicPr>
+            <a:picLocks noChangeAspect="1"/>
+          </p:cNvPicPr>
+          <p:nvPr/>
+        </p:nvPicPr>
+        <p:blipFill>
+          <a:blip r:embed="rId2"/>
+          <a:stretch>
+            <a:fillRect/>
+          </a:stretch>
+        </p:blipFill>
+        <p:spPr>
+          <a:xfrm>
+            <a:off x="0" y="0"/>
+            <a:ext cx="9144000" cy="6858000"/>
+          </a:xfrm>
+          <a:prstGeom prst="rect">
+            <a:avLst/>
+          </a:prstGeom>
+        </p:spPr>
+      </p:pic>
       <p:sp>
         <p:nvSpPr>
           <p:cNvPr id="2" name="Title 1"/>
@@ -4548,7 +9719,20 @@
           <a:lstStyle/>
           <a:p>
             <a:r>
-              <a:t>User Role Management</a:t>
+              <a:rPr lang="en-US" dirty="0">
+                <a:solidFill>
+                  <a:schemeClr val="bg1"/>
+                </a:solidFill>
+              </a:rPr>
+              <a:t>Us</a:t>
+            </a:r>
+            <a:r>
+              <a:rPr dirty="0">
+                <a:solidFill>
+                  <a:schemeClr val="bg1"/>
+                </a:solidFill>
+              </a:rPr>
+              <a:t>er Booking Experience</a:t>
             </a:r>
           </a:p>
         </p:txBody>
@@ -4568,28 +9752,46 @@
           <a:bodyPr/>
           <a:lstStyle/>
           <a:p>
-            <a:r>
-              <a:t>Admin can create and assign roles:</a:t>
-            </a:r>
-          </a:p>
-          <a:p>
-            <a:r>
-              <a:t>• Manager</a:t>
-            </a:r>
-          </a:p>
-          <a:p>
-            <a:r>
-              <a:t>• Supervisor</a:t>
-            </a:r>
-          </a:p>
-          <a:p>
-            <a:r>
-              <a:t>• Headcook</a:t>
-            </a:r>
+            <a:pPr marL="0" lvl="0" indent="0">
+              <a:buNone/>
+            </a:pPr>
+            <a:r>
+              <a:rPr lang="en-US" dirty="0">
+                <a:solidFill>
+                  <a:schemeClr val="bg1"/>
+                </a:solidFill>
+              </a:rPr>
+              <a:t>Users explore categories and click </a:t>
+            </a:r>
+            <a:r>
+              <a:rPr lang="en-US" b="1" dirty="0">
+                <a:solidFill>
+                  <a:schemeClr val="bg1"/>
+                </a:solidFill>
+              </a:rPr>
+              <a:t>Book Now</a:t>
+            </a:r>
+            <a:r>
+              <a:rPr lang="en-US" dirty="0">
+                <a:solidFill>
+                  <a:schemeClr val="bg1"/>
+                </a:solidFill>
+              </a:rPr>
+              <a:t> to open detailed booking forms, where they can submit date, time, requirements and specific requests.</a:t>
+            </a:r>
+          </a:p>
+          <a:p>
+            <a:pPr lvl="1"/>
+            <a:endParaRPr dirty="0"/>
           </a:p>
         </p:txBody>
       </p:sp>
     </p:spTree>
+    <p:extLst>
+      <p:ext uri="{BB962C8B-B14F-4D97-AF65-F5344CB8AC3E}">
+        <p14:creationId xmlns:p14="http://schemas.microsoft.com/office/powerpoint/2010/main" val="1134297119"/>
+      </p:ext>
+    </p:extLst>
   </p:cSld>
   <p:clrMapOvr>
     <a:masterClrMapping/>
@@ -4598,7 +9800,7 @@
 </file>
 
 <file path=ppt/slides/slide7.xml><?xml version="1.0" encoding="utf-8"?>
-<p:sld xmlns:a="http://schemas.openxmlformats.org/drawingml/2006/main" xmlns:p="http://schemas.openxmlformats.org/presentationml/2006/main" xmlns:r="http://schemas.openxmlformats.org/officeDocument/2006/relationships">
+<p:sld xmlns:a="http://schemas.openxmlformats.org/drawingml/2006/main" xmlns:r="http://schemas.openxmlformats.org/officeDocument/2006/relationships" xmlns:p="http://schemas.openxmlformats.org/presentationml/2006/main">
   <p:cSld>
     <p:spTree>
       <p:nvGrpSpPr>
@@ -4606,7 +9808,44 @@
         <p:cNvGrpSpPr/>
         <p:nvPr/>
       </p:nvGrpSpPr>
-      <p:grpSpPr/>
+      <p:grpSpPr>
+        <a:xfrm>
+          <a:off x="0" y="0"/>
+          <a:ext cx="0" cy="0"/>
+          <a:chOff x="0" y="0"/>
+          <a:chExt cx="0" cy="0"/>
+        </a:xfrm>
+      </p:grpSpPr>
+      <p:pic>
+        <p:nvPicPr>
+          <p:cNvPr id="4" name="Picture 3">
+            <a:extLst>
+              <a:ext uri="{FF2B5EF4-FFF2-40B4-BE49-F238E27FC236}">
+                <a16:creationId xmlns:a16="http://schemas.microsoft.com/office/drawing/2014/main" id="{F132D71F-20D1-D1FB-40E6-1C2DCDD15C07}"/>
+              </a:ext>
+            </a:extLst>
+          </p:cNvPr>
+          <p:cNvPicPr>
+            <a:picLocks noChangeAspect="1"/>
+          </p:cNvPicPr>
+          <p:nvPr/>
+        </p:nvPicPr>
+        <p:blipFill>
+          <a:blip r:embed="rId2"/>
+          <a:stretch>
+            <a:fillRect/>
+          </a:stretch>
+        </p:blipFill>
+        <p:spPr>
+          <a:xfrm>
+            <a:off x="0" y="0"/>
+            <a:ext cx="9144000" cy="6858000"/>
+          </a:xfrm>
+          <a:prstGeom prst="rect">
+            <a:avLst/>
+          </a:prstGeom>
+        </p:spPr>
+      </p:pic>
       <p:sp>
         <p:nvSpPr>
           <p:cNvPr id="2" name="Title 1"/>
@@ -4623,7 +9862,12 @@
           <a:lstStyle/>
           <a:p>
             <a:r>
-              <a:t>User Role Dashboard</a:t>
+              <a:rPr dirty="0">
+                <a:solidFill>
+                  <a:schemeClr val="bg1"/>
+                </a:solidFill>
+              </a:rPr>
+              <a:t>Booking Forms</a:t>
             </a:r>
           </a:p>
         </p:txBody>
@@ -4640,16 +9884,87 @@
         </p:nvSpPr>
         <p:spPr/>
         <p:txBody>
-          <a:bodyPr/>
-          <a:lstStyle/>
-          <a:p>
-            <a:r>
-              <a:t>Each role has access to their personalized dashboard with functionality to update profile details.</a:t>
-            </a:r>
+          <a:bodyPr>
+            <a:normAutofit lnSpcReduction="10000"/>
+          </a:bodyPr>
+          <a:lstStyle/>
+          <a:p>
+            <a:r>
+              <a:rPr dirty="0">
+                <a:solidFill>
+                  <a:schemeClr val="bg1"/>
+                </a:solidFill>
+              </a:rPr>
+              <a:t>Salon: </a:t>
+            </a:r>
+            <a:r>
+              <a:rPr lang="en-US" dirty="0">
+                <a:solidFill>
+                  <a:schemeClr val="bg1"/>
+                </a:solidFill>
+              </a:rPr>
+              <a:t>Salon bookings allow users to choose a time slot, date, and special requests (e.g., stylist, treatments) for a tailored experience.</a:t>
+            </a:r>
+            <a:endParaRPr dirty="0">
+              <a:solidFill>
+                <a:schemeClr val="bg1"/>
+              </a:solidFill>
+            </a:endParaRPr>
+          </a:p>
+          <a:p>
+            <a:r>
+              <a:rPr dirty="0">
+                <a:solidFill>
+                  <a:schemeClr val="bg1"/>
+                </a:solidFill>
+              </a:rPr>
+              <a:t>Party Hall: </a:t>
+            </a:r>
+            <a:r>
+              <a:rPr lang="en-US" dirty="0">
+                <a:solidFill>
+                  <a:schemeClr val="bg1"/>
+                </a:solidFill>
+              </a:rPr>
+              <a:t>Users enter start and end times, date, and detailed requirements, ensuring their event is perfectly arranged by staff.</a:t>
+            </a:r>
+            <a:endParaRPr dirty="0">
+              <a:solidFill>
+                <a:schemeClr val="bg1"/>
+              </a:solidFill>
+            </a:endParaRPr>
+          </a:p>
+          <a:p>
+            <a:r>
+              <a:rPr dirty="0">
+                <a:solidFill>
+                  <a:schemeClr val="bg1"/>
+                </a:solidFill>
+              </a:rPr>
+              <a:t>Fitness: </a:t>
+            </a:r>
+            <a:r>
+              <a:rPr lang="en-US" dirty="0">
+                <a:solidFill>
+                  <a:schemeClr val="bg1"/>
+                </a:solidFill>
+              </a:rPr>
+              <a:t>Users pick desired time slots and select equipment (preconfigured by admin), locking in their fitness session.</a:t>
+            </a:r>
+            <a:endParaRPr dirty="0">
+              <a:solidFill>
+                <a:schemeClr val="bg1"/>
+              </a:solidFill>
+            </a:endParaRPr>
           </a:p>
         </p:txBody>
       </p:sp>
     </p:spTree>
+    <p:extLst>
+      <p:ext uri="{BB962C8B-B14F-4D97-AF65-F5344CB8AC3E}">
+        <p14:creationId xmlns:p14="http://schemas.microsoft.com/office/powerpoint/2010/main" val="2443637767"/>
+      </p:ext>
+    </p:extLst>
   </p:cSld>
   <p:clrMapOvr>
     <a:masterClrMapping/>
@@ -4658,7 +9973,7 @@
 </file>
 
 <file path=ppt/slides/slide8.xml><?xml version="1.0" encoding="utf-8"?>
-<p:sld xmlns:a="http://schemas.openxmlformats.org/drawingml/2006/main" xmlns:p="http://schemas.openxmlformats.org/presentationml/2006/main" xmlns:r="http://schemas.openxmlformats.org/officeDocument/2006/relationships">
+<p:sld xmlns:a="http://schemas.openxmlformats.org/drawingml/2006/main" xmlns:r="http://schemas.openxmlformats.org/officeDocument/2006/relationships" xmlns:p="http://schemas.openxmlformats.org/presentationml/2006/main">
   <p:cSld>
     <p:spTree>
       <p:nvGrpSpPr>
@@ -4666,7 +9981,44 @@
         <p:cNvGrpSpPr/>
         <p:nvPr/>
       </p:nvGrpSpPr>
-      <p:grpSpPr/>
+      <p:grpSpPr>
+        <a:xfrm>
+          <a:off x="0" y="0"/>
+          <a:ext cx="0" cy="0"/>
+          <a:chOff x="0" y="0"/>
+          <a:chExt cx="0" cy="0"/>
+        </a:xfrm>
+      </p:grpSpPr>
+      <p:pic>
+        <p:nvPicPr>
+          <p:cNvPr id="4" name="Picture 3">
+            <a:extLst>
+              <a:ext uri="{FF2B5EF4-FFF2-40B4-BE49-F238E27FC236}">
+                <a16:creationId xmlns:a16="http://schemas.microsoft.com/office/drawing/2014/main" id="{2EEB5B95-F4EB-1F18-122B-C5F058AEF328}"/>
+              </a:ext>
+            </a:extLst>
+          </p:cNvPr>
+          <p:cNvPicPr>
+            <a:picLocks noChangeAspect="1"/>
+          </p:cNvPicPr>
+          <p:nvPr/>
+        </p:nvPicPr>
+        <p:blipFill>
+          <a:blip r:embed="rId2"/>
+          <a:stretch>
+            <a:fillRect/>
+          </a:stretch>
+        </p:blipFill>
+        <p:spPr>
+          <a:xfrm>
+            <a:off x="0" y="0"/>
+            <a:ext cx="9144000" cy="6858000"/>
+          </a:xfrm>
+          <a:prstGeom prst="rect">
+            <a:avLst/>
+          </a:prstGeom>
+        </p:spPr>
+      </p:pic>
       <p:sp>
         <p:nvSpPr>
           <p:cNvPr id="2" name="Title 1"/>
@@ -4683,7 +10035,12 @@
           <a:lstStyle/>
           <a:p>
             <a:r>
-              <a:t>Manager Functionalities</a:t>
+              <a:rPr dirty="0">
+                <a:solidFill>
+                  <a:schemeClr val="bg1"/>
+                </a:solidFill>
+              </a:rPr>
+              <a:t>Movie Booking System</a:t>
             </a:r>
           </a:p>
         </p:txBody>
@@ -4703,18 +10060,31 @@
           <a:bodyPr/>
           <a:lstStyle/>
           <a:p>
-            <a:r>
-              <a:t>• Accept bookings for Party Hall, Salon, and Fitness</a:t>
-            </a:r>
-          </a:p>
-          <a:p>
-            <a:r>
-              <a:t>• View movie booking details</a:t>
-            </a:r>
+            <a:pPr marL="0" indent="0">
+              <a:buNone/>
+            </a:pPr>
+            <a:r>
+              <a:rPr lang="en-US" dirty="0">
+                <a:solidFill>
+                  <a:schemeClr val="bg1"/>
+                </a:solidFill>
+              </a:rPr>
+              <a:t>Users can select movie date, time, number of seats, specific seat numbers, and food items, then confirm their booking in one smooth flow.</a:t>
+            </a:r>
+            <a:endParaRPr dirty="0">
+              <a:solidFill>
+                <a:schemeClr val="bg1"/>
+              </a:solidFill>
+            </a:endParaRPr>
           </a:p>
         </p:txBody>
       </p:sp>
     </p:spTree>
+    <p:extLst>
+      <p:ext uri="{BB962C8B-B14F-4D97-AF65-F5344CB8AC3E}">
+        <p14:creationId xmlns:p14="http://schemas.microsoft.com/office/powerpoint/2010/main" val="1745613245"/>
+      </p:ext>
+    </p:extLst>
   </p:cSld>
   <p:clrMapOvr>
     <a:masterClrMapping/>
@@ -4723,7 +10093,7 @@
 </file>
 
 <file path=ppt/slides/slide9.xml><?xml version="1.0" encoding="utf-8"?>
-<p:sld xmlns:a="http://schemas.openxmlformats.org/drawingml/2006/main" xmlns:p="http://schemas.openxmlformats.org/presentationml/2006/main" xmlns:r="http://schemas.openxmlformats.org/officeDocument/2006/relationships">
+<p:sld xmlns:a="http://schemas.openxmlformats.org/drawingml/2006/main" xmlns:r="http://schemas.openxmlformats.org/officeDocument/2006/relationships" xmlns:p="http://schemas.openxmlformats.org/presentationml/2006/main">
   <p:cSld>
     <p:spTree>
       <p:nvGrpSpPr>
@@ -4731,7 +10101,44 @@
         <p:cNvGrpSpPr/>
         <p:nvPr/>
       </p:nvGrpSpPr>
-      <p:grpSpPr/>
+      <p:grpSpPr>
+        <a:xfrm>
+          <a:off x="0" y="0"/>
+          <a:ext cx="0" cy="0"/>
+          <a:chOff x="0" y="0"/>
+          <a:chExt cx="0" cy="0"/>
+        </a:xfrm>
+      </p:grpSpPr>
+      <p:pic>
+        <p:nvPicPr>
+          <p:cNvPr id="4" name="Picture 3">
+            <a:extLst>
+              <a:ext uri="{FF2B5EF4-FFF2-40B4-BE49-F238E27FC236}">
+                <a16:creationId xmlns:a16="http://schemas.microsoft.com/office/drawing/2014/main" id="{2282CD16-2AF5-3CB4-1DC3-858A744F0AB7}"/>
+              </a:ext>
+            </a:extLst>
+          </p:cNvPr>
+          <p:cNvPicPr>
+            <a:picLocks noChangeAspect="1"/>
+          </p:cNvPicPr>
+          <p:nvPr/>
+        </p:nvPicPr>
+        <p:blipFill>
+          <a:blip r:embed="rId2"/>
+          <a:stretch>
+            <a:fillRect/>
+          </a:stretch>
+        </p:blipFill>
+        <p:spPr>
+          <a:xfrm>
+            <a:off x="0" y="0"/>
+            <a:ext cx="9144000" cy="6858000"/>
+          </a:xfrm>
+          <a:prstGeom prst="rect">
+            <a:avLst/>
+          </a:prstGeom>
+        </p:spPr>
+      </p:pic>
       <p:sp>
         <p:nvSpPr>
           <p:cNvPr id="2" name="Title 1"/>
@@ -4748,7 +10155,12 @@
           <a:lstStyle/>
           <a:p>
             <a:r>
-              <a:t>Headcook Functionalities</a:t>
+              <a:rPr dirty="0">
+                <a:solidFill>
+                  <a:schemeClr val="bg1"/>
+                </a:solidFill>
+              </a:rPr>
+              <a:t>Booking Status Display</a:t>
             </a:r>
           </a:p>
         </p:txBody>
@@ -4768,13 +10180,47 @@
           <a:bodyPr/>
           <a:lstStyle/>
           <a:p>
-            <a:r>
-              <a:t>• Accept catering orders placed by voyagers</a:t>
-            </a:r>
+            <a:pPr marL="0" indent="0">
+              <a:buNone/>
+            </a:pPr>
+            <a:r>
+              <a:rPr lang="en-US" dirty="0">
+                <a:solidFill>
+                  <a:schemeClr val="bg1"/>
+                </a:solidFill>
+              </a:rPr>
+              <a:t>Us</a:t>
+            </a:r>
+            <a:r>
+              <a:rPr dirty="0">
+                <a:solidFill>
+                  <a:schemeClr val="bg1"/>
+                </a:solidFill>
+              </a:rPr>
+              <a:t>ers can see booking status (Booked / Accepted) after submitting requests</a:t>
+            </a:r>
+            <a:r>
+              <a:rPr lang="en-US" dirty="0">
+                <a:solidFill>
+                  <a:schemeClr val="bg1"/>
+                </a:solidFill>
+              </a:rPr>
+              <a:t>.</a:t>
+            </a:r>
+            <a:endParaRPr dirty="0">
+              <a:solidFill>
+                <a:schemeClr val="bg1"/>
+              </a:solidFill>
+            </a:endParaRPr>
           </a:p>
         </p:txBody>
       </p:sp>
     </p:spTree>
+    <p:extLst>
+      <p:ext uri="{BB962C8B-B14F-4D97-AF65-F5344CB8AC3E}">
+        <p14:creationId xmlns:p14="http://schemas.microsoft.com/office/powerpoint/2010/main" val="3917634215"/>
+      </p:ext>
+    </p:extLst>
   </p:cSld>
   <p:clrMapOvr>
     <a:masterClrMapping/>
@@ -5100,4 +10546,47 @@
   </a:objectDefaults>
   <a:extraClrSchemeLst/>
 </a:theme>
+</file>
+
+<file path=ppt/theme/themeOverride1.xml><?xml version="1.0" encoding="utf-8"?>
+<a:themeOverride xmlns:a="http://schemas.openxmlformats.org/drawingml/2006/main">
+  <a:clrScheme name="Office">
+    <a:dk1>
+      <a:sysClr val="windowText" lastClr="000000"/>
+    </a:dk1>
+    <a:lt1>
+      <a:sysClr val="window" lastClr="FFFFFF"/>
+    </a:lt1>
+    <a:dk2>
+      <a:srgbClr val="1F497D"/>
+    </a:dk2>
+    <a:lt2>
+      <a:srgbClr val="EEECE1"/>
+    </a:lt2>
+    <a:accent1>
+      <a:srgbClr val="4F81BD"/>
+    </a:accent1>
+    <a:accent2>
+      <a:srgbClr val="C0504D"/>
+    </a:accent2>
+    <a:accent3>
+      <a:srgbClr val="9BBB59"/>
+    </a:accent3>
+    <a:accent4>
+      <a:srgbClr val="8064A2"/>
+    </a:accent4>
+    <a:accent5>
+      <a:srgbClr val="4BACC6"/>
+    </a:accent5>
+    <a:accent6>
+      <a:srgbClr val="F79646"/>
+    </a:accent6>
+    <a:hlink>
+      <a:srgbClr val="0000FF"/>
+    </a:hlink>
+    <a:folHlink>
+      <a:srgbClr val="800080"/>
+    </a:folHlink>
+  </a:clrScheme>
+</a:themeOverride>
 </file>